--- a/me323/Module1_drafts/ME323_Module1_Lecture1.pptx
+++ b/me323/Module1_drafts/ME323_Module1_Lecture1.pptx
@@ -3340,7 +3340,7 @@
                 </a:solidFill>
                 <a:latin typeface="Calibri"/>
               </a:rPr>
-              <a:t>Bending-shear interaction (empirical surrogate)</a:t>
+              <a:t>Flange-web separation: shear flow at the printed junction</a:t>
             </a:r>
           </a:p>
         </p:txBody>
@@ -3391,7 +3391,7 @@
       </p:sp>
       <p:pic>
         <p:nvPicPr>
-          <p:cNvPr id="4" name="Picture 3" descr="shear.png"/>
+          <p:cNvPr id="4" name="Picture 3" descr="sepflow.png"/>
           <p:cNvPicPr>
             <a:picLocks noChangeAspect="1"/>
           </p:cNvPicPr>
@@ -3405,8 +3405,8 @@
         </p:blipFill>
         <p:spPr>
           <a:xfrm>
-            <a:off x="4474978" y="1371600"/>
-            <a:ext cx="3241738" cy="777240"/>
+            <a:off x="2986887" y="1371600"/>
+            <a:ext cx="6217920" cy="777240"/>
           </a:xfrm>
           <a:prstGeom prst="rect">
             <a:avLst/>
@@ -3471,7 +3471,7 @@
                 </a:solidFill>
                 <a:latin typeface="Calibri"/>
               </a:rPr>
-              <a:t>Outer-fiber bending and whole-web average shear combine through an empirical interaction surrogate, not a pointwise von Mises check.</a:t>
+              <a:t>Every observed shear-type failure is a flange peeling off the web. The stress on that plane is the classic built-up-beam shear flow (V = P/2).</a:t>
             </a:r>
           </a:p>
         </p:txBody>
@@ -3536,7 +3536,7 @@
                 </a:solidFill>
                 <a:latin typeface="Calibri"/>
               </a:rPr>
-              <a:t>What the interaction surrogate assumes</a:t>
+              <a:t>What the separation check assumes</a:t>
             </a:r>
           </a:p>
         </p:txBody>
@@ -3619,7 +3619,7 @@
                 </a:solidFill>
                 <a:latin typeface="Calibri"/>
               </a:rPr>
-              <a:t>The surrogate borrows von-Mises-shaped algebra, but its two stress summaries occur at different cross-section locations. Fitted c_s is a calibration knob, not a material constant.</a:t>
+              <a:t>The stress measure is textbook mechanics — the same glue-line check used for any built-up member.</a:t>
             </a:r>
           </a:p>
           <a:p>
@@ -3635,7 +3635,7 @@
                 </a:solidFill>
                 <a:latin typeface="Calibri"/>
               </a:rPr>
-              <a:t>Printed PLA has another option: crack along the layer lines and let go at once.</a:t>
+              <a:t>The strength side is not: tau_i is the bond strength along the printed layer lines, weaker than the bulk plastic, listed in no handbook.</a:t>
             </a:r>
           </a:p>
           <a:p>
@@ -3651,7 +3651,23 @@
                 </a:solidFill>
                 <a:latin typeface="Calibri"/>
               </a:rPr>
-              <a:t>The surrogate predicts a capacity trend, not a fracture diagnosis. Pre-lab 1 compares it with a co-located My/I + VQ/(It) first-yield check.</a:t>
+              <a:t>Pre-lab 1 starts it at the bulk guess sigma_y/sqrt(3) = 43.9 MPa and calibrates it from the data — it lands near 18 MPa, and it drifts with print session and support condition.</a:t>
+            </a:r>
+          </a:p>
+          <a:p>
+            <a:pPr algn="l">
+              <a:spcAft>
+                <a:spcPts val="1200"/>
+              </a:spcAft>
+            </a:pPr>
+            <a:r>
+              <a:rPr sz="2200" b="0">
+                <a:solidFill>
+                  <a:srgbClr val="0B0B0B"/>
+                </a:solidFill>
+                <a:latin typeface="Calibri"/>
+              </a:rPr>
+              <a:t>The check predicts a capacity trend on one candidate plane. It is a dominant-mode proxy, not a fracture diagnosis.</a:t>
             </a:r>
           </a:p>
         </p:txBody>
@@ -5222,7 +5238,7 @@
                 </a:solidFill>
                 <a:latin typeface="Calibri"/>
               </a:rPr>
-              <a:t>Since M_cr ~ 1/k^2, a small change swings LTB hard. k does not transfer between fixtures: confirm it on ours before betting on the LTB-corner optimum.</a:t>
+              <a:t>Since M_cr ~ 1/k^2, a small change swings LTB hard — and the calibrated equation optimum sits on a bend-LTB knife edge (capacities within ~1%). k does not transfer between fixtures: confirm it on ours before betting on that optimum.</a:t>
             </a:r>
           </a:p>
         </p:txBody>
@@ -5352,8 +5368,8 @@
         </p:blipFill>
         <p:spPr>
           <a:xfrm>
-            <a:off x="3172405" y="1371600"/>
-            <a:ext cx="5846884" cy="4343400"/>
+            <a:off x="3088878" y="1371600"/>
+            <a:ext cx="6013938" cy="4343400"/>
           </a:xfrm>
           <a:prstGeom prst="rect">
             <a:avLst/>
@@ -5394,7 +5410,7 @@
                 </a:solidFill>
                 <a:latin typeface="Calibri"/>
               </a:rPr>
-              <a:t>Tall thin webs tip (LTB). Short thin webs are interaction/shear-limited. The middle bends.</a:t>
+              <a:t>Tall thin webs tip (LTB). Short thin webs are separation-limited: junction shear flow beats the layer-line bond. The middle bends.</a:t>
             </a:r>
           </a:p>
         </p:txBody>
@@ -5932,8 +5948,8 @@
         </p:blipFill>
         <p:spPr>
           <a:xfrm>
-            <a:off x="3005351" y="1371600"/>
-            <a:ext cx="6180992" cy="4343400"/>
+            <a:off x="792327" y="1371600"/>
+            <a:ext cx="10607040" cy="4242816"/>
           </a:xfrm>
           <a:prstGeom prst="rect">
             <a:avLst/>
@@ -5948,7 +5964,7 @@
         </p:nvSpPr>
         <p:spPr>
           <a:xfrm>
-            <a:off x="822960" y="5788152"/>
+            <a:off x="822960" y="5687568"/>
             <a:ext cx="10607040" cy="548640"/>
           </a:xfrm>
           <a:prstGeom prst="rect">
@@ -5974,7 +5990,7 @@
                 </a:solidFill>
                 <a:latin typeface="Calibri"/>
               </a:rPr>
-              <a:t>Illustration: handbook k = 0.33 versus textbook k = 1. Class calibration gives k = 0.377 and equation optimum (1.25, 13.40).</a:t>
+              <a:t>Illustration: handbook starting values versus the class calibration (66.8 MPa, k = 0.377, tau_i = 17.9 MPa), which moves the equation optimum to (1.25, 13.20).</a:t>
             </a:r>
           </a:p>
         </p:txBody>
@@ -6382,7 +6398,7 @@
                 </a:solidFill>
                 <a:latin typeface="Calibri"/>
               </a:rPr>
-              <a:t>•  code flexural yield and the average-web-shear interaction surrogate,</a:t>
+              <a:t>•  code flexural yield and the junction shear-flow separation check (start tau_i at the bulk guess 43.9 MPa),</a:t>
             </a:r>
           </a:p>
           <a:p>
@@ -6398,7 +6414,7 @@
                 </a:solidFill>
                 <a:latin typeface="Calibri"/>
               </a:rPr>
-              <a:t>•  compare dominant-mode proxies with measured strengths and failure notes,</a:t>
+              <a:t>•  compare dominant-mode proxies with measured strengths and failure notes, then calibrate (sigma_y, k, tau_i),</a:t>
             </a:r>
           </a:p>
           <a:p>
@@ -6727,7 +6743,7 @@
                 </a:solidFill>
                 <a:latin typeface="Calibri"/>
               </a:rPr>
-              <a:t>•  Printed beams can fracture along the layer lines: a sudden break, at a load no textbook equation predicts.</a:t>
+              <a:t>•  Printed beams can fracture along the layer lines: the flange peels off the web at a printed interface whose strength appears in no handbook.</a:t>
             </a:r>
           </a:p>
           <a:p>
@@ -6775,7 +6791,7 @@
                 </a:solidFill>
                 <a:latin typeface="Calibri"/>
               </a:rPr>
-              <a:t>The equations narrow the problem. They do not solve it.</a:t>
+              <a:t>We will price the layer-line mode with one calibrated number — but that number drifts with print session and support condition, and the other two problems remain. The equations narrow the problem. They do not solve it.</a:t>
             </a:r>
           </a:p>
         </p:txBody>
@@ -6939,7 +6955,7 @@
                 </a:solidFill>
                 <a:latin typeface="Calibri"/>
               </a:rPr>
-              <a:t>•  Interaction / shear proxy: outer-fiber bending is combined with whole-web average shear.</a:t>
+              <a:t>•  Flange-web separation: the shear flow at the printed junction exceeds the layer-line bond strength.</a:t>
             </a:r>
           </a:p>
           <a:p>
@@ -6971,7 +6987,7 @@
                 </a:solidFill>
                 <a:latin typeface="Calibri"/>
               </a:rPr>
-              <a:t>The empirical interaction branch is capped by LTB. The dominant-mode label is a model proxy, not proof of the observed fracture.</a:t>
+              <a:t>The class capacity is the plain minimum of the three. The dominant-mode label is a model proxy, not proof of the observed fracture.</a:t>
             </a:r>
           </a:p>
         </p:txBody>
@@ -7739,7 +7755,7 @@
                 </a:solidFill>
                 <a:latin typeface="Calibri"/>
               </a:rPr>
-              <a:t>•  a web too thin to carry shear (or to hold together as it prints),</a:t>
+              <a:t>•  a flange-web junction too thin to carry the shear flow — the printed layer-line bond lets go,</a:t>
             </a:r>
           </a:p>
           <a:p>

--- a/me323/Module1_drafts/ME323_Module1_Lecture1.pptx
+++ b/me323/Module1_drafts/ME323_Module1_Lecture1.pptx
@@ -4085,6 +4085,22 @@
               <a:t>The next four slides open up every symbol, because LTB decides your optimum and rests on the most assumptions.</a:t>
             </a:r>
           </a:p>
+          <a:p>
+            <a:pPr algn="ctr">
+              <a:spcAft>
+                <a:spcPts val="1000"/>
+              </a:spcAft>
+            </a:pPr>
+            <a:r>
+              <a:rPr sz="1900" b="0">
+                <a:solidFill>
+                  <a:srgbClr val="0B0B0B"/>
+                </a:solidFill>
+                <a:latin typeface="Calibri"/>
+              </a:rPr>
+              <a:t>You will not re-derive any of it: P_LTB arrives pre-coded in Pre-lab 1. The goal is to read that code knowing what each symbol assumes.</a:t>
+            </a:r>
+          </a:p>
         </p:txBody>
       </p:sp>
     </p:spTree>
@@ -6446,7 +6462,7 @@
                 </a:solidFill>
                 <a:latin typeface="Calibri"/>
               </a:rPr>
-              <a:t>The beam you find there is one of your two ground-truth queries later. Bring questions.</a:t>
+              <a:t>The design you find there becomes one of the class's two ground-truth queries later — the pre-lab explains how those queries work. Bring questions.</a:t>
             </a:r>
           </a:p>
         </p:txBody>

--- a/me323/Module1_drafts/ME323_Module1_Lecture1.pptx
+++ b/me323/Module1_drafts/ME323_Module1_Lecture1.pptx
@@ -28,6 +28,8 @@
     <p:sldId id="276" r:id="rId27"/>
     <p:sldId id="277" r:id="rId28"/>
     <p:sldId id="278" r:id="rId29"/>
+    <p:sldId id="279" r:id="rId30"/>
+    <p:sldId id="280" r:id="rId31"/>
   </p:sldIdLst>
   <p:sldSz cx="12191695" cy="6858000" type="screen4x3"/>
   <p:notesSz cx="6858000" cy="9144000"/>
@@ -5319,7 +5321,7 @@
                 </a:solidFill>
                 <a:latin typeface="Calibri"/>
               </a:rPr>
-              <a:t>Which mode drives?</a:t>
+              <a:t>LTB: what you must own, and what is background</a:t>
             </a:r>
           </a:p>
         </p:txBody>
@@ -5368,40 +5370,16 @@
           </a:p>
         </p:txBody>
       </p:sp>
-      <p:pic>
-        <p:nvPicPr>
-          <p:cNvPr id="4" name="Picture 3" descr="fig_failure_mode_map.png"/>
-          <p:cNvPicPr>
-            <a:picLocks noChangeAspect="1"/>
-          </p:cNvPicPr>
-          <p:nvPr/>
-        </p:nvPicPr>
-        <p:blipFill>
-          <a:blip r:embed="rId2"/>
-          <a:stretch>
-            <a:fillRect/>
-          </a:stretch>
-        </p:blipFill>
-        <p:spPr>
-          <a:xfrm>
-            <a:off x="3088878" y="1371600"/>
-            <a:ext cx="6013938" cy="4343400"/>
-          </a:xfrm>
-          <a:prstGeom prst="rect">
-            <a:avLst/>
-          </a:prstGeom>
-        </p:spPr>
-      </p:pic>
-      <p:sp>
-        <p:nvSpPr>
-          <p:cNvPr id="5" name="TextBox 4"/>
+      <p:sp>
+        <p:nvSpPr>
+          <p:cNvPr id="4" name="TextBox 3"/>
           <p:cNvSpPr txBox="1"/>
           <p:nvPr/>
         </p:nvSpPr>
         <p:spPr>
           <a:xfrm>
-            <a:off x="822960" y="5788152"/>
-            <a:ext cx="10607040" cy="548640"/>
+            <a:off x="868680" y="1554480"/>
+            <a:ext cx="10424160" cy="4754880"/>
           </a:xfrm>
           <a:prstGeom prst="rect">
             <a:avLst/>
@@ -5414,19 +5392,83 @@
           </a:bodyPr>
           <a:lstStyle/>
           <a:p>
-            <a:pPr algn="ctr">
-              <a:spcAft>
-                <a:spcPts val="600"/>
-              </a:spcAft>
-            </a:pPr>
-            <a:r>
-              <a:rPr sz="1500" b="0">
-                <a:solidFill>
-                  <a:srgbClr val="0B0B0B"/>
-                </a:solidFill>
-                <a:latin typeface="Calibri"/>
-              </a:rPr>
-              <a:t>Tall thin webs tip (LTB). Short thin webs are separation-limited: junction shear flow beats the layer-line bond. The middle bends.</a:t>
+            <a:pPr algn="l">
+              <a:spcAft>
+                <a:spcPts val="1200"/>
+              </a:spcAft>
+            </a:pPr>
+            <a:r>
+              <a:rPr sz="1900" b="0">
+                <a:solidFill>
+                  <a:srgbClr val="0B0B0B"/>
+                </a:solidFill>
+                <a:latin typeface="Calibri"/>
+              </a:rPr>
+              <a:t>You just saw Iy, J, Cw, warping, load height, and effective length. Here is exactly what you are responsible for:</a:t>
+            </a:r>
+          </a:p>
+          <a:p>
+            <a:pPr algn="l" lvl="1">
+              <a:spcAft>
+                <a:spcPts val="1200"/>
+              </a:spcAft>
+            </a:pPr>
+            <a:r>
+              <a:rPr sz="1700" b="0">
+                <a:solidFill>
+                  <a:srgbClr val="0B0B0B"/>
+                </a:solidFill>
+                <a:latin typeface="Calibri"/>
+              </a:rPr>
+              <a:t>•  Yours: what LTB is (a tall thin web tipping sideways before the material yields), when it competes (thin b, large H_web), what k means physically, and why a calibrated k does not transfer between fixtures.</a:t>
+            </a:r>
+          </a:p>
+          <a:p>
+            <a:pPr algn="l" lvl="1">
+              <a:spcAft>
+                <a:spcPts val="1200"/>
+              </a:spcAft>
+            </a:pPr>
+            <a:r>
+              <a:rPr sz="1700" b="0">
+                <a:solidFill>
+                  <a:srgbClr val="0B0B0B"/>
+                </a:solidFill>
+                <a:latin typeface="Calibri"/>
+              </a:rPr>
+              <a:t>•  Yours: reading the capacity plot — which branch governs where, and how much margin the runner-up has.</a:t>
+            </a:r>
+          </a:p>
+          <a:p>
+            <a:pPr algn="l" lvl="1">
+              <a:spcAft>
+                <a:spcPts val="1200"/>
+              </a:spcAft>
+            </a:pPr>
+            <a:r>
+              <a:rPr sz="1700" b="0">
+                <a:solidFill>
+                  <a:srgbClr val="0B0B0B"/>
+                </a:solidFill>
+                <a:latin typeface="Calibri"/>
+              </a:rPr>
+              <a:t>•  Background: deriving Iy, J, Cw, or the Mcr formula. The code is supplied; you will never derive or re-implement it in this module.</a:t>
+            </a:r>
+          </a:p>
+          <a:p>
+            <a:pPr algn="l">
+              <a:spcAft>
+                <a:spcPts val="1200"/>
+              </a:spcAft>
+            </a:pPr>
+            <a:r>
+              <a:rPr sz="1900" b="0">
+                <a:solidFill>
+                  <a:srgbClr val="0B0B0B"/>
+                </a:solidFill>
+                <a:latin typeface="Calibri"/>
+              </a:rPr>
+              <a:t>The test of understanding is not the derivation. It is: what happens to the LTB branch if the fixture braces the compression flange, and would you still trust the equation optimum?</a:t>
             </a:r>
           </a:p>
         </p:txBody>
@@ -5687,7 +5729,7 @@
                 </a:solidFill>
                 <a:latin typeface="Calibri"/>
               </a:rPr>
-              <a:t>Does the theory match the data?</a:t>
+              <a:t>Which mode drives?</a:t>
             </a:r>
           </a:p>
         </p:txBody>
@@ -5736,16 +5778,40 @@
           </a:p>
         </p:txBody>
       </p:sp>
-      <p:sp>
-        <p:nvSpPr>
-          <p:cNvPr id="4" name="TextBox 3"/>
+      <p:pic>
+        <p:nvPicPr>
+          <p:cNvPr id="4" name="Picture 3" descr="fig_failure_mode_map.png"/>
+          <p:cNvPicPr>
+            <a:picLocks noChangeAspect="1"/>
+          </p:cNvPicPr>
+          <p:nvPr/>
+        </p:nvPicPr>
+        <p:blipFill>
+          <a:blip r:embed="rId2"/>
+          <a:stretch>
+            <a:fillRect/>
+          </a:stretch>
+        </p:blipFill>
+        <p:spPr>
+          <a:xfrm>
+            <a:off x="3088878" y="1371600"/>
+            <a:ext cx="6013938" cy="4343400"/>
+          </a:xfrm>
+          <a:prstGeom prst="rect">
+            <a:avLst/>
+          </a:prstGeom>
+        </p:spPr>
+      </p:pic>
+      <p:sp>
+        <p:nvSpPr>
+          <p:cNvPr id="5" name="TextBox 4"/>
           <p:cNvSpPr txBox="1"/>
           <p:nvPr/>
         </p:nvSpPr>
         <p:spPr>
           <a:xfrm>
-            <a:off x="868680" y="1554480"/>
-            <a:ext cx="10424160" cy="4754880"/>
+            <a:off x="822960" y="5788152"/>
+            <a:ext cx="10607040" cy="548640"/>
           </a:xfrm>
           <a:prstGeom prst="rect">
             <a:avLst/>
@@ -5758,83 +5824,19 @@
           </a:bodyPr>
           <a:lstStyle/>
           <a:p>
-            <a:pPr algn="l">
-              <a:spcAft>
-                <a:spcPts val="1200"/>
-              </a:spcAft>
-            </a:pPr>
-            <a:r>
-              <a:rPr sz="2000" b="0">
-                <a:solidFill>
-                  <a:srgbClr val="0B0B0B"/>
-                </a:solidFill>
-                <a:latin typeface="Calibri"/>
-              </a:rPr>
-              <a:t>Pre-lab 1 answers this with your beam dataset: compute each beam's predicted capacity and mode, then plot predictions against measurements.</a:t>
-            </a:r>
-          </a:p>
-          <a:p>
-            <a:pPr algn="l">
-              <a:spcAft>
-                <a:spcPts val="1200"/>
-              </a:spcAft>
-            </a:pPr>
-            <a:r>
-              <a:rPr sz="2000" b="0">
-                <a:solidFill>
-                  <a:srgbClr val="0B0B0B"/>
-                </a:solidFill>
-                <a:latin typeface="Calibri"/>
-              </a:rPr>
-              <a:t>Watch for two things:</a:t>
-            </a:r>
-          </a:p>
-          <a:p>
-            <a:pPr algn="l" lvl="1">
-              <a:spcAft>
-                <a:spcPts val="1200"/>
-              </a:spcAft>
-            </a:pPr>
-            <a:r>
-              <a:rPr sz="1800" b="0">
-                <a:solidFill>
-                  <a:srgbClr val="0B0B0B"/>
-                </a:solidFill>
-                <a:latin typeface="Calibri"/>
-              </a:rPr>
-              <a:t>•  Points below the line: beams that broke before the equations said they would.</a:t>
-            </a:r>
-          </a:p>
-          <a:p>
-            <a:pPr algn="l" lvl="1">
-              <a:spcAft>
-                <a:spcPts val="1200"/>
-              </a:spcAft>
-            </a:pPr>
-            <a:r>
-              <a:rPr sz="1800" b="0">
-                <a:solidFill>
-                  <a:srgbClr val="0B0B0B"/>
-                </a:solidFill>
-                <a:latin typeface="Calibri"/>
-              </a:rPr>
-              <a:t>•  Beams whose recorded failure looks nothing like the predicted mode.</a:t>
-            </a:r>
-          </a:p>
-          <a:p>
-            <a:pPr algn="l">
-              <a:spcAft>
-                <a:spcPts val="1200"/>
-              </a:spcAft>
-            </a:pPr>
-            <a:r>
-              <a:rPr sz="2000" b="0">
-                <a:solidFill>
-                  <a:srgbClr val="0B0B0B"/>
-                </a:solidFill>
-                <a:latin typeface="Calibri"/>
-              </a:rPr>
-              <a:t>[Placeholder: parity plot from the 44-beam dataset once strength_N lands.]</a:t>
+            <a:pPr algn="ctr">
+              <a:spcAft>
+                <a:spcPts val="600"/>
+              </a:spcAft>
+            </a:pPr>
+            <a:r>
+              <a:rPr sz="1500" b="0">
+                <a:solidFill>
+                  <a:srgbClr val="0B0B0B"/>
+                </a:solidFill>
+                <a:latin typeface="Calibri"/>
+              </a:rPr>
+              <a:t>Tall thin webs tip (LTB). Short thin webs are separation-limited: junction shear flow beats the layer-line bond. The middle bends.</a:t>
             </a:r>
           </a:p>
         </p:txBody>
@@ -5899,7 +5901,7 @@
                 </a:solidFill>
                 <a:latin typeface="Calibri"/>
               </a:rPr>
-              <a:t>One assumption, two different beams</a:t>
+              <a:t>Does the theory match the data?</a:t>
             </a:r>
           </a:p>
         </p:txBody>
@@ -5948,40 +5950,16 @@
           </a:p>
         </p:txBody>
       </p:sp>
-      <p:pic>
-        <p:nvPicPr>
-          <p:cNvPr id="4" name="Picture 3" descr="fig_two_optima.png"/>
-          <p:cNvPicPr>
-            <a:picLocks noChangeAspect="1"/>
-          </p:cNvPicPr>
-          <p:nvPr/>
-        </p:nvPicPr>
-        <p:blipFill>
-          <a:blip r:embed="rId2"/>
-          <a:stretch>
-            <a:fillRect/>
-          </a:stretch>
-        </p:blipFill>
-        <p:spPr>
-          <a:xfrm>
-            <a:off x="792327" y="1371600"/>
-            <a:ext cx="10607040" cy="4242816"/>
-          </a:xfrm>
-          <a:prstGeom prst="rect">
-            <a:avLst/>
-          </a:prstGeom>
-        </p:spPr>
-      </p:pic>
-      <p:sp>
-        <p:nvSpPr>
-          <p:cNvPr id="5" name="TextBox 4"/>
+      <p:sp>
+        <p:nvSpPr>
+          <p:cNvPr id="4" name="TextBox 3"/>
           <p:cNvSpPr txBox="1"/>
           <p:nvPr/>
         </p:nvSpPr>
         <p:spPr>
           <a:xfrm>
-            <a:off x="822960" y="5687568"/>
-            <a:ext cx="10607040" cy="548640"/>
+            <a:off x="868680" y="1554480"/>
+            <a:ext cx="10424160" cy="4754880"/>
           </a:xfrm>
           <a:prstGeom prst="rect">
             <a:avLst/>
@@ -5994,19 +5972,83 @@
           </a:bodyPr>
           <a:lstStyle/>
           <a:p>
-            <a:pPr algn="ctr">
-              <a:spcAft>
-                <a:spcPts val="600"/>
-              </a:spcAft>
-            </a:pPr>
-            <a:r>
-              <a:rPr sz="1500" b="0">
-                <a:solidFill>
-                  <a:srgbClr val="0B0B0B"/>
-                </a:solidFill>
-                <a:latin typeface="Calibri"/>
-              </a:rPr>
-              <a:t>Illustration: handbook starting values versus the class calibration (66.8 MPa, k = 0.377, tau_i = 17.9 MPa), which moves the equation optimum to (1.25, 13.20).</a:t>
+            <a:pPr algn="l">
+              <a:spcAft>
+                <a:spcPts val="1200"/>
+              </a:spcAft>
+            </a:pPr>
+            <a:r>
+              <a:rPr sz="2000" b="0">
+                <a:solidFill>
+                  <a:srgbClr val="0B0B0B"/>
+                </a:solidFill>
+                <a:latin typeface="Calibri"/>
+              </a:rPr>
+              <a:t>Pre-lab 1 answers this with your beam dataset: compute each beam's predicted capacity and mode, then plot predictions against measurements.</a:t>
+            </a:r>
+          </a:p>
+          <a:p>
+            <a:pPr algn="l">
+              <a:spcAft>
+                <a:spcPts val="1200"/>
+              </a:spcAft>
+            </a:pPr>
+            <a:r>
+              <a:rPr sz="2000" b="0">
+                <a:solidFill>
+                  <a:srgbClr val="0B0B0B"/>
+                </a:solidFill>
+                <a:latin typeface="Calibri"/>
+              </a:rPr>
+              <a:t>Watch for two things:</a:t>
+            </a:r>
+          </a:p>
+          <a:p>
+            <a:pPr algn="l" lvl="1">
+              <a:spcAft>
+                <a:spcPts val="1200"/>
+              </a:spcAft>
+            </a:pPr>
+            <a:r>
+              <a:rPr sz="1800" b="0">
+                <a:solidFill>
+                  <a:srgbClr val="0B0B0B"/>
+                </a:solidFill>
+                <a:latin typeface="Calibri"/>
+              </a:rPr>
+              <a:t>•  Points below the line: beams that broke before the equations said they would.</a:t>
+            </a:r>
+          </a:p>
+          <a:p>
+            <a:pPr algn="l" lvl="1">
+              <a:spcAft>
+                <a:spcPts val="1200"/>
+              </a:spcAft>
+            </a:pPr>
+            <a:r>
+              <a:rPr sz="1800" b="0">
+                <a:solidFill>
+                  <a:srgbClr val="0B0B0B"/>
+                </a:solidFill>
+                <a:latin typeface="Calibri"/>
+              </a:rPr>
+              <a:t>•  Beams whose recorded failure looks nothing like the predicted mode.</a:t>
+            </a:r>
+          </a:p>
+          <a:p>
+            <a:pPr algn="l">
+              <a:spcAft>
+                <a:spcPts val="1200"/>
+              </a:spcAft>
+            </a:pPr>
+            <a:r>
+              <a:rPr sz="2000" b="0">
+                <a:solidFill>
+                  <a:srgbClr val="0B0B0B"/>
+                </a:solidFill>
+                <a:latin typeface="Calibri"/>
+              </a:rPr>
+              <a:t>[Placeholder: parity plot from the 44-beam dataset once strength_N lands.]</a:t>
             </a:r>
           </a:p>
         </p:txBody>
@@ -6071,7 +6113,7 @@
                 </a:solidFill>
                 <a:latin typeface="Calibri"/>
               </a:rPr>
-              <a:t>Where this leaves us</a:t>
+              <a:t>One assumption, two different beams</a:t>
             </a:r>
           </a:p>
         </p:txBody>
@@ -6120,16 +6162,40 @@
           </a:p>
         </p:txBody>
       </p:sp>
-      <p:sp>
-        <p:nvSpPr>
-          <p:cNvPr id="4" name="TextBox 3"/>
+      <p:pic>
+        <p:nvPicPr>
+          <p:cNvPr id="4" name="Picture 3" descr="fig_two_optima.png"/>
+          <p:cNvPicPr>
+            <a:picLocks noChangeAspect="1"/>
+          </p:cNvPicPr>
+          <p:nvPr/>
+        </p:nvPicPr>
+        <p:blipFill>
+          <a:blip r:embed="rId2"/>
+          <a:stretch>
+            <a:fillRect/>
+          </a:stretch>
+        </p:blipFill>
+        <p:spPr>
+          <a:xfrm>
+            <a:off x="792327" y="1371600"/>
+            <a:ext cx="10607040" cy="4242816"/>
+          </a:xfrm>
+          <a:prstGeom prst="rect">
+            <a:avLst/>
+          </a:prstGeom>
+        </p:spPr>
+      </p:pic>
+      <p:sp>
+        <p:nvSpPr>
+          <p:cNvPr id="5" name="TextBox 4"/>
           <p:cNvSpPr txBox="1"/>
           <p:nvPr/>
         </p:nvSpPr>
         <p:spPr>
           <a:xfrm>
-            <a:off x="868680" y="1554480"/>
-            <a:ext cx="10424160" cy="4754880"/>
+            <a:off x="822960" y="5687568"/>
+            <a:ext cx="10607040" cy="548640"/>
           </a:xfrm>
           <a:prstGeom prst="rect">
             <a:avLst/>
@@ -6142,99 +6208,19 @@
           </a:bodyPr>
           <a:lstStyle/>
           <a:p>
-            <a:pPr algn="l">
-              <a:spcAft>
-                <a:spcPts val="1200"/>
-              </a:spcAft>
-            </a:pPr>
-            <a:r>
-              <a:rPr sz="2000" b="0">
-                <a:solidFill>
-                  <a:srgbClr val="0B0B0B"/>
-                </a:solidFill>
-                <a:latin typeface="Calibri"/>
-              </a:rPr>
-              <a:t>The equations are useful but partial:</a:t>
-            </a:r>
-          </a:p>
-          <a:p>
-            <a:pPr algn="l" lvl="1">
-              <a:spcAft>
-                <a:spcPts val="1200"/>
-              </a:spcAft>
-            </a:pPr>
-            <a:r>
-              <a:rPr sz="1800" b="0">
-                <a:solidFill>
-                  <a:srgbClr val="0B0B0B"/>
-                </a:solidFill>
-                <a:latin typeface="Calibri"/>
-              </a:rPr>
-              <a:t>•  they cannot tell a yield plateau from a one-drop fracture,</a:t>
-            </a:r>
-          </a:p>
-          <a:p>
-            <a:pPr algn="l" lvl="1">
-              <a:spcAft>
-                <a:spcPts val="1200"/>
-              </a:spcAft>
-            </a:pPr>
-            <a:r>
-              <a:rPr sz="1800" b="0">
-                <a:solidFill>
-                  <a:srgbClr val="0B0B0B"/>
-                </a:solidFill>
-                <a:latin typeface="Calibri"/>
-              </a:rPr>
-              <a:t>•  their LTB term rests on fixture assumptions,</a:t>
-            </a:r>
-          </a:p>
-          <a:p>
-            <a:pPr algn="l" lvl="1">
-              <a:spcAft>
-                <a:spcPts val="1200"/>
-              </a:spcAft>
-            </a:pPr>
-            <a:r>
-              <a:rPr sz="1800" b="0">
-                <a:solidFill>
-                  <a:srgbClr val="0B0B0B"/>
-                </a:solidFill>
-                <a:latin typeface="Calibri"/>
-              </a:rPr>
-              <a:t>•  the modes blur,</a:t>
-            </a:r>
-          </a:p>
-          <a:p>
-            <a:pPr algn="l" lvl="1">
-              <a:spcAft>
-                <a:spcPts val="1200"/>
-              </a:spcAft>
-            </a:pPr>
-            <a:r>
-              <a:rPr sz="1800" b="0">
-                <a:solidFill>
-                  <a:srgbClr val="0B0B0B"/>
-                </a:solidFill>
-                <a:latin typeface="Calibri"/>
-              </a:rPr>
-              <a:t>•  and we have only a few expensive tests.</a:t>
-            </a:r>
-          </a:p>
-          <a:p>
-            <a:pPr algn="l">
-              <a:spcAft>
-                <a:spcPts val="1200"/>
-              </a:spcAft>
-            </a:pPr>
-            <a:r>
-              <a:rPr sz="2000" b="0">
-                <a:solidFill>
-                  <a:srgbClr val="0B0B0B"/>
-                </a:solidFill>
-                <a:latin typeface="Calibri"/>
-              </a:rPr>
-              <a:t>A data-driven model that carries its own uncertainty is built for this. Next lecture: Gaussian Processes and Bayesian optimization.</a:t>
+            <a:pPr algn="ctr">
+              <a:spcAft>
+                <a:spcPts val="600"/>
+              </a:spcAft>
+            </a:pPr>
+            <a:r>
+              <a:rPr sz="1500" b="0">
+                <a:solidFill>
+                  <a:srgbClr val="0B0B0B"/>
+                </a:solidFill>
+                <a:latin typeface="Calibri"/>
+              </a:rPr>
+              <a:t>Illustration: handbook starting values versus the class calibration (66.8 MPa, k = 0.377, tau_i = 16.8 MPa), which moves the equation optimum to (1.10, 13.25).</a:t>
             </a:r>
           </a:p>
         </p:txBody>
@@ -6299,7 +6285,7 @@
                 </a:solidFill>
                 <a:latin typeface="Calibri"/>
               </a:rPr>
-              <a:t>Before next time: Pre-lab 1</a:t>
+              <a:t>Where this leaves us</a:t>
             </a:r>
           </a:p>
         </p:txBody>
@@ -6382,7 +6368,423 @@
                 </a:solidFill>
                 <a:latin typeface="Calibri"/>
               </a:rPr>
+              <a:t>The equations are useful but partial:</a:t>
+            </a:r>
+          </a:p>
+          <a:p>
+            <a:pPr algn="l" lvl="1">
+              <a:spcAft>
+                <a:spcPts val="1200"/>
+              </a:spcAft>
+            </a:pPr>
+            <a:r>
+              <a:rPr sz="1800" b="0">
+                <a:solidFill>
+                  <a:srgbClr val="0B0B0B"/>
+                </a:solidFill>
+                <a:latin typeface="Calibri"/>
+              </a:rPr>
+              <a:t>•  they cannot tell a yield plateau from a one-drop fracture,</a:t>
+            </a:r>
+          </a:p>
+          <a:p>
+            <a:pPr algn="l" lvl="1">
+              <a:spcAft>
+                <a:spcPts val="1200"/>
+              </a:spcAft>
+            </a:pPr>
+            <a:r>
+              <a:rPr sz="1800" b="0">
+                <a:solidFill>
+                  <a:srgbClr val="0B0B0B"/>
+                </a:solidFill>
+                <a:latin typeface="Calibri"/>
+              </a:rPr>
+              <a:t>•  their LTB term rests on fixture assumptions,</a:t>
+            </a:r>
+          </a:p>
+          <a:p>
+            <a:pPr algn="l" lvl="1">
+              <a:spcAft>
+                <a:spcPts val="1200"/>
+              </a:spcAft>
+            </a:pPr>
+            <a:r>
+              <a:rPr sz="1800" b="0">
+                <a:solidFill>
+                  <a:srgbClr val="0B0B0B"/>
+                </a:solidFill>
+                <a:latin typeface="Calibri"/>
+              </a:rPr>
+              <a:t>•  the modes blur,</a:t>
+            </a:r>
+          </a:p>
+          <a:p>
+            <a:pPr algn="l" lvl="1">
+              <a:spcAft>
+                <a:spcPts val="1200"/>
+              </a:spcAft>
+            </a:pPr>
+            <a:r>
+              <a:rPr sz="1800" b="0">
+                <a:solidFill>
+                  <a:srgbClr val="0B0B0B"/>
+                </a:solidFill>
+                <a:latin typeface="Calibri"/>
+              </a:rPr>
+              <a:t>•  and we have only a few expensive tests.</a:t>
+            </a:r>
+          </a:p>
+          <a:p>
+            <a:pPr algn="l">
+              <a:spcAft>
+                <a:spcPts val="1200"/>
+              </a:spcAft>
+            </a:pPr>
+            <a:r>
+              <a:rPr sz="2000" b="0">
+                <a:solidFill>
+                  <a:srgbClr val="0B0B0B"/>
+                </a:solidFill>
+                <a:latin typeface="Calibri"/>
+              </a:rPr>
+              <a:t>A data-driven model that carries its own uncertainty is built for this. Next lecture: Gaussian Processes and Bayesian optimization.</a:t>
+            </a:r>
+          </a:p>
+        </p:txBody>
+      </p:sp>
+    </p:spTree>
+  </p:cSld>
+  <p:clrMapOvr>
+    <a:masterClrMapping/>
+  </p:clrMapOvr>
+</p:sld>
+</file>
+
+<file path=ppt/slides/slide24.xml><?xml version="1.0" encoding="utf-8"?>
+<p:sld xmlns:a="http://schemas.openxmlformats.org/drawingml/2006/main" xmlns:p="http://schemas.openxmlformats.org/presentationml/2006/main" xmlns:r="http://schemas.openxmlformats.org/officeDocument/2006/relationships">
+  <p:cSld>
+    <p:bg>
+      <p:bgPr>
+        <a:solidFill>
+          <a:srgbClr val="FCFCFB"/>
+        </a:solidFill>
+        <a:effectLst/>
+      </p:bgPr>
+    </p:bg>
+    <p:spTree>
+      <p:nvGrpSpPr>
+        <p:cNvPr id="1" name=""/>
+        <p:cNvGrpSpPr/>
+        <p:nvPr/>
+      </p:nvGrpSpPr>
+      <p:grpSpPr/>
+      <p:sp>
+        <p:nvSpPr>
+          <p:cNvPr id="2" name="TextBox 1"/>
+          <p:cNvSpPr txBox="1"/>
+          <p:nvPr/>
+        </p:nvSpPr>
+        <p:spPr>
+          <a:xfrm>
+            <a:off x="822960" y="384048"/>
+            <a:ext cx="10607040" cy="822960"/>
+          </a:xfrm>
+          <a:prstGeom prst="rect">
+            <a:avLst/>
+          </a:prstGeom>
+          <a:noFill/>
+        </p:spPr>
+        <p:txBody>
+          <a:bodyPr wrap="square" anchor="t">
+            <a:spAutoFit/>
+          </a:bodyPr>
+          <a:lstStyle/>
+          <a:p>
+            <a:pPr algn="l">
+              <a:spcAft>
+                <a:spcPts val="600"/>
+              </a:spcAft>
+            </a:pPr>
+            <a:r>
+              <a:rPr sz="3000" b="1">
+                <a:solidFill>
+                  <a:srgbClr val="0B0B0B"/>
+                </a:solidFill>
+                <a:latin typeface="Calibri"/>
+              </a:rPr>
+              <a:t>The loop this module runs</a:t>
+            </a:r>
+          </a:p>
+        </p:txBody>
+      </p:sp>
+      <p:sp>
+        <p:nvSpPr>
+          <p:cNvPr id="3" name="Rectangle 2"/>
+          <p:cNvSpPr/>
+          <p:nvPr/>
+        </p:nvSpPr>
+        <p:spPr>
+          <a:xfrm>
+            <a:off x="822960" y="1170432"/>
+            <a:ext cx="1463040" cy="54864"/>
+          </a:xfrm>
+          <a:prstGeom prst="rect">
+            <a:avLst/>
+          </a:prstGeom>
+          <a:solidFill>
+            <a:srgbClr val="2A78D6"/>
+          </a:solidFill>
+          <a:ln>
+            <a:noFill/>
+          </a:ln>
+          <a:effectLst/>
+        </p:spPr>
+        <p:style>
+          <a:lnRef idx="1">
+            <a:schemeClr val="accent1"/>
+          </a:lnRef>
+          <a:fillRef idx="3">
+            <a:schemeClr val="accent1"/>
+          </a:fillRef>
+          <a:effectRef idx="2">
+            <a:schemeClr val="accent1"/>
+          </a:effectRef>
+          <a:fontRef idx="minor">
+            <a:schemeClr val="lt1"/>
+          </a:fontRef>
+        </p:style>
+        <p:txBody>
+          <a:bodyPr rtlCol="0" anchor="ctr"/>
+          <a:lstStyle/>
+          <a:p>
+            <a:pPr algn="ctr"/>
+          </a:p>
+        </p:txBody>
+      </p:sp>
+      <p:pic>
+        <p:nvPicPr>
+          <p:cNvPr id="4" name="Picture 3" descr="fig_workflow_end2end.png"/>
+          <p:cNvPicPr>
+            <a:picLocks noChangeAspect="1"/>
+          </p:cNvPicPr>
+          <p:nvPr/>
+        </p:nvPicPr>
+        <p:blipFill>
+          <a:blip r:embed="rId2"/>
+          <a:stretch>
+            <a:fillRect/>
+          </a:stretch>
+        </p:blipFill>
+        <p:spPr>
+          <a:xfrm>
+            <a:off x="792327" y="1371600"/>
+            <a:ext cx="10607040" cy="3650993"/>
+          </a:xfrm>
+          <a:prstGeom prst="rect">
+            <a:avLst/>
+          </a:prstGeom>
+        </p:spPr>
+      </p:pic>
+      <p:sp>
+        <p:nvSpPr>
+          <p:cNvPr id="5" name="TextBox 4"/>
+          <p:cNvSpPr txBox="1"/>
+          <p:nvPr/>
+        </p:nvSpPr>
+        <p:spPr>
+          <a:xfrm>
+            <a:off x="822960" y="5095745"/>
+            <a:ext cx="10607040" cy="548640"/>
+          </a:xfrm>
+          <a:prstGeom prst="rect">
+            <a:avLst/>
+          </a:prstGeom>
+          <a:noFill/>
+        </p:spPr>
+        <p:txBody>
+          <a:bodyPr wrap="square" anchor="t">
+            <a:spAutoFit/>
+          </a:bodyPr>
+          <a:lstStyle/>
+          <a:p>
+            <a:pPr algn="ctr">
+              <a:spcAft>
+                <a:spcPts val="600"/>
+              </a:spcAft>
+            </a:pPr>
+            <a:r>
+              <a:rPr sz="1500" b="0">
+                <a:solidFill>
+                  <a:srgbClr val="0B0B0B"/>
+                </a:solidFill>
+                <a:latin typeface="Calibri"/>
+              </a:rPr>
+              <a:t>Physics says what should happen and where failure lives. The data model says what the tests support and where we're still uncertain. Your judgment decides what to build. The test says what we got wrong.</a:t>
+            </a:r>
+          </a:p>
+        </p:txBody>
+      </p:sp>
+    </p:spTree>
+  </p:cSld>
+  <p:clrMapOvr>
+    <a:masterClrMapping/>
+  </p:clrMapOvr>
+</p:sld>
+</file>
+
+<file path=ppt/slides/slide25.xml><?xml version="1.0" encoding="utf-8"?>
+<p:sld xmlns:a="http://schemas.openxmlformats.org/drawingml/2006/main" xmlns:p="http://schemas.openxmlformats.org/presentationml/2006/main" xmlns:r="http://schemas.openxmlformats.org/officeDocument/2006/relationships">
+  <p:cSld>
+    <p:bg>
+      <p:bgPr>
+        <a:solidFill>
+          <a:srgbClr val="FCFCFB"/>
+        </a:solidFill>
+        <a:effectLst/>
+      </p:bgPr>
+    </p:bg>
+    <p:spTree>
+      <p:nvGrpSpPr>
+        <p:cNvPr id="1" name=""/>
+        <p:cNvGrpSpPr/>
+        <p:nvPr/>
+      </p:nvGrpSpPr>
+      <p:grpSpPr/>
+      <p:sp>
+        <p:nvSpPr>
+          <p:cNvPr id="2" name="TextBox 1"/>
+          <p:cNvSpPr txBox="1"/>
+          <p:nvPr/>
+        </p:nvSpPr>
+        <p:spPr>
+          <a:xfrm>
+            <a:off x="822960" y="384048"/>
+            <a:ext cx="10607040" cy="822960"/>
+          </a:xfrm>
+          <a:prstGeom prst="rect">
+            <a:avLst/>
+          </a:prstGeom>
+          <a:noFill/>
+        </p:spPr>
+        <p:txBody>
+          <a:bodyPr wrap="square" anchor="t">
+            <a:spAutoFit/>
+          </a:bodyPr>
+          <a:lstStyle/>
+          <a:p>
+            <a:pPr algn="l">
+              <a:spcAft>
+                <a:spcPts val="600"/>
+              </a:spcAft>
+            </a:pPr>
+            <a:r>
+              <a:rPr sz="3000" b="1">
+                <a:solidFill>
+                  <a:srgbClr val="0B0B0B"/>
+                </a:solidFill>
+                <a:latin typeface="Calibri"/>
+              </a:rPr>
+              <a:t>Before next time: Pre-lab 1</a:t>
+            </a:r>
+          </a:p>
+        </p:txBody>
+      </p:sp>
+      <p:sp>
+        <p:nvSpPr>
+          <p:cNvPr id="3" name="Rectangle 2"/>
+          <p:cNvSpPr/>
+          <p:nvPr/>
+        </p:nvSpPr>
+        <p:spPr>
+          <a:xfrm>
+            <a:off x="822960" y="1170432"/>
+            <a:ext cx="1463040" cy="54864"/>
+          </a:xfrm>
+          <a:prstGeom prst="rect">
+            <a:avLst/>
+          </a:prstGeom>
+          <a:solidFill>
+            <a:srgbClr val="2A78D6"/>
+          </a:solidFill>
+          <a:ln>
+            <a:noFill/>
+          </a:ln>
+          <a:effectLst/>
+        </p:spPr>
+        <p:style>
+          <a:lnRef idx="1">
+            <a:schemeClr val="accent1"/>
+          </a:lnRef>
+          <a:fillRef idx="3">
+            <a:schemeClr val="accent1"/>
+          </a:fillRef>
+          <a:effectRef idx="2">
+            <a:schemeClr val="accent1"/>
+          </a:effectRef>
+          <a:fontRef idx="minor">
+            <a:schemeClr val="lt1"/>
+          </a:fontRef>
+        </p:style>
+        <p:txBody>
+          <a:bodyPr rtlCol="0" anchor="ctr"/>
+          <a:lstStyle/>
+          <a:p>
+            <a:pPr algn="ctr"/>
+          </a:p>
+        </p:txBody>
+      </p:sp>
+      <p:sp>
+        <p:nvSpPr>
+          <p:cNvPr id="4" name="TextBox 3"/>
+          <p:cNvSpPr txBox="1"/>
+          <p:nvPr/>
+        </p:nvSpPr>
+        <p:spPr>
+          <a:xfrm>
+            <a:off x="868680" y="1554480"/>
+            <a:ext cx="10424160" cy="4754880"/>
+          </a:xfrm>
+          <a:prstGeom prst="rect">
+            <a:avLst/>
+          </a:prstGeom>
+          <a:noFill/>
+        </p:spPr>
+        <p:txBody>
+          <a:bodyPr wrap="square" anchor="t">
+            <a:spAutoFit/>
+          </a:bodyPr>
+          <a:lstStyle/>
+          <a:p>
+            <a:pPr algn="l">
+              <a:spcAft>
+                <a:spcPts val="1200"/>
+              </a:spcAft>
+            </a:pPr>
+            <a:r>
+              <a:rPr sz="2000" b="0">
+                <a:solidFill>
+                  <a:srgbClr val="0B0B0B"/>
+                </a:solidFill>
+                <a:latin typeface="Calibri"/>
+              </a:rPr>
               <a:t>In ME323_Module1_Prelab1_FailureModes:</a:t>
+            </a:r>
+          </a:p>
+          <a:p>
+            <a:pPr algn="l" lvl="1">
+              <a:spcAft>
+                <a:spcPts val="1200"/>
+              </a:spcAft>
+            </a:pPr>
+            <a:r>
+              <a:rPr sz="1800" b="0">
+                <a:solidFill>
+                  <a:srgbClr val="0B0B0B"/>
+                </a:solidFill>
+                <a:latin typeface="Calibri"/>
+              </a:rPr>
+              <a:t>•  reduce four raw force-displacement traces to strength — including deciding what beam 9's "twisted off the test stand" peak really measures,</a:t>
             </a:r>
           </a:p>
           <a:p>

--- a/me323/Module1_drafts/ME323_Module1_Lecture1.pptx
+++ b/me323/Module1_drafts/ME323_Module1_Lecture1.pptx
@@ -3277,7 +3277,7 @@
                 <a:latin typeface="Calibri"/>
               </a:rPr>
               <a:t>Pick a 3D-printed I-beam that carries the most load per gram.
-The equations give you a start. They will not give you the answer.</a:t>
+The equations give you a start, not the answer.</a:t>
             </a:r>
           </a:p>
         </p:txBody>
@@ -4940,7 +4940,7 @@
                 </a:solidFill>
                 <a:latin typeface="Calibri"/>
               </a:rPr>
-              <a:t>The formula is exact only for an idealized beam. Ours is not quite that beam.</a:t>
+              <a:t>The formula is exact for an idealized beam, and ours differs from it in four ways.</a:t>
             </a:r>
           </a:p>
           <a:p>
@@ -5020,7 +5020,7 @@
                 </a:solidFill>
                 <a:latin typeface="Calibri"/>
               </a:rPr>
-              <a:t>Each gap is a reason the equation narrows the answer without settling it.</a:t>
+              <a:t>Each gap widens the error bar you should carry on the LTB capacity.</a:t>
             </a:r>
           </a:p>
         </p:txBody>
@@ -5404,7 +5404,7 @@
                 </a:solidFill>
                 <a:latin typeface="Calibri"/>
               </a:rPr>
-              <a:t>You just saw Iy, J, Cw, warping, load height, and effective length. Here is exactly what you are responsible for:</a:t>
+              <a:t>You just saw Iy, J, Cw, warping, load height, and effective length. You are responsible for this much of it:</a:t>
             </a:r>
           </a:p>
           <a:p>
@@ -5468,7 +5468,7 @@
                 </a:solidFill>
                 <a:latin typeface="Calibri"/>
               </a:rPr>
-              <a:t>The test of understanding is not the derivation. It is: what happens to the LTB branch if the fixture braces the compression flange, and would you still trust the equation optimum?</a:t>
+              <a:t>The test of understanding: what happens to the LTB branch if the fixture braces the compression flange, and would you still trust the equation optimum?</a:t>
             </a:r>
           </a:p>
         </p:txBody>
@@ -7209,7 +7209,7 @@
                 </a:solidFill>
                 <a:latin typeface="Calibri"/>
               </a:rPr>
-              <a:t>We will price the layer-line mode with one calibrated number — but that number drifts with print session and support condition, and the other two problems remain. The equations narrow the problem. They do not solve it.</a:t>
+              <a:t>We will price the layer-line mode with one calibrated number — but that number drifts with print session and support condition, and the other two problems remain. The equations narrow the problem without solving it.</a:t>
             </a:r>
           </a:p>
         </p:txBody>
@@ -8205,7 +8205,7 @@
                 </a:solidFill>
                 <a:latin typeface="Calibri"/>
               </a:rPr>
-              <a:t>The efficient shape and the failure modes pull against each other. That tension is the design problem.</a:t>
+              <a:t>The efficient shape and the failure modes pull against each other; resolving that tension is the design problem.</a:t>
             </a:r>
           </a:p>
         </p:txBody>

--- a/me323/Module1_drafts/ME323_Module1_Lecture1.pptx
+++ b/me323/Module1_drafts/ME323_Module1_Lecture1.pptx
@@ -5,33 +5,33 @@
     <p:sldMasterId id="2147483648" r:id="rId1"/>
   </p:sldMasterIdLst>
   <p:sldIdLst>
-    <p:sldId id="256" r:id="rId7"/>
-    <p:sldId id="257" r:id="rId8"/>
-    <p:sldId id="258" r:id="rId9"/>
-    <p:sldId id="259" r:id="rId10"/>
-    <p:sldId id="260" r:id="rId11"/>
-    <p:sldId id="261" r:id="rId12"/>
-    <p:sldId id="262" r:id="rId13"/>
-    <p:sldId id="263" r:id="rId14"/>
-    <p:sldId id="264" r:id="rId15"/>
-    <p:sldId id="265" r:id="rId16"/>
-    <p:sldId id="266" r:id="rId17"/>
-    <p:sldId id="267" r:id="rId18"/>
-    <p:sldId id="268" r:id="rId19"/>
-    <p:sldId id="269" r:id="rId20"/>
-    <p:sldId id="270" r:id="rId21"/>
-    <p:sldId id="271" r:id="rId22"/>
-    <p:sldId id="272" r:id="rId23"/>
-    <p:sldId id="273" r:id="rId24"/>
-    <p:sldId id="274" r:id="rId25"/>
-    <p:sldId id="275" r:id="rId26"/>
-    <p:sldId id="276" r:id="rId27"/>
-    <p:sldId id="277" r:id="rId28"/>
-    <p:sldId id="278" r:id="rId29"/>
-    <p:sldId id="279" r:id="rId30"/>
-    <p:sldId id="280" r:id="rId31"/>
+    <p:sldId id="256" r:id="rId2"/>
+    <p:sldId id="257" r:id="rId3"/>
+    <p:sldId id="258" r:id="rId4"/>
+    <p:sldId id="259" r:id="rId5"/>
+    <p:sldId id="260" r:id="rId6"/>
+    <p:sldId id="261" r:id="rId7"/>
+    <p:sldId id="262" r:id="rId8"/>
+    <p:sldId id="263" r:id="rId9"/>
+    <p:sldId id="264" r:id="rId10"/>
+    <p:sldId id="265" r:id="rId11"/>
+    <p:sldId id="266" r:id="rId12"/>
+    <p:sldId id="267" r:id="rId13"/>
+    <p:sldId id="268" r:id="rId14"/>
+    <p:sldId id="269" r:id="rId15"/>
+    <p:sldId id="270" r:id="rId16"/>
+    <p:sldId id="271" r:id="rId17"/>
+    <p:sldId id="272" r:id="rId18"/>
+    <p:sldId id="273" r:id="rId19"/>
+    <p:sldId id="274" r:id="rId20"/>
+    <p:sldId id="275" r:id="rId21"/>
+    <p:sldId id="276" r:id="rId22"/>
+    <p:sldId id="277" r:id="rId23"/>
+    <p:sldId id="278" r:id="rId24"/>
+    <p:sldId id="279" r:id="rId25"/>
+    <p:sldId id="280" r:id="rId26"/>
   </p:sldIdLst>
-  <p:sldSz cx="12191695" cy="6858000" type="screen4x3"/>
+  <p:sldSz cx="12192000" cy="6858000"/>
   <p:notesSz cx="6858000" cy="9144000"/>
   <p:defaultTextStyle>
     <a:defPPr>
@@ -128,6 +128,22 @@
       </a:defRPr>
     </a:lvl9pPr>
   </p:defaultTextStyle>
+  <p:extLst>
+    <p:ext uri="{EFAFB233-063F-42B5-8137-9DF3F51BA10A}">
+      <p15:sldGuideLst xmlns:p15="http://schemas.microsoft.com/office/powerpoint/2012/main">
+        <p15:guide id="1" orient="horz" pos="2160">
+          <p15:clr>
+            <a:srgbClr val="A4A3A4"/>
+          </p15:clr>
+        </p15:guide>
+        <p15:guide id="2" pos="2880">
+          <p15:clr>
+            <a:srgbClr val="A4A3A4"/>
+          </p15:clr>
+        </p15:guide>
+      </p15:sldGuideLst>
+    </p:ext>
+  </p:extLst>
 </p:presentation>
 </file>
 
@@ -169,10 +185,9 @@
           <a:lstStyle/>
           <a:p>
             <a:r>
-              <a:rPr lang="en-US" smtClean="0"/>
+              <a:rPr lang="en-US"/>
               <a:t>Click to edit Master title style</a:t>
             </a:r>
-            <a:endParaRPr lang="en-US"/>
           </a:p>
         </p:txBody>
       </p:sp>
@@ -288,10 +303,9 @@
           </a:lstStyle>
           <a:p>
             <a:r>
-              <a:rPr lang="en-US" smtClean="0"/>
+              <a:rPr lang="en-US"/>
               <a:t>Click to edit Master subtitle style</a:t>
             </a:r>
-            <a:endParaRPr lang="en-US"/>
           </a:p>
         </p:txBody>
       </p:sp>
@@ -312,7 +326,7 @@
           <a:p>
             <a:fld id="{5BCAD085-E8A6-8845-BD4E-CB4CCA059FC4}" type="datetimeFigureOut">
               <a:rPr lang="en-US" smtClean="0"/>
-              <a:t>1/27/13</a:t>
+              <a:t>7/21/26</a:t>
             </a:fld>
             <a:endParaRPr lang="en-US"/>
           </a:p>
@@ -406,10 +420,9 @@
           <a:lstStyle/>
           <a:p>
             <a:r>
-              <a:rPr lang="en-US" smtClean="0"/>
+              <a:rPr lang="en-US"/>
               <a:t>Click to edit Master title style</a:t>
             </a:r>
-            <a:endParaRPr lang="en-US"/>
           </a:p>
         </p:txBody>
       </p:sp>
@@ -430,38 +443,37 @@
           <a:p>
             <a:pPr lvl="0"/>
             <a:r>
-              <a:rPr lang="en-US" smtClean="0"/>
+              <a:rPr lang="en-US"/>
               <a:t>Click to edit Master text styles</a:t>
             </a:r>
           </a:p>
           <a:p>
             <a:pPr lvl="1"/>
             <a:r>
-              <a:rPr lang="en-US" smtClean="0"/>
+              <a:rPr lang="en-US"/>
               <a:t>Second level</a:t>
             </a:r>
           </a:p>
           <a:p>
             <a:pPr lvl="2"/>
             <a:r>
-              <a:rPr lang="en-US" smtClean="0"/>
+              <a:rPr lang="en-US"/>
               <a:t>Third level</a:t>
             </a:r>
           </a:p>
           <a:p>
             <a:pPr lvl="3"/>
             <a:r>
-              <a:rPr lang="en-US" smtClean="0"/>
+              <a:rPr lang="en-US"/>
               <a:t>Fourth level</a:t>
             </a:r>
           </a:p>
           <a:p>
             <a:pPr lvl="4"/>
             <a:r>
-              <a:rPr lang="en-US" smtClean="0"/>
+              <a:rPr lang="en-US"/>
               <a:t>Fifth level</a:t>
             </a:r>
-            <a:endParaRPr lang="en-US"/>
           </a:p>
         </p:txBody>
       </p:sp>
@@ -482,7 +494,7 @@
           <a:p>
             <a:fld id="{5BCAD085-E8A6-8845-BD4E-CB4CCA059FC4}" type="datetimeFigureOut">
               <a:rPr lang="en-US" smtClean="0"/>
-              <a:t>1/27/13</a:t>
+              <a:t>7/21/26</a:t>
             </a:fld>
             <a:endParaRPr lang="en-US"/>
           </a:p>
@@ -581,10 +593,9 @@
           <a:lstStyle/>
           <a:p>
             <a:r>
-              <a:rPr lang="en-US" smtClean="0"/>
+              <a:rPr lang="en-US"/>
               <a:t>Click to edit Master title style</a:t>
             </a:r>
-            <a:endParaRPr lang="en-US"/>
           </a:p>
         </p:txBody>
       </p:sp>
@@ -610,38 +621,37 @@
           <a:p>
             <a:pPr lvl="0"/>
             <a:r>
-              <a:rPr lang="en-US" smtClean="0"/>
+              <a:rPr lang="en-US"/>
               <a:t>Click to edit Master text styles</a:t>
             </a:r>
           </a:p>
           <a:p>
             <a:pPr lvl="1"/>
             <a:r>
-              <a:rPr lang="en-US" smtClean="0"/>
+              <a:rPr lang="en-US"/>
               <a:t>Second level</a:t>
             </a:r>
           </a:p>
           <a:p>
             <a:pPr lvl="2"/>
             <a:r>
-              <a:rPr lang="en-US" smtClean="0"/>
+              <a:rPr lang="en-US"/>
               <a:t>Third level</a:t>
             </a:r>
           </a:p>
           <a:p>
             <a:pPr lvl="3"/>
             <a:r>
-              <a:rPr lang="en-US" smtClean="0"/>
+              <a:rPr lang="en-US"/>
               <a:t>Fourth level</a:t>
             </a:r>
           </a:p>
           <a:p>
             <a:pPr lvl="4"/>
             <a:r>
-              <a:rPr lang="en-US" smtClean="0"/>
+              <a:rPr lang="en-US"/>
               <a:t>Fifth level</a:t>
             </a:r>
-            <a:endParaRPr lang="en-US"/>
           </a:p>
         </p:txBody>
       </p:sp>
@@ -662,7 +672,7 @@
           <a:p>
             <a:fld id="{5BCAD085-E8A6-8845-BD4E-CB4CCA059FC4}" type="datetimeFigureOut">
               <a:rPr lang="en-US" smtClean="0"/>
-              <a:t>1/27/13</a:t>
+              <a:t>7/21/26</a:t>
             </a:fld>
             <a:endParaRPr lang="en-US"/>
           </a:p>
@@ -756,10 +766,9 @@
           <a:lstStyle/>
           <a:p>
             <a:r>
-              <a:rPr lang="en-US" smtClean="0"/>
+              <a:rPr lang="en-US"/>
               <a:t>Click to edit Master title style</a:t>
             </a:r>
-            <a:endParaRPr lang="en-US"/>
           </a:p>
         </p:txBody>
       </p:sp>
@@ -780,38 +789,37 @@
           <a:p>
             <a:pPr lvl="0"/>
             <a:r>
-              <a:rPr lang="en-US" smtClean="0"/>
+              <a:rPr lang="en-US"/>
               <a:t>Click to edit Master text styles</a:t>
             </a:r>
           </a:p>
           <a:p>
             <a:pPr lvl="1"/>
             <a:r>
-              <a:rPr lang="en-US" smtClean="0"/>
+              <a:rPr lang="en-US"/>
               <a:t>Second level</a:t>
             </a:r>
           </a:p>
           <a:p>
             <a:pPr lvl="2"/>
             <a:r>
-              <a:rPr lang="en-US" smtClean="0"/>
+              <a:rPr lang="en-US"/>
               <a:t>Third level</a:t>
             </a:r>
           </a:p>
           <a:p>
             <a:pPr lvl="3"/>
             <a:r>
-              <a:rPr lang="en-US" smtClean="0"/>
+              <a:rPr lang="en-US"/>
               <a:t>Fourth level</a:t>
             </a:r>
           </a:p>
           <a:p>
             <a:pPr lvl="4"/>
             <a:r>
-              <a:rPr lang="en-US" smtClean="0"/>
+              <a:rPr lang="en-US"/>
               <a:t>Fifth level</a:t>
             </a:r>
-            <a:endParaRPr lang="en-US"/>
           </a:p>
         </p:txBody>
       </p:sp>
@@ -832,7 +840,7 @@
           <a:p>
             <a:fld id="{5BCAD085-E8A6-8845-BD4E-CB4CCA059FC4}" type="datetimeFigureOut">
               <a:rPr lang="en-US" smtClean="0"/>
-              <a:t>1/27/13</a:t>
+              <a:t>7/21/26</a:t>
             </a:fld>
             <a:endParaRPr lang="en-US"/>
           </a:p>
@@ -935,10 +943,9 @@
           </a:lstStyle>
           <a:p>
             <a:r>
-              <a:rPr lang="en-US" smtClean="0"/>
+              <a:rPr lang="en-US"/>
               <a:t>Click to edit Master title style</a:t>
             </a:r>
-            <a:endParaRPr lang="en-US"/>
           </a:p>
         </p:txBody>
       </p:sp>
@@ -1055,7 +1062,7 @@
           <a:p>
             <a:pPr lvl="0"/>
             <a:r>
-              <a:rPr lang="en-US" smtClean="0"/>
+              <a:rPr lang="en-US"/>
               <a:t>Click to edit Master text styles</a:t>
             </a:r>
           </a:p>
@@ -1078,7 +1085,7 @@
           <a:p>
             <a:fld id="{5BCAD085-E8A6-8845-BD4E-CB4CCA059FC4}" type="datetimeFigureOut">
               <a:rPr lang="en-US" smtClean="0"/>
-              <a:t>1/27/13</a:t>
+              <a:t>7/21/26</a:t>
             </a:fld>
             <a:endParaRPr lang="en-US"/>
           </a:p>
@@ -1172,10 +1179,9 @@
           <a:lstStyle/>
           <a:p>
             <a:r>
-              <a:rPr lang="en-US" smtClean="0"/>
+              <a:rPr lang="en-US"/>
               <a:t>Click to edit Master title style</a:t>
             </a:r>
-            <a:endParaRPr lang="en-US"/>
           </a:p>
         </p:txBody>
       </p:sp>
@@ -1229,38 +1235,37 @@
           <a:p>
             <a:pPr lvl="0"/>
             <a:r>
-              <a:rPr lang="en-US" smtClean="0"/>
+              <a:rPr lang="en-US"/>
               <a:t>Click to edit Master text styles</a:t>
             </a:r>
           </a:p>
           <a:p>
             <a:pPr lvl="1"/>
             <a:r>
-              <a:rPr lang="en-US" smtClean="0"/>
+              <a:rPr lang="en-US"/>
               <a:t>Second level</a:t>
             </a:r>
           </a:p>
           <a:p>
             <a:pPr lvl="2"/>
             <a:r>
-              <a:rPr lang="en-US" smtClean="0"/>
+              <a:rPr lang="en-US"/>
               <a:t>Third level</a:t>
             </a:r>
           </a:p>
           <a:p>
             <a:pPr lvl="3"/>
             <a:r>
-              <a:rPr lang="en-US" smtClean="0"/>
+              <a:rPr lang="en-US"/>
               <a:t>Fourth level</a:t>
             </a:r>
           </a:p>
           <a:p>
             <a:pPr lvl="4"/>
             <a:r>
-              <a:rPr lang="en-US" smtClean="0"/>
+              <a:rPr lang="en-US"/>
               <a:t>Fifth level</a:t>
             </a:r>
-            <a:endParaRPr lang="en-US"/>
           </a:p>
         </p:txBody>
       </p:sp>
@@ -1314,38 +1319,37 @@
           <a:p>
             <a:pPr lvl="0"/>
             <a:r>
-              <a:rPr lang="en-US" smtClean="0"/>
+              <a:rPr lang="en-US"/>
               <a:t>Click to edit Master text styles</a:t>
             </a:r>
           </a:p>
           <a:p>
             <a:pPr lvl="1"/>
             <a:r>
-              <a:rPr lang="en-US" smtClean="0"/>
+              <a:rPr lang="en-US"/>
               <a:t>Second level</a:t>
             </a:r>
           </a:p>
           <a:p>
             <a:pPr lvl="2"/>
             <a:r>
-              <a:rPr lang="en-US" smtClean="0"/>
+              <a:rPr lang="en-US"/>
               <a:t>Third level</a:t>
             </a:r>
           </a:p>
           <a:p>
             <a:pPr lvl="3"/>
             <a:r>
-              <a:rPr lang="en-US" smtClean="0"/>
+              <a:rPr lang="en-US"/>
               <a:t>Fourth level</a:t>
             </a:r>
           </a:p>
           <a:p>
             <a:pPr lvl="4"/>
             <a:r>
-              <a:rPr lang="en-US" smtClean="0"/>
+              <a:rPr lang="en-US"/>
               <a:t>Fifth level</a:t>
             </a:r>
-            <a:endParaRPr lang="en-US"/>
           </a:p>
         </p:txBody>
       </p:sp>
@@ -1366,7 +1370,7 @@
           <a:p>
             <a:fld id="{5BCAD085-E8A6-8845-BD4E-CB4CCA059FC4}" type="datetimeFigureOut">
               <a:rPr lang="en-US" smtClean="0"/>
-              <a:t>1/27/13</a:t>
+              <a:t>7/21/26</a:t>
             </a:fld>
             <a:endParaRPr lang="en-US"/>
           </a:p>
@@ -1464,10 +1468,9 @@
           </a:lstStyle>
           <a:p>
             <a:r>
-              <a:rPr lang="en-US" smtClean="0"/>
+              <a:rPr lang="en-US"/>
               <a:t>Click to edit Master title style</a:t>
             </a:r>
-            <a:endParaRPr lang="en-US"/>
           </a:p>
         </p:txBody>
       </p:sp>
@@ -1530,7 +1533,7 @@
           <a:p>
             <a:pPr lvl="0"/>
             <a:r>
-              <a:rPr lang="en-US" smtClean="0"/>
+              <a:rPr lang="en-US"/>
               <a:t>Click to edit Master text styles</a:t>
             </a:r>
           </a:p>
@@ -1586,38 +1589,37 @@
           <a:p>
             <a:pPr lvl="0"/>
             <a:r>
-              <a:rPr lang="en-US" smtClean="0"/>
+              <a:rPr lang="en-US"/>
               <a:t>Click to edit Master text styles</a:t>
             </a:r>
           </a:p>
           <a:p>
             <a:pPr lvl="1"/>
             <a:r>
-              <a:rPr lang="en-US" smtClean="0"/>
+              <a:rPr lang="en-US"/>
               <a:t>Second level</a:t>
             </a:r>
           </a:p>
           <a:p>
             <a:pPr lvl="2"/>
             <a:r>
-              <a:rPr lang="en-US" smtClean="0"/>
+              <a:rPr lang="en-US"/>
               <a:t>Third level</a:t>
             </a:r>
           </a:p>
           <a:p>
             <a:pPr lvl="3"/>
             <a:r>
-              <a:rPr lang="en-US" smtClean="0"/>
+              <a:rPr lang="en-US"/>
               <a:t>Fourth level</a:t>
             </a:r>
           </a:p>
           <a:p>
             <a:pPr lvl="4"/>
             <a:r>
-              <a:rPr lang="en-US" smtClean="0"/>
+              <a:rPr lang="en-US"/>
               <a:t>Fifth level</a:t>
             </a:r>
-            <a:endParaRPr lang="en-US"/>
           </a:p>
         </p:txBody>
       </p:sp>
@@ -1680,7 +1682,7 @@
           <a:p>
             <a:pPr lvl="0"/>
             <a:r>
-              <a:rPr lang="en-US" smtClean="0"/>
+              <a:rPr lang="en-US"/>
               <a:t>Click to edit Master text styles</a:t>
             </a:r>
           </a:p>
@@ -1736,38 +1738,37 @@
           <a:p>
             <a:pPr lvl="0"/>
             <a:r>
-              <a:rPr lang="en-US" smtClean="0"/>
+              <a:rPr lang="en-US"/>
               <a:t>Click to edit Master text styles</a:t>
             </a:r>
           </a:p>
           <a:p>
             <a:pPr lvl="1"/>
             <a:r>
-              <a:rPr lang="en-US" smtClean="0"/>
+              <a:rPr lang="en-US"/>
               <a:t>Second level</a:t>
             </a:r>
           </a:p>
           <a:p>
             <a:pPr lvl="2"/>
             <a:r>
-              <a:rPr lang="en-US" smtClean="0"/>
+              <a:rPr lang="en-US"/>
               <a:t>Third level</a:t>
             </a:r>
           </a:p>
           <a:p>
             <a:pPr lvl="3"/>
             <a:r>
-              <a:rPr lang="en-US" smtClean="0"/>
+              <a:rPr lang="en-US"/>
               <a:t>Fourth level</a:t>
             </a:r>
           </a:p>
           <a:p>
             <a:pPr lvl="4"/>
             <a:r>
-              <a:rPr lang="en-US" smtClean="0"/>
+              <a:rPr lang="en-US"/>
               <a:t>Fifth level</a:t>
             </a:r>
-            <a:endParaRPr lang="en-US"/>
           </a:p>
         </p:txBody>
       </p:sp>
@@ -1788,7 +1789,7 @@
           <a:p>
             <a:fld id="{5BCAD085-E8A6-8845-BD4E-CB4CCA059FC4}" type="datetimeFigureOut">
               <a:rPr lang="en-US" smtClean="0"/>
-              <a:t>1/27/13</a:t>
+              <a:t>7/21/26</a:t>
             </a:fld>
             <a:endParaRPr lang="en-US"/>
           </a:p>
@@ -1882,10 +1883,9 @@
           <a:lstStyle/>
           <a:p>
             <a:r>
-              <a:rPr lang="en-US" smtClean="0"/>
+              <a:rPr lang="en-US"/>
               <a:t>Click to edit Master title style</a:t>
             </a:r>
-            <a:endParaRPr lang="en-US"/>
           </a:p>
         </p:txBody>
       </p:sp>
@@ -1906,7 +1906,7 @@
           <a:p>
             <a:fld id="{5BCAD085-E8A6-8845-BD4E-CB4CCA059FC4}" type="datetimeFigureOut">
               <a:rPr lang="en-US" smtClean="0"/>
-              <a:t>1/27/13</a:t>
+              <a:t>7/21/26</a:t>
             </a:fld>
             <a:endParaRPr lang="en-US"/>
           </a:p>
@@ -2001,7 +2001,7 @@
           <a:p>
             <a:fld id="{5BCAD085-E8A6-8845-BD4E-CB4CCA059FC4}" type="datetimeFigureOut">
               <a:rPr lang="en-US" smtClean="0"/>
-              <a:t>1/27/13</a:t>
+              <a:t>7/21/26</a:t>
             </a:fld>
             <a:endParaRPr lang="en-US"/>
           </a:p>
@@ -2104,10 +2104,9 @@
           </a:lstStyle>
           <a:p>
             <a:r>
-              <a:rPr lang="en-US" smtClean="0"/>
+              <a:rPr lang="en-US"/>
               <a:t>Click to edit Master title style</a:t>
             </a:r>
-            <a:endParaRPr lang="en-US"/>
           </a:p>
         </p:txBody>
       </p:sp>
@@ -2161,38 +2160,37 @@
           <a:p>
             <a:pPr lvl="0"/>
             <a:r>
-              <a:rPr lang="en-US" smtClean="0"/>
+              <a:rPr lang="en-US"/>
               <a:t>Click to edit Master text styles</a:t>
             </a:r>
           </a:p>
           <a:p>
             <a:pPr lvl="1"/>
             <a:r>
-              <a:rPr lang="en-US" smtClean="0"/>
+              <a:rPr lang="en-US"/>
               <a:t>Second level</a:t>
             </a:r>
           </a:p>
           <a:p>
             <a:pPr lvl="2"/>
             <a:r>
-              <a:rPr lang="en-US" smtClean="0"/>
+              <a:rPr lang="en-US"/>
               <a:t>Third level</a:t>
             </a:r>
           </a:p>
           <a:p>
             <a:pPr lvl="3"/>
             <a:r>
-              <a:rPr lang="en-US" smtClean="0"/>
+              <a:rPr lang="en-US"/>
               <a:t>Fourth level</a:t>
             </a:r>
           </a:p>
           <a:p>
             <a:pPr lvl="4"/>
             <a:r>
-              <a:rPr lang="en-US" smtClean="0"/>
+              <a:rPr lang="en-US"/>
               <a:t>Fifth level</a:t>
             </a:r>
-            <a:endParaRPr lang="en-US"/>
           </a:p>
         </p:txBody>
       </p:sp>
@@ -2255,7 +2253,7 @@
           <a:p>
             <a:pPr lvl="0"/>
             <a:r>
-              <a:rPr lang="en-US" smtClean="0"/>
+              <a:rPr lang="en-US"/>
               <a:t>Click to edit Master text styles</a:t>
             </a:r>
           </a:p>
@@ -2278,7 +2276,7 @@
           <a:p>
             <a:fld id="{5BCAD085-E8A6-8845-BD4E-CB4CCA059FC4}" type="datetimeFigureOut">
               <a:rPr lang="en-US" smtClean="0"/>
-              <a:t>1/27/13</a:t>
+              <a:t>7/21/26</a:t>
             </a:fld>
             <a:endParaRPr lang="en-US"/>
           </a:p>
@@ -2381,10 +2379,9 @@
           </a:lstStyle>
           <a:p>
             <a:r>
-              <a:rPr lang="en-US" smtClean="0"/>
+              <a:rPr lang="en-US"/>
               <a:t>Click to edit Master title style</a:t>
             </a:r>
-            <a:endParaRPr lang="en-US"/>
           </a:p>
         </p:txBody>
       </p:sp>
@@ -2508,7 +2505,7 @@
           <a:p>
             <a:pPr lvl="0"/>
             <a:r>
-              <a:rPr lang="en-US" smtClean="0"/>
+              <a:rPr lang="en-US"/>
               <a:t>Click to edit Master text styles</a:t>
             </a:r>
           </a:p>
@@ -2531,7 +2528,7 @@
           <a:p>
             <a:fld id="{5BCAD085-E8A6-8845-BD4E-CB4CCA059FC4}" type="datetimeFigureOut">
               <a:rPr lang="en-US" smtClean="0"/>
-              <a:t>1/27/13</a:t>
+              <a:t>7/21/26</a:t>
             </a:fld>
             <a:endParaRPr lang="en-US"/>
           </a:p>
@@ -2640,10 +2637,9 @@
           <a:lstStyle/>
           <a:p>
             <a:r>
-              <a:rPr lang="en-US" smtClean="0"/>
+              <a:rPr lang="en-US"/>
               <a:t>Click to edit Master title style</a:t>
             </a:r>
-            <a:endParaRPr lang="en-US"/>
           </a:p>
         </p:txBody>
       </p:sp>
@@ -2674,38 +2670,37 @@
           <a:p>
             <a:pPr lvl="0"/>
             <a:r>
-              <a:rPr lang="en-US" smtClean="0"/>
+              <a:rPr lang="en-US"/>
               <a:t>Click to edit Master text styles</a:t>
             </a:r>
           </a:p>
           <a:p>
             <a:pPr lvl="1"/>
             <a:r>
-              <a:rPr lang="en-US" smtClean="0"/>
+              <a:rPr lang="en-US"/>
               <a:t>Second level</a:t>
             </a:r>
           </a:p>
           <a:p>
             <a:pPr lvl="2"/>
             <a:r>
-              <a:rPr lang="en-US" smtClean="0"/>
+              <a:rPr lang="en-US"/>
               <a:t>Third level</a:t>
             </a:r>
           </a:p>
           <a:p>
             <a:pPr lvl="3"/>
             <a:r>
-              <a:rPr lang="en-US" smtClean="0"/>
+              <a:rPr lang="en-US"/>
               <a:t>Fourth level</a:t>
             </a:r>
           </a:p>
           <a:p>
             <a:pPr lvl="4"/>
             <a:r>
-              <a:rPr lang="en-US" smtClean="0"/>
+              <a:rPr lang="en-US"/>
               <a:t>Fifth level</a:t>
             </a:r>
-            <a:endParaRPr lang="en-US"/>
           </a:p>
         </p:txBody>
       </p:sp>
@@ -2744,7 +2739,7 @@
           <a:p>
             <a:fld id="{5BCAD085-E8A6-8845-BD4E-CB4CCA059FC4}" type="datetimeFigureOut">
               <a:rPr lang="en-US" smtClean="0"/>
-              <a:t>1/27/13</a:t>
+              <a:t>7/21/26</a:t>
             </a:fld>
             <a:endParaRPr lang="en-US"/>
           </a:p>
@@ -3103,7 +3098,7 @@
 </file>
 
 <file path=ppt/slides/slide1.xml><?xml version="1.0" encoding="utf-8"?>
-<p:sld xmlns:a="http://schemas.openxmlformats.org/drawingml/2006/main" xmlns:p="http://schemas.openxmlformats.org/presentationml/2006/main" xmlns:r="http://schemas.openxmlformats.org/officeDocument/2006/relationships">
+<p:sld xmlns:a="http://schemas.openxmlformats.org/drawingml/2006/main" xmlns:r="http://schemas.openxmlformats.org/officeDocument/2006/relationships" xmlns:p="http://schemas.openxmlformats.org/presentationml/2006/main">
   <p:cSld>
     <p:bg>
       <p:bgPr>
@@ -3119,7 +3114,14 @@
         <p:cNvGrpSpPr/>
         <p:nvPr/>
       </p:nvGrpSpPr>
-      <p:grpSpPr/>
+      <p:grpSpPr>
+        <a:xfrm>
+          <a:off x="0" y="0"/>
+          <a:ext cx="0" cy="0"/>
+          <a:chOff x="0" y="0"/>
+          <a:chExt cx="0" cy="0"/>
+        </a:xfrm>
+      </p:grpSpPr>
       <p:sp>
         <p:nvSpPr>
           <p:cNvPr id="2" name="Rectangle 1"/>
@@ -3161,6 +3163,7 @@
           <a:lstStyle/>
           <a:p>
             <a:pPr algn="ctr"/>
+            <a:endParaRPr/>
           </a:p>
         </p:txBody>
       </p:sp>
@@ -3277,7 +3280,7 @@
                 <a:latin typeface="Calibri"/>
               </a:rPr>
               <a:t>Pick a 3D-printed I-beam that carries the most load per gram.
-The equations give you a start, not the answer.</a:t>
+The equations give you a start. They will not give you the answer.</a:t>
             </a:r>
           </a:p>
         </p:txBody>
@@ -3291,7 +3294,7 @@
 </file>
 
 <file path=ppt/slides/slide10.xml><?xml version="1.0" encoding="utf-8"?>
-<p:sld xmlns:a="http://schemas.openxmlformats.org/drawingml/2006/main" xmlns:p="http://schemas.openxmlformats.org/presentationml/2006/main" xmlns:r="http://schemas.openxmlformats.org/officeDocument/2006/relationships">
+<p:sld xmlns:a="http://schemas.openxmlformats.org/drawingml/2006/main" xmlns:r="http://schemas.openxmlformats.org/officeDocument/2006/relationships" xmlns:p="http://schemas.openxmlformats.org/presentationml/2006/main">
   <p:cSld>
     <p:bg>
       <p:bgPr>
@@ -3307,7 +3310,14 @@
         <p:cNvGrpSpPr/>
         <p:nvPr/>
       </p:nvGrpSpPr>
-      <p:grpSpPr/>
+      <p:grpSpPr>
+        <a:xfrm>
+          <a:off x="0" y="0"/>
+          <a:ext cx="0" cy="0"/>
+          <a:chOff x="0" y="0"/>
+          <a:chExt cx="0" cy="0"/>
+        </a:xfrm>
+      </p:grpSpPr>
       <p:sp>
         <p:nvSpPr>
           <p:cNvPr id="2" name="TextBox 1"/>
@@ -3388,6 +3398,7 @@
           <a:lstStyle/>
           <a:p>
             <a:pPr algn="ctr"/>
+            <a:endParaRPr/>
           </a:p>
         </p:txBody>
       </p:sp>
@@ -3487,7 +3498,7 @@
 </file>
 
 <file path=ppt/slides/slide11.xml><?xml version="1.0" encoding="utf-8"?>
-<p:sld xmlns:a="http://schemas.openxmlformats.org/drawingml/2006/main" xmlns:p="http://schemas.openxmlformats.org/presentationml/2006/main" xmlns:r="http://schemas.openxmlformats.org/officeDocument/2006/relationships">
+<p:sld xmlns:a="http://schemas.openxmlformats.org/drawingml/2006/main" xmlns:r="http://schemas.openxmlformats.org/officeDocument/2006/relationships" xmlns:p="http://schemas.openxmlformats.org/presentationml/2006/main">
   <p:cSld>
     <p:bg>
       <p:bgPr>
@@ -3503,7 +3514,14 @@
         <p:cNvGrpSpPr/>
         <p:nvPr/>
       </p:nvGrpSpPr>
-      <p:grpSpPr/>
+      <p:grpSpPr>
+        <a:xfrm>
+          <a:off x="0" y="0"/>
+          <a:ext cx="0" cy="0"/>
+          <a:chOff x="0" y="0"/>
+          <a:chExt cx="0" cy="0"/>
+        </a:xfrm>
+      </p:grpSpPr>
       <p:sp>
         <p:nvSpPr>
           <p:cNvPr id="2" name="TextBox 1"/>
@@ -3584,6 +3602,7 @@
           <a:lstStyle/>
           <a:p>
             <a:pPr algn="ctr"/>
+            <a:endParaRPr/>
           </a:p>
         </p:txBody>
       </p:sp>
@@ -3683,7 +3702,7 @@
 </file>
 
 <file path=ppt/slides/slide12.xml><?xml version="1.0" encoding="utf-8"?>
-<p:sld xmlns:a="http://schemas.openxmlformats.org/drawingml/2006/main" xmlns:p="http://schemas.openxmlformats.org/presentationml/2006/main" xmlns:r="http://schemas.openxmlformats.org/officeDocument/2006/relationships">
+<p:sld xmlns:a="http://schemas.openxmlformats.org/drawingml/2006/main" xmlns:r="http://schemas.openxmlformats.org/officeDocument/2006/relationships" xmlns:p="http://schemas.openxmlformats.org/presentationml/2006/main">
   <p:cSld>
     <p:bg>
       <p:bgPr>
@@ -3699,7 +3718,14 @@
         <p:cNvGrpSpPr/>
         <p:nvPr/>
       </p:nvGrpSpPr>
-      <p:grpSpPr/>
+      <p:grpSpPr>
+        <a:xfrm>
+          <a:off x="0" y="0"/>
+          <a:ext cx="0" cy="0"/>
+          <a:chOff x="0" y="0"/>
+          <a:chExt cx="0" cy="0"/>
+        </a:xfrm>
+      </p:grpSpPr>
       <p:sp>
         <p:nvSpPr>
           <p:cNvPr id="2" name="TextBox 1"/>
@@ -3780,6 +3806,7 @@
           <a:lstStyle/>
           <a:p>
             <a:pPr algn="ctr"/>
+            <a:endParaRPr/>
           </a:p>
         </p:txBody>
       </p:sp>
@@ -3894,7 +3921,7 @@
 </file>
 
 <file path=ppt/slides/slide13.xml><?xml version="1.0" encoding="utf-8"?>
-<p:sld xmlns:a="http://schemas.openxmlformats.org/drawingml/2006/main" xmlns:p="http://schemas.openxmlformats.org/presentationml/2006/main" xmlns:r="http://schemas.openxmlformats.org/officeDocument/2006/relationships">
+<p:sld xmlns:a="http://schemas.openxmlformats.org/drawingml/2006/main" xmlns:r="http://schemas.openxmlformats.org/officeDocument/2006/relationships" xmlns:p="http://schemas.openxmlformats.org/presentationml/2006/main">
   <p:cSld>
     <p:bg>
       <p:bgPr>
@@ -3910,7 +3937,14 @@
         <p:cNvGrpSpPr/>
         <p:nvPr/>
       </p:nvGrpSpPr>
-      <p:grpSpPr/>
+      <p:grpSpPr>
+        <a:xfrm>
+          <a:off x="0" y="0"/>
+          <a:ext cx="0" cy="0"/>
+          <a:chOff x="0" y="0"/>
+          <a:chExt cx="0" cy="0"/>
+        </a:xfrm>
+      </p:grpSpPr>
       <p:sp>
         <p:nvSpPr>
           <p:cNvPr id="2" name="TextBox 1"/>
@@ -3991,6 +4025,7 @@
           <a:lstStyle/>
           <a:p>
             <a:pPr algn="ctr"/>
+            <a:endParaRPr/>
           </a:p>
         </p:txBody>
       </p:sp>
@@ -4010,7 +4045,7 @@
         </p:blipFill>
         <p:spPr>
           <a:xfrm>
-            <a:off x="3107953" y="2011680"/>
+            <a:off x="1554480" y="1874520"/>
             <a:ext cx="5975789" cy="1554480"/>
           </a:xfrm>
           <a:prstGeom prst="rect">
@@ -4046,13 +4081,22 @@
               </a:spcAft>
             </a:pPr>
             <a:r>
+              <a:rPr sz="1900" b="0" dirty="0">
+                <a:solidFill>
+                  <a:srgbClr val="0B0B0B"/>
+                </a:solidFill>
+                <a:latin typeface="Calibri"/>
+              </a:rPr>
+              <a:t>A tall, thin-flanged beam does not yield in place. </a:t>
+            </a:r>
+            <a:r>
               <a:rPr sz="1900" b="0">
                 <a:solidFill>
                   <a:srgbClr val="0B0B0B"/>
                 </a:solidFill>
                 <a:latin typeface="Calibri"/>
               </a:rPr>
-              <a:t>A tall, thin-flanged beam does not yield in place. It rolls sideways and twists at a load below its bending strength — a stability failure, not a strength one.</a:t>
+              <a:t>It rolls sideways and twists at a load below its bending strength — a stability failure, not a strength one.</a:t>
             </a:r>
           </a:p>
           <a:p>
@@ -4062,7 +4106,7 @@
               </a:spcAft>
             </a:pPr>
             <a:r>
-              <a:rPr sz="1900" b="0">
+              <a:rPr sz="1900" b="0" dirty="0">
                 <a:solidFill>
                   <a:srgbClr val="0B0B0B"/>
                 </a:solidFill>
@@ -4078,7 +4122,7 @@
               </a:spcAft>
             </a:pPr>
             <a:r>
-              <a:rPr sz="1900" b="0">
+              <a:rPr sz="1900" b="0" dirty="0">
                 <a:solidFill>
                   <a:srgbClr val="0B0B0B"/>
                 </a:solidFill>
@@ -4094,7 +4138,7 @@
               </a:spcAft>
             </a:pPr>
             <a:r>
-              <a:rPr sz="1900" b="0">
+              <a:rPr sz="1900" b="0" dirty="0">
                 <a:solidFill>
                   <a:srgbClr val="0B0B0B"/>
                 </a:solidFill>
@@ -4105,6 +4149,36 @@
           </a:p>
         </p:txBody>
       </p:sp>
+      <p:pic>
+        <p:nvPicPr>
+          <p:cNvPr id="6" name="Picture 5">
+            <a:extLst>
+              <a:ext uri="{FF2B5EF4-FFF2-40B4-BE49-F238E27FC236}">
+                <a16:creationId xmlns:a16="http://schemas.microsoft.com/office/drawing/2014/main" id="{B44F08F5-15FC-FD03-C14B-6C83F72C6A1B}"/>
+              </a:ext>
+            </a:extLst>
+          </p:cNvPr>
+          <p:cNvPicPr>
+            <a:picLocks noChangeAspect="1"/>
+          </p:cNvPicPr>
+          <p:nvPr/>
+        </p:nvPicPr>
+        <p:blipFill>
+          <a:blip r:embed="rId3"/>
+          <a:stretch>
+            <a:fillRect/>
+          </a:stretch>
+        </p:blipFill>
+        <p:spPr>
+          <a:xfrm>
+            <a:off x="8575288" y="1005840"/>
+            <a:ext cx="2706494" cy="2530851"/>
+          </a:xfrm>
+          <a:prstGeom prst="rect">
+            <a:avLst/>
+          </a:prstGeom>
+        </p:spPr>
+      </p:pic>
     </p:spTree>
   </p:cSld>
   <p:clrMapOvr>
@@ -4114,7 +4188,7 @@
 </file>
 
 <file path=ppt/slides/slide14.xml><?xml version="1.0" encoding="utf-8"?>
-<p:sld xmlns:a="http://schemas.openxmlformats.org/drawingml/2006/main" xmlns:p="http://schemas.openxmlformats.org/presentationml/2006/main" xmlns:r="http://schemas.openxmlformats.org/officeDocument/2006/relationships">
+<p:sld xmlns:a="http://schemas.openxmlformats.org/drawingml/2006/main" xmlns:r="http://schemas.openxmlformats.org/officeDocument/2006/relationships" xmlns:p="http://schemas.openxmlformats.org/presentationml/2006/main">
   <p:cSld>
     <p:bg>
       <p:bgPr>
@@ -4130,7 +4204,14 @@
         <p:cNvGrpSpPr/>
         <p:nvPr/>
       </p:nvGrpSpPr>
-      <p:grpSpPr/>
+      <p:grpSpPr>
+        <a:xfrm>
+          <a:off x="0" y="0"/>
+          <a:ext cx="0" cy="0"/>
+          <a:chOff x="0" y="0"/>
+          <a:chExt cx="0" cy="0"/>
+        </a:xfrm>
+      </p:grpSpPr>
       <p:sp>
         <p:nvSpPr>
           <p:cNvPr id="2" name="TextBox 1"/>
@@ -4211,6 +4292,7 @@
           <a:lstStyle/>
           <a:p>
             <a:pPr algn="ctr"/>
+            <a:endParaRPr/>
           </a:p>
         </p:txBody>
       </p:sp>
@@ -4350,7 +4432,7 @@
 </file>
 
 <file path=ppt/slides/slide15.xml><?xml version="1.0" encoding="utf-8"?>
-<p:sld xmlns:a="http://schemas.openxmlformats.org/drawingml/2006/main" xmlns:p="http://schemas.openxmlformats.org/presentationml/2006/main" xmlns:r="http://schemas.openxmlformats.org/officeDocument/2006/relationships">
+<p:sld xmlns:a="http://schemas.openxmlformats.org/drawingml/2006/main" xmlns:r="http://schemas.openxmlformats.org/officeDocument/2006/relationships" xmlns:p="http://schemas.openxmlformats.org/presentationml/2006/main">
   <p:cSld>
     <p:bg>
       <p:bgPr>
@@ -4366,7 +4448,14 @@
         <p:cNvGrpSpPr/>
         <p:nvPr/>
       </p:nvGrpSpPr>
-      <p:grpSpPr/>
+      <p:grpSpPr>
+        <a:xfrm>
+          <a:off x="0" y="0"/>
+          <a:ext cx="0" cy="0"/>
+          <a:chOff x="0" y="0"/>
+          <a:chExt cx="0" cy="0"/>
+        </a:xfrm>
+      </p:grpSpPr>
       <p:sp>
         <p:nvSpPr>
           <p:cNvPr id="2" name="TextBox 1"/>
@@ -4447,6 +4536,7 @@
           <a:lstStyle/>
           <a:p>
             <a:pPr algn="ctr"/>
+            <a:endParaRPr/>
           </a:p>
         </p:txBody>
       </p:sp>
@@ -4586,7 +4676,7 @@
 </file>
 
 <file path=ppt/slides/slide16.xml><?xml version="1.0" encoding="utf-8"?>
-<p:sld xmlns:a="http://schemas.openxmlformats.org/drawingml/2006/main" xmlns:p="http://schemas.openxmlformats.org/presentationml/2006/main" xmlns:r="http://schemas.openxmlformats.org/officeDocument/2006/relationships">
+<p:sld xmlns:a="http://schemas.openxmlformats.org/drawingml/2006/main" xmlns:r="http://schemas.openxmlformats.org/officeDocument/2006/relationships" xmlns:p="http://schemas.openxmlformats.org/presentationml/2006/main">
   <p:cSld>
     <p:bg>
       <p:bgPr>
@@ -4602,7 +4692,14 @@
         <p:cNvGrpSpPr/>
         <p:nvPr/>
       </p:nvGrpSpPr>
-      <p:grpSpPr/>
+      <p:grpSpPr>
+        <a:xfrm>
+          <a:off x="0" y="0"/>
+          <a:ext cx="0" cy="0"/>
+          <a:chOff x="0" y="0"/>
+          <a:chExt cx="0" cy="0"/>
+        </a:xfrm>
+      </p:grpSpPr>
       <p:sp>
         <p:nvSpPr>
           <p:cNvPr id="2" name="TextBox 1"/>
@@ -4683,6 +4780,7 @@
           <a:lstStyle/>
           <a:p>
             <a:pPr algn="ctr"/>
+            <a:endParaRPr/>
           </a:p>
         </p:txBody>
       </p:sp>
@@ -4732,7 +4830,7 @@
           </a:bodyPr>
           <a:lstStyle/>
           <a:p>
-            <a:pPr algn="l" lvl="1">
+            <a:pPr lvl="1" algn="l">
               <a:spcAft>
                 <a:spcPts val="800"/>
               </a:spcAft>
@@ -4748,7 +4846,7 @@
             </a:r>
           </a:p>
           <a:p>
-            <a:pPr algn="l" lvl="1">
+            <a:pPr lvl="1" algn="l">
               <a:spcAft>
                 <a:spcPts val="800"/>
               </a:spcAft>
@@ -4764,7 +4862,7 @@
             </a:r>
           </a:p>
           <a:p>
-            <a:pPr algn="l" lvl="1">
+            <a:pPr lvl="1" algn="l">
               <a:spcAft>
                 <a:spcPts val="800"/>
               </a:spcAft>
@@ -4806,7 +4904,7 @@
 </file>
 
 <file path=ppt/slides/slide17.xml><?xml version="1.0" encoding="utf-8"?>
-<p:sld xmlns:a="http://schemas.openxmlformats.org/drawingml/2006/main" xmlns:p="http://schemas.openxmlformats.org/presentationml/2006/main" xmlns:r="http://schemas.openxmlformats.org/officeDocument/2006/relationships">
+<p:sld xmlns:a="http://schemas.openxmlformats.org/drawingml/2006/main" xmlns:r="http://schemas.openxmlformats.org/officeDocument/2006/relationships" xmlns:p="http://schemas.openxmlformats.org/presentationml/2006/main">
   <p:cSld>
     <p:bg>
       <p:bgPr>
@@ -4822,7 +4920,14 @@
         <p:cNvGrpSpPr/>
         <p:nvPr/>
       </p:nvGrpSpPr>
-      <p:grpSpPr/>
+      <p:grpSpPr>
+        <a:xfrm>
+          <a:off x="0" y="0"/>
+          <a:ext cx="0" cy="0"/>
+          <a:chOff x="0" y="0"/>
+          <a:chExt cx="0" cy="0"/>
+        </a:xfrm>
+      </p:grpSpPr>
       <p:sp>
         <p:nvSpPr>
           <p:cNvPr id="2" name="TextBox 1"/>
@@ -4903,6 +5008,7 @@
           <a:lstStyle/>
           <a:p>
             <a:pPr algn="ctr"/>
+            <a:endParaRPr/>
           </a:p>
         </p:txBody>
       </p:sp>
@@ -4940,11 +5046,11 @@
                 </a:solidFill>
                 <a:latin typeface="Calibri"/>
               </a:rPr>
-              <a:t>The formula is exact for an idealized beam, and ours differs from it in four ways.</a:t>
-            </a:r>
-          </a:p>
-          <a:p>
-            <a:pPr algn="l" lvl="1">
+              <a:t>The formula is exact only for an idealized beam. Ours is not quite that beam.</a:t>
+            </a:r>
+          </a:p>
+          <a:p>
+            <a:pPr lvl="1" algn="l">
               <a:spcAft>
                 <a:spcPts val="1200"/>
               </a:spcAft>
@@ -4960,7 +5066,7 @@
             </a:r>
           </a:p>
           <a:p>
-            <a:pPr algn="l" lvl="1">
+            <a:pPr lvl="1" algn="l">
               <a:spcAft>
                 <a:spcPts val="1200"/>
               </a:spcAft>
@@ -4976,7 +5082,7 @@
             </a:r>
           </a:p>
           <a:p>
-            <a:pPr algn="l" lvl="1">
+            <a:pPr lvl="1" algn="l">
               <a:spcAft>
                 <a:spcPts val="1200"/>
               </a:spcAft>
@@ -4992,7 +5098,7 @@
             </a:r>
           </a:p>
           <a:p>
-            <a:pPr algn="l" lvl="1">
+            <a:pPr lvl="1" algn="l">
               <a:spcAft>
                 <a:spcPts val="1200"/>
               </a:spcAft>
@@ -5020,7 +5126,7 @@
                 </a:solidFill>
                 <a:latin typeface="Calibri"/>
               </a:rPr>
-              <a:t>Each gap widens the error bar you should carry on the LTB capacity.</a:t>
+              <a:t>Each gap is a reason the equation narrows the answer without settling it.</a:t>
             </a:r>
           </a:p>
         </p:txBody>
@@ -5034,7 +5140,7 @@
 </file>
 
 <file path=ppt/slides/slide18.xml><?xml version="1.0" encoding="utf-8"?>
-<p:sld xmlns:a="http://schemas.openxmlformats.org/drawingml/2006/main" xmlns:p="http://schemas.openxmlformats.org/presentationml/2006/main" xmlns:r="http://schemas.openxmlformats.org/officeDocument/2006/relationships">
+<p:sld xmlns:a="http://schemas.openxmlformats.org/drawingml/2006/main" xmlns:r="http://schemas.openxmlformats.org/officeDocument/2006/relationships" xmlns:p="http://schemas.openxmlformats.org/presentationml/2006/main">
   <p:cSld>
     <p:bg>
       <p:bgPr>
@@ -5050,7 +5156,14 @@
         <p:cNvGrpSpPr/>
         <p:nvPr/>
       </p:nvGrpSpPr>
-      <p:grpSpPr/>
+      <p:grpSpPr>
+        <a:xfrm>
+          <a:off x="0" y="0"/>
+          <a:ext cx="0" cy="0"/>
+          <a:chOff x="0" y="0"/>
+          <a:chExt cx="0" cy="0"/>
+        </a:xfrm>
+      </p:grpSpPr>
       <p:sp>
         <p:nvSpPr>
           <p:cNvPr id="2" name="TextBox 1"/>
@@ -5131,6 +5244,7 @@
           <a:lstStyle/>
           <a:p>
             <a:pPr algn="ctr"/>
+            <a:endParaRPr/>
           </a:p>
         </p:txBody>
       </p:sp>
@@ -5270,7 +5384,7 @@
 </file>
 
 <file path=ppt/slides/slide19.xml><?xml version="1.0" encoding="utf-8"?>
-<p:sld xmlns:a="http://schemas.openxmlformats.org/drawingml/2006/main" xmlns:p="http://schemas.openxmlformats.org/presentationml/2006/main" xmlns:r="http://schemas.openxmlformats.org/officeDocument/2006/relationships">
+<p:sld xmlns:a="http://schemas.openxmlformats.org/drawingml/2006/main" xmlns:r="http://schemas.openxmlformats.org/officeDocument/2006/relationships" xmlns:p="http://schemas.openxmlformats.org/presentationml/2006/main">
   <p:cSld>
     <p:bg>
       <p:bgPr>
@@ -5286,7 +5400,14 @@
         <p:cNvGrpSpPr/>
         <p:nvPr/>
       </p:nvGrpSpPr>
-      <p:grpSpPr/>
+      <p:grpSpPr>
+        <a:xfrm>
+          <a:off x="0" y="0"/>
+          <a:ext cx="0" cy="0"/>
+          <a:chOff x="0" y="0"/>
+          <a:chExt cx="0" cy="0"/>
+        </a:xfrm>
+      </p:grpSpPr>
       <p:sp>
         <p:nvSpPr>
           <p:cNvPr id="2" name="TextBox 1"/>
@@ -5367,6 +5488,7 @@
           <a:lstStyle/>
           <a:p>
             <a:pPr algn="ctr"/>
+            <a:endParaRPr/>
           </a:p>
         </p:txBody>
       </p:sp>
@@ -5404,11 +5526,11 @@
                 </a:solidFill>
                 <a:latin typeface="Calibri"/>
               </a:rPr>
-              <a:t>You just saw Iy, J, Cw, warping, load height, and effective length. You are responsible for this much of it:</a:t>
-            </a:r>
-          </a:p>
-          <a:p>
-            <a:pPr algn="l" lvl="1">
+              <a:t>You just saw Iy, J, Cw, warping, load height, and effective length. Here is exactly what you are responsible for:</a:t>
+            </a:r>
+          </a:p>
+          <a:p>
+            <a:pPr lvl="1" algn="l">
               <a:spcAft>
                 <a:spcPts val="1200"/>
               </a:spcAft>
@@ -5424,7 +5546,7 @@
             </a:r>
           </a:p>
           <a:p>
-            <a:pPr algn="l" lvl="1">
+            <a:pPr lvl="1" algn="l">
               <a:spcAft>
                 <a:spcPts val="1200"/>
               </a:spcAft>
@@ -5440,7 +5562,7 @@
             </a:r>
           </a:p>
           <a:p>
-            <a:pPr algn="l" lvl="1">
+            <a:pPr lvl="1" algn="l">
               <a:spcAft>
                 <a:spcPts val="1200"/>
               </a:spcAft>
@@ -5468,7 +5590,7 @@
                 </a:solidFill>
                 <a:latin typeface="Calibri"/>
               </a:rPr>
-              <a:t>The test of understanding: what happens to the LTB branch if the fixture braces the compression flange, and would you still trust the equation optimum?</a:t>
+              <a:t>The test of understanding is not the derivation. It is: what happens to the LTB branch if the fixture braces the compression flange, and would you still trust the equation optimum?</a:t>
             </a:r>
           </a:p>
         </p:txBody>
@@ -5482,7 +5604,7 @@
 </file>
 
 <file path=ppt/slides/slide2.xml><?xml version="1.0" encoding="utf-8"?>
-<p:sld xmlns:a="http://schemas.openxmlformats.org/drawingml/2006/main" xmlns:p="http://schemas.openxmlformats.org/presentationml/2006/main" xmlns:r="http://schemas.openxmlformats.org/officeDocument/2006/relationships">
+<p:sld xmlns:a="http://schemas.openxmlformats.org/drawingml/2006/main" xmlns:r="http://schemas.openxmlformats.org/officeDocument/2006/relationships" xmlns:p="http://schemas.openxmlformats.org/presentationml/2006/main">
   <p:cSld>
     <p:bg>
       <p:bgPr>
@@ -5498,7 +5620,14 @@
         <p:cNvGrpSpPr/>
         <p:nvPr/>
       </p:nvGrpSpPr>
-      <p:grpSpPr/>
+      <p:grpSpPr>
+        <a:xfrm>
+          <a:off x="0" y="0"/>
+          <a:ext cx="0" cy="0"/>
+          <a:chOff x="0" y="0"/>
+          <a:chExt cx="0" cy="0"/>
+        </a:xfrm>
+      </p:grpSpPr>
       <p:sp>
         <p:nvSpPr>
           <p:cNvPr id="2" name="TextBox 1"/>
@@ -5579,6 +5708,7 @@
           <a:lstStyle/>
           <a:p>
             <a:pPr algn="ctr"/>
+            <a:endParaRPr/>
           </a:p>
         </p:txBody>
       </p:sp>
@@ -5604,7 +5734,7 @@
           </a:bodyPr>
           <a:lstStyle/>
           <a:p>
-            <a:pPr algn="l" lvl="1">
+            <a:pPr lvl="1" algn="l">
               <a:spcAft>
                 <a:spcPts val="1200"/>
               </a:spcAft>
@@ -5620,7 +5750,7 @@
             </a:r>
           </a:p>
           <a:p>
-            <a:pPr algn="l" lvl="1">
+            <a:pPr lvl="1" algn="l">
               <a:spcAft>
                 <a:spcPts val="1200"/>
               </a:spcAft>
@@ -5636,7 +5766,7 @@
             </a:r>
           </a:p>
           <a:p>
-            <a:pPr algn="l" lvl="1">
+            <a:pPr lvl="1" algn="l">
               <a:spcAft>
                 <a:spcPts val="1200"/>
               </a:spcAft>
@@ -5652,7 +5782,7 @@
             </a:r>
           </a:p>
           <a:p>
-            <a:pPr algn="l" lvl="1">
+            <a:pPr lvl="1" algn="l">
               <a:spcAft>
                 <a:spcPts val="1200"/>
               </a:spcAft>
@@ -5678,7 +5808,7 @@
 </file>
 
 <file path=ppt/slides/slide20.xml><?xml version="1.0" encoding="utf-8"?>
-<p:sld xmlns:a="http://schemas.openxmlformats.org/drawingml/2006/main" xmlns:p="http://schemas.openxmlformats.org/presentationml/2006/main" xmlns:r="http://schemas.openxmlformats.org/officeDocument/2006/relationships">
+<p:sld xmlns:a="http://schemas.openxmlformats.org/drawingml/2006/main" xmlns:r="http://schemas.openxmlformats.org/officeDocument/2006/relationships" xmlns:p="http://schemas.openxmlformats.org/presentationml/2006/main">
   <p:cSld>
     <p:bg>
       <p:bgPr>
@@ -5694,7 +5824,14 @@
         <p:cNvGrpSpPr/>
         <p:nvPr/>
       </p:nvGrpSpPr>
-      <p:grpSpPr/>
+      <p:grpSpPr>
+        <a:xfrm>
+          <a:off x="0" y="0"/>
+          <a:ext cx="0" cy="0"/>
+          <a:chOff x="0" y="0"/>
+          <a:chExt cx="0" cy="0"/>
+        </a:xfrm>
+      </p:grpSpPr>
       <p:sp>
         <p:nvSpPr>
           <p:cNvPr id="2" name="TextBox 1"/>
@@ -5775,6 +5912,7 @@
           <a:lstStyle/>
           <a:p>
             <a:pPr algn="ctr"/>
+            <a:endParaRPr/>
           </a:p>
         </p:txBody>
       </p:sp>
@@ -5850,7 +5988,7 @@
 </file>
 
 <file path=ppt/slides/slide21.xml><?xml version="1.0" encoding="utf-8"?>
-<p:sld xmlns:a="http://schemas.openxmlformats.org/drawingml/2006/main" xmlns:p="http://schemas.openxmlformats.org/presentationml/2006/main" xmlns:r="http://schemas.openxmlformats.org/officeDocument/2006/relationships">
+<p:sld xmlns:a="http://schemas.openxmlformats.org/drawingml/2006/main" xmlns:r="http://schemas.openxmlformats.org/officeDocument/2006/relationships" xmlns:p="http://schemas.openxmlformats.org/presentationml/2006/main">
   <p:cSld>
     <p:bg>
       <p:bgPr>
@@ -5866,7 +6004,14 @@
         <p:cNvGrpSpPr/>
         <p:nvPr/>
       </p:nvGrpSpPr>
-      <p:grpSpPr/>
+      <p:grpSpPr>
+        <a:xfrm>
+          <a:off x="0" y="0"/>
+          <a:ext cx="0" cy="0"/>
+          <a:chOff x="0" y="0"/>
+          <a:chExt cx="0" cy="0"/>
+        </a:xfrm>
+      </p:grpSpPr>
       <p:sp>
         <p:nvSpPr>
           <p:cNvPr id="2" name="TextBox 1"/>
@@ -5947,6 +6092,7 @@
           <a:lstStyle/>
           <a:p>
             <a:pPr algn="ctr"/>
+            <a:endParaRPr/>
           </a:p>
         </p:txBody>
       </p:sp>
@@ -6004,7 +6150,7 @@
             </a:r>
           </a:p>
           <a:p>
-            <a:pPr algn="l" lvl="1">
+            <a:pPr lvl="1" algn="l">
               <a:spcAft>
                 <a:spcPts val="1200"/>
               </a:spcAft>
@@ -6020,7 +6166,7 @@
             </a:r>
           </a:p>
           <a:p>
-            <a:pPr algn="l" lvl="1">
+            <a:pPr lvl="1" algn="l">
               <a:spcAft>
                 <a:spcPts val="1200"/>
               </a:spcAft>
@@ -6062,7 +6208,7 @@
 </file>
 
 <file path=ppt/slides/slide22.xml><?xml version="1.0" encoding="utf-8"?>
-<p:sld xmlns:a="http://schemas.openxmlformats.org/drawingml/2006/main" xmlns:p="http://schemas.openxmlformats.org/presentationml/2006/main" xmlns:r="http://schemas.openxmlformats.org/officeDocument/2006/relationships">
+<p:sld xmlns:a="http://schemas.openxmlformats.org/drawingml/2006/main" xmlns:r="http://schemas.openxmlformats.org/officeDocument/2006/relationships" xmlns:p="http://schemas.openxmlformats.org/presentationml/2006/main">
   <p:cSld>
     <p:bg>
       <p:bgPr>
@@ -6078,7 +6224,14 @@
         <p:cNvGrpSpPr/>
         <p:nvPr/>
       </p:nvGrpSpPr>
-      <p:grpSpPr/>
+      <p:grpSpPr>
+        <a:xfrm>
+          <a:off x="0" y="0"/>
+          <a:ext cx="0" cy="0"/>
+          <a:chOff x="0" y="0"/>
+          <a:chExt cx="0" cy="0"/>
+        </a:xfrm>
+      </p:grpSpPr>
       <p:sp>
         <p:nvSpPr>
           <p:cNvPr id="2" name="TextBox 1"/>
@@ -6159,6 +6312,7 @@
           <a:lstStyle/>
           <a:p>
             <a:pPr algn="ctr"/>
+            <a:endParaRPr/>
           </a:p>
         </p:txBody>
       </p:sp>
@@ -6234,7 +6388,7 @@
 </file>
 
 <file path=ppt/slides/slide23.xml><?xml version="1.0" encoding="utf-8"?>
-<p:sld xmlns:a="http://schemas.openxmlformats.org/drawingml/2006/main" xmlns:p="http://schemas.openxmlformats.org/presentationml/2006/main" xmlns:r="http://schemas.openxmlformats.org/officeDocument/2006/relationships">
+<p:sld xmlns:a="http://schemas.openxmlformats.org/drawingml/2006/main" xmlns:r="http://schemas.openxmlformats.org/officeDocument/2006/relationships" xmlns:p="http://schemas.openxmlformats.org/presentationml/2006/main">
   <p:cSld>
     <p:bg>
       <p:bgPr>
@@ -6250,7 +6404,14 @@
         <p:cNvGrpSpPr/>
         <p:nvPr/>
       </p:nvGrpSpPr>
-      <p:grpSpPr/>
+      <p:grpSpPr>
+        <a:xfrm>
+          <a:off x="0" y="0"/>
+          <a:ext cx="0" cy="0"/>
+          <a:chOff x="0" y="0"/>
+          <a:chExt cx="0" cy="0"/>
+        </a:xfrm>
+      </p:grpSpPr>
       <p:sp>
         <p:nvSpPr>
           <p:cNvPr id="2" name="TextBox 1"/>
@@ -6331,6 +6492,7 @@
           <a:lstStyle/>
           <a:p>
             <a:pPr algn="ctr"/>
+            <a:endParaRPr/>
           </a:p>
         </p:txBody>
       </p:sp>
@@ -6372,7 +6534,7 @@
             </a:r>
           </a:p>
           <a:p>
-            <a:pPr algn="l" lvl="1">
+            <a:pPr lvl="1" algn="l">
               <a:spcAft>
                 <a:spcPts val="1200"/>
               </a:spcAft>
@@ -6388,7 +6550,7 @@
             </a:r>
           </a:p>
           <a:p>
-            <a:pPr algn="l" lvl="1">
+            <a:pPr lvl="1" algn="l">
               <a:spcAft>
                 <a:spcPts val="1200"/>
               </a:spcAft>
@@ -6404,7 +6566,7 @@
             </a:r>
           </a:p>
           <a:p>
-            <a:pPr algn="l" lvl="1">
+            <a:pPr lvl="1" algn="l">
               <a:spcAft>
                 <a:spcPts val="1200"/>
               </a:spcAft>
@@ -6420,7 +6582,7 @@
             </a:r>
           </a:p>
           <a:p>
-            <a:pPr algn="l" lvl="1">
+            <a:pPr lvl="1" algn="l">
               <a:spcAft>
                 <a:spcPts val="1200"/>
               </a:spcAft>
@@ -6462,7 +6624,7 @@
 </file>
 
 <file path=ppt/slides/slide24.xml><?xml version="1.0" encoding="utf-8"?>
-<p:sld xmlns:a="http://schemas.openxmlformats.org/drawingml/2006/main" xmlns:p="http://schemas.openxmlformats.org/presentationml/2006/main" xmlns:r="http://schemas.openxmlformats.org/officeDocument/2006/relationships">
+<p:sld xmlns:a="http://schemas.openxmlformats.org/drawingml/2006/main" xmlns:r="http://schemas.openxmlformats.org/officeDocument/2006/relationships" xmlns:p="http://schemas.openxmlformats.org/presentationml/2006/main">
   <p:cSld>
     <p:bg>
       <p:bgPr>
@@ -6478,7 +6640,14 @@
         <p:cNvGrpSpPr/>
         <p:nvPr/>
       </p:nvGrpSpPr>
-      <p:grpSpPr/>
+      <p:grpSpPr>
+        <a:xfrm>
+          <a:off x="0" y="0"/>
+          <a:ext cx="0" cy="0"/>
+          <a:chOff x="0" y="0"/>
+          <a:chExt cx="0" cy="0"/>
+        </a:xfrm>
+      </p:grpSpPr>
       <p:sp>
         <p:nvSpPr>
           <p:cNvPr id="2" name="TextBox 1"/>
@@ -6559,6 +6728,7 @@
           <a:lstStyle/>
           <a:p>
             <a:pPr algn="ctr"/>
+            <a:endParaRPr/>
           </a:p>
         </p:txBody>
       </p:sp>
@@ -6634,7 +6804,7 @@
 </file>
 
 <file path=ppt/slides/slide25.xml><?xml version="1.0" encoding="utf-8"?>
-<p:sld xmlns:a="http://schemas.openxmlformats.org/drawingml/2006/main" xmlns:p="http://schemas.openxmlformats.org/presentationml/2006/main" xmlns:r="http://schemas.openxmlformats.org/officeDocument/2006/relationships">
+<p:sld xmlns:a="http://schemas.openxmlformats.org/drawingml/2006/main" xmlns:r="http://schemas.openxmlformats.org/officeDocument/2006/relationships" xmlns:p="http://schemas.openxmlformats.org/presentationml/2006/main">
   <p:cSld>
     <p:bg>
       <p:bgPr>
@@ -6650,7 +6820,14 @@
         <p:cNvGrpSpPr/>
         <p:nvPr/>
       </p:nvGrpSpPr>
-      <p:grpSpPr/>
+      <p:grpSpPr>
+        <a:xfrm>
+          <a:off x="0" y="0"/>
+          <a:ext cx="0" cy="0"/>
+          <a:chOff x="0" y="0"/>
+          <a:chExt cx="0" cy="0"/>
+        </a:xfrm>
+      </p:grpSpPr>
       <p:sp>
         <p:nvSpPr>
           <p:cNvPr id="2" name="TextBox 1"/>
@@ -6731,6 +6908,7 @@
           <a:lstStyle/>
           <a:p>
             <a:pPr algn="ctr"/>
+            <a:endParaRPr/>
           </a:p>
         </p:txBody>
       </p:sp>
@@ -6772,7 +6950,7 @@
             </a:r>
           </a:p>
           <a:p>
-            <a:pPr algn="l" lvl="1">
+            <a:pPr lvl="1" algn="l">
               <a:spcAft>
                 <a:spcPts val="1200"/>
               </a:spcAft>
@@ -6788,7 +6966,7 @@
             </a:r>
           </a:p>
           <a:p>
-            <a:pPr algn="l" lvl="1">
+            <a:pPr lvl="1" algn="l">
               <a:spcAft>
                 <a:spcPts val="1200"/>
               </a:spcAft>
@@ -6804,7 +6982,7 @@
             </a:r>
           </a:p>
           <a:p>
-            <a:pPr algn="l" lvl="1">
+            <a:pPr lvl="1" algn="l">
               <a:spcAft>
                 <a:spcPts val="1200"/>
               </a:spcAft>
@@ -6820,7 +6998,7 @@
             </a:r>
           </a:p>
           <a:p>
-            <a:pPr algn="l" lvl="1">
+            <a:pPr lvl="1" algn="l">
               <a:spcAft>
                 <a:spcPts val="1200"/>
               </a:spcAft>
@@ -6836,7 +7014,7 @@
             </a:r>
           </a:p>
           <a:p>
-            <a:pPr algn="l" lvl="1">
+            <a:pPr lvl="1" algn="l">
               <a:spcAft>
                 <a:spcPts val="1200"/>
               </a:spcAft>
@@ -6878,7 +7056,7 @@
 </file>
 
 <file path=ppt/slides/slide3.xml><?xml version="1.0" encoding="utf-8"?>
-<p:sld xmlns:a="http://schemas.openxmlformats.org/drawingml/2006/main" xmlns:p="http://schemas.openxmlformats.org/presentationml/2006/main" xmlns:r="http://schemas.openxmlformats.org/officeDocument/2006/relationships">
+<p:sld xmlns:a="http://schemas.openxmlformats.org/drawingml/2006/main" xmlns:r="http://schemas.openxmlformats.org/officeDocument/2006/relationships" xmlns:p="http://schemas.openxmlformats.org/presentationml/2006/main">
   <p:cSld>
     <p:bg>
       <p:bgPr>
@@ -6894,7 +7072,14 @@
         <p:cNvGrpSpPr/>
         <p:nvPr/>
       </p:nvGrpSpPr>
-      <p:grpSpPr/>
+      <p:grpSpPr>
+        <a:xfrm>
+          <a:off x="0" y="0"/>
+          <a:ext cx="0" cy="0"/>
+          <a:chOff x="0" y="0"/>
+          <a:chExt cx="0" cy="0"/>
+        </a:xfrm>
+      </p:grpSpPr>
       <p:sp>
         <p:nvSpPr>
           <p:cNvPr id="2" name="TextBox 1"/>
@@ -6975,6 +7160,7 @@
           <a:lstStyle/>
           <a:p>
             <a:pPr algn="ctr"/>
+            <a:endParaRPr/>
           </a:p>
         </p:txBody>
       </p:sp>
@@ -7011,7 +7197,7 @@
 </file>
 
 <file path=ppt/slides/slide4.xml><?xml version="1.0" encoding="utf-8"?>
-<p:sld xmlns:a="http://schemas.openxmlformats.org/drawingml/2006/main" xmlns:p="http://schemas.openxmlformats.org/presentationml/2006/main" xmlns:r="http://schemas.openxmlformats.org/officeDocument/2006/relationships">
+<p:sld xmlns:a="http://schemas.openxmlformats.org/drawingml/2006/main" xmlns:r="http://schemas.openxmlformats.org/officeDocument/2006/relationships" xmlns:p="http://schemas.openxmlformats.org/presentationml/2006/main">
   <p:cSld>
     <p:bg>
       <p:bgPr>
@@ -7027,7 +7213,14 @@
         <p:cNvGrpSpPr/>
         <p:nvPr/>
       </p:nvGrpSpPr>
-      <p:grpSpPr/>
+      <p:grpSpPr>
+        <a:xfrm>
+          <a:off x="0" y="0"/>
+          <a:ext cx="0" cy="0"/>
+          <a:chOff x="0" y="0"/>
+          <a:chExt cx="0" cy="0"/>
+        </a:xfrm>
+      </p:grpSpPr>
       <p:sp>
         <p:nvSpPr>
           <p:cNvPr id="2" name="TextBox 1"/>
@@ -7108,6 +7301,7 @@
           <a:lstStyle/>
           <a:p>
             <a:pPr algn="ctr"/>
+            <a:endParaRPr/>
           </a:p>
         </p:txBody>
       </p:sp>
@@ -7149,7 +7343,7 @@
             </a:r>
           </a:p>
           <a:p>
-            <a:pPr algn="l" lvl="1">
+            <a:pPr lvl="1" algn="l">
               <a:spcAft>
                 <a:spcPts val="1200"/>
               </a:spcAft>
@@ -7165,7 +7359,7 @@
             </a:r>
           </a:p>
           <a:p>
-            <a:pPr algn="l" lvl="1">
+            <a:pPr lvl="1" algn="l">
               <a:spcAft>
                 <a:spcPts val="1200"/>
               </a:spcAft>
@@ -7181,7 +7375,7 @@
             </a:r>
           </a:p>
           <a:p>
-            <a:pPr algn="l" lvl="1">
+            <a:pPr lvl="1" algn="l">
               <a:spcAft>
                 <a:spcPts val="1200"/>
               </a:spcAft>
@@ -7209,7 +7403,7 @@
                 </a:solidFill>
                 <a:latin typeface="Calibri"/>
               </a:rPr>
-              <a:t>We will price the layer-line mode with one calibrated number — but that number drifts with print session and support condition, and the other two problems remain. The equations narrow the problem without solving it.</a:t>
+              <a:t>We will price the layer-line mode with one calibrated number — but that number drifts with print session and support condition, and the other two problems remain. The equations narrow the problem. They do not solve it.</a:t>
             </a:r>
           </a:p>
         </p:txBody>
@@ -7223,7 +7417,7 @@
 </file>
 
 <file path=ppt/slides/slide5.xml><?xml version="1.0" encoding="utf-8"?>
-<p:sld xmlns:a="http://schemas.openxmlformats.org/drawingml/2006/main" xmlns:p="http://schemas.openxmlformats.org/presentationml/2006/main" xmlns:r="http://schemas.openxmlformats.org/officeDocument/2006/relationships">
+<p:sld xmlns:a="http://schemas.openxmlformats.org/drawingml/2006/main" xmlns:r="http://schemas.openxmlformats.org/officeDocument/2006/relationships" xmlns:p="http://schemas.openxmlformats.org/presentationml/2006/main">
   <p:cSld>
     <p:bg>
       <p:bgPr>
@@ -7239,7 +7433,14 @@
         <p:cNvGrpSpPr/>
         <p:nvPr/>
       </p:nvGrpSpPr>
-      <p:grpSpPr/>
+      <p:grpSpPr>
+        <a:xfrm>
+          <a:off x="0" y="0"/>
+          <a:ext cx="0" cy="0"/>
+          <a:chOff x="0" y="0"/>
+          <a:chExt cx="0" cy="0"/>
+        </a:xfrm>
+      </p:grpSpPr>
       <p:sp>
         <p:nvSpPr>
           <p:cNvPr id="2" name="TextBox 1"/>
@@ -7320,6 +7521,7 @@
           <a:lstStyle/>
           <a:p>
             <a:pPr algn="ctr"/>
+            <a:endParaRPr/>
           </a:p>
         </p:txBody>
       </p:sp>
@@ -7345,7 +7547,7 @@
           </a:bodyPr>
           <a:lstStyle/>
           <a:p>
-            <a:pPr algn="l" lvl="1">
+            <a:pPr lvl="1" algn="l">
               <a:spcAft>
                 <a:spcPts val="1200"/>
               </a:spcAft>
@@ -7361,7 +7563,7 @@
             </a:r>
           </a:p>
           <a:p>
-            <a:pPr algn="l" lvl="1">
+            <a:pPr lvl="1" algn="l">
               <a:spcAft>
                 <a:spcPts val="1200"/>
               </a:spcAft>
@@ -7377,7 +7579,7 @@
             </a:r>
           </a:p>
           <a:p>
-            <a:pPr algn="l" lvl="1">
+            <a:pPr lvl="1" algn="l">
               <a:spcAft>
                 <a:spcPts val="1200"/>
               </a:spcAft>
@@ -7419,7 +7621,7 @@
 </file>
 
 <file path=ppt/slides/slide6.xml><?xml version="1.0" encoding="utf-8"?>
-<p:sld xmlns:a="http://schemas.openxmlformats.org/drawingml/2006/main" xmlns:p="http://schemas.openxmlformats.org/presentationml/2006/main" xmlns:r="http://schemas.openxmlformats.org/officeDocument/2006/relationships">
+<p:sld xmlns:a="http://schemas.openxmlformats.org/drawingml/2006/main" xmlns:r="http://schemas.openxmlformats.org/officeDocument/2006/relationships" xmlns:p="http://schemas.openxmlformats.org/presentationml/2006/main">
   <p:cSld>
     <p:bg>
       <p:bgPr>
@@ -7435,7 +7637,14 @@
         <p:cNvGrpSpPr/>
         <p:nvPr/>
       </p:nvGrpSpPr>
-      <p:grpSpPr/>
+      <p:grpSpPr>
+        <a:xfrm>
+          <a:off x="0" y="0"/>
+          <a:ext cx="0" cy="0"/>
+          <a:chOff x="0" y="0"/>
+          <a:chExt cx="0" cy="0"/>
+        </a:xfrm>
+      </p:grpSpPr>
       <p:sp>
         <p:nvSpPr>
           <p:cNvPr id="2" name="TextBox 1"/>
@@ -7516,6 +7725,7 @@
           <a:lstStyle/>
           <a:p>
             <a:pPr algn="ctr"/>
+            <a:endParaRPr/>
           </a:p>
         </p:txBody>
       </p:sp>
@@ -7576,7 +7786,7 @@
 </file>
 
 <file path=ppt/slides/slide7.xml><?xml version="1.0" encoding="utf-8"?>
-<p:sld xmlns:a="http://schemas.openxmlformats.org/drawingml/2006/main" xmlns:p="http://schemas.openxmlformats.org/presentationml/2006/main" xmlns:r="http://schemas.openxmlformats.org/officeDocument/2006/relationships">
+<p:sld xmlns:a="http://schemas.openxmlformats.org/drawingml/2006/main" xmlns:r="http://schemas.openxmlformats.org/officeDocument/2006/relationships" xmlns:p="http://schemas.openxmlformats.org/presentationml/2006/main">
   <p:cSld>
     <p:bg>
       <p:bgPr>
@@ -7592,7 +7802,14 @@
         <p:cNvGrpSpPr/>
         <p:nvPr/>
       </p:nvGrpSpPr>
-      <p:grpSpPr/>
+      <p:grpSpPr>
+        <a:xfrm>
+          <a:off x="0" y="0"/>
+          <a:ext cx="0" cy="0"/>
+          <a:chOff x="0" y="0"/>
+          <a:chExt cx="0" cy="0"/>
+        </a:xfrm>
+      </p:grpSpPr>
       <p:sp>
         <p:nvSpPr>
           <p:cNvPr id="2" name="TextBox 1"/>
@@ -7673,6 +7890,7 @@
           <a:lstStyle/>
           <a:p>
             <a:pPr algn="ctr"/>
+            <a:endParaRPr/>
           </a:p>
         </p:txBody>
       </p:sp>
@@ -7796,7 +8014,7 @@
 </file>
 
 <file path=ppt/slides/slide8.xml><?xml version="1.0" encoding="utf-8"?>
-<p:sld xmlns:a="http://schemas.openxmlformats.org/drawingml/2006/main" xmlns:p="http://schemas.openxmlformats.org/presentationml/2006/main" xmlns:r="http://schemas.openxmlformats.org/officeDocument/2006/relationships">
+<p:sld xmlns:a="http://schemas.openxmlformats.org/drawingml/2006/main" xmlns:r="http://schemas.openxmlformats.org/officeDocument/2006/relationships" xmlns:p="http://schemas.openxmlformats.org/presentationml/2006/main">
   <p:cSld>
     <p:bg>
       <p:bgPr>
@@ -7812,7 +8030,14 @@
         <p:cNvGrpSpPr/>
         <p:nvPr/>
       </p:nvGrpSpPr>
-      <p:grpSpPr/>
+      <p:grpSpPr>
+        <a:xfrm>
+          <a:off x="0" y="0"/>
+          <a:ext cx="0" cy="0"/>
+          <a:chOff x="0" y="0"/>
+          <a:chExt cx="0" cy="0"/>
+        </a:xfrm>
+      </p:grpSpPr>
       <p:sp>
         <p:nvSpPr>
           <p:cNvPr id="2" name="TextBox 1"/>
@@ -7893,6 +8118,7 @@
           <a:lstStyle/>
           <a:p>
             <a:pPr algn="ctr"/>
+            <a:endParaRPr/>
           </a:p>
         </p:txBody>
       </p:sp>
@@ -8007,7 +8233,7 @@
 </file>
 
 <file path=ppt/slides/slide9.xml><?xml version="1.0" encoding="utf-8"?>
-<p:sld xmlns:a="http://schemas.openxmlformats.org/drawingml/2006/main" xmlns:p="http://schemas.openxmlformats.org/presentationml/2006/main" xmlns:r="http://schemas.openxmlformats.org/officeDocument/2006/relationships">
+<p:sld xmlns:a="http://schemas.openxmlformats.org/drawingml/2006/main" xmlns:r="http://schemas.openxmlformats.org/officeDocument/2006/relationships" xmlns:p="http://schemas.openxmlformats.org/presentationml/2006/main">
   <p:cSld>
     <p:bg>
       <p:bgPr>
@@ -8023,7 +8249,14 @@
         <p:cNvGrpSpPr/>
         <p:nvPr/>
       </p:nvGrpSpPr>
-      <p:grpSpPr/>
+      <p:grpSpPr>
+        <a:xfrm>
+          <a:off x="0" y="0"/>
+          <a:ext cx="0" cy="0"/>
+          <a:chOff x="0" y="0"/>
+          <a:chExt cx="0" cy="0"/>
+        </a:xfrm>
+      </p:grpSpPr>
       <p:sp>
         <p:nvSpPr>
           <p:cNvPr id="2" name="TextBox 1"/>
@@ -8104,6 +8337,7 @@
           <a:lstStyle/>
           <a:p>
             <a:pPr algn="ctr"/>
+            <a:endParaRPr/>
           </a:p>
         </p:txBody>
       </p:sp>
@@ -8161,7 +8395,7 @@
             </a:r>
           </a:p>
           <a:p>
-            <a:pPr algn="l" lvl="1">
+            <a:pPr lvl="1" algn="l">
               <a:spcAft>
                 <a:spcPts val="1200"/>
               </a:spcAft>
@@ -8177,7 +8411,7 @@
             </a:r>
           </a:p>
           <a:p>
-            <a:pPr algn="l" lvl="1">
+            <a:pPr lvl="1" algn="l">
               <a:spcAft>
                 <a:spcPts val="1200"/>
               </a:spcAft>
@@ -8205,7 +8439,7 @@
                 </a:solidFill>
                 <a:latin typeface="Calibri"/>
               </a:rPr>
-              <a:t>The efficient shape and the failure modes pull against each other; resolving that tension is the design problem.</a:t>
+              <a:t>The efficient shape and the failure modes pull against each other. That tension is the design problem.</a:t>
             </a:r>
           </a:p>
         </p:txBody>

--- a/me323/Module1_drafts/ME323_Module1_Lecture1.pptx
+++ b/me323/Module1_drafts/ME323_Module1_Lecture1.pptx
@@ -5,33 +5,34 @@
     <p:sldMasterId id="2147483648" r:id="rId1"/>
   </p:sldMasterIdLst>
   <p:sldIdLst>
-    <p:sldId id="256" r:id="rId2"/>
-    <p:sldId id="257" r:id="rId3"/>
-    <p:sldId id="258" r:id="rId4"/>
-    <p:sldId id="259" r:id="rId5"/>
-    <p:sldId id="260" r:id="rId6"/>
-    <p:sldId id="261" r:id="rId7"/>
-    <p:sldId id="262" r:id="rId8"/>
-    <p:sldId id="263" r:id="rId9"/>
-    <p:sldId id="264" r:id="rId10"/>
-    <p:sldId id="265" r:id="rId11"/>
-    <p:sldId id="266" r:id="rId12"/>
-    <p:sldId id="267" r:id="rId13"/>
-    <p:sldId id="268" r:id="rId14"/>
-    <p:sldId id="269" r:id="rId15"/>
-    <p:sldId id="270" r:id="rId16"/>
-    <p:sldId id="271" r:id="rId17"/>
-    <p:sldId id="272" r:id="rId18"/>
-    <p:sldId id="273" r:id="rId19"/>
-    <p:sldId id="274" r:id="rId20"/>
-    <p:sldId id="275" r:id="rId21"/>
-    <p:sldId id="276" r:id="rId22"/>
-    <p:sldId id="277" r:id="rId23"/>
-    <p:sldId id="278" r:id="rId24"/>
-    <p:sldId id="279" r:id="rId25"/>
-    <p:sldId id="280" r:id="rId26"/>
+    <p:sldId id="256" r:id="rId7"/>
+    <p:sldId id="257" r:id="rId8"/>
+    <p:sldId id="258" r:id="rId9"/>
+    <p:sldId id="259" r:id="rId10"/>
+    <p:sldId id="260" r:id="rId11"/>
+    <p:sldId id="261" r:id="rId12"/>
+    <p:sldId id="262" r:id="rId13"/>
+    <p:sldId id="263" r:id="rId14"/>
+    <p:sldId id="264" r:id="rId15"/>
+    <p:sldId id="265" r:id="rId16"/>
+    <p:sldId id="266" r:id="rId17"/>
+    <p:sldId id="267" r:id="rId18"/>
+    <p:sldId id="268" r:id="rId19"/>
+    <p:sldId id="269" r:id="rId20"/>
+    <p:sldId id="270" r:id="rId21"/>
+    <p:sldId id="271" r:id="rId22"/>
+    <p:sldId id="272" r:id="rId23"/>
+    <p:sldId id="273" r:id="rId24"/>
+    <p:sldId id="274" r:id="rId25"/>
+    <p:sldId id="275" r:id="rId26"/>
+    <p:sldId id="276" r:id="rId27"/>
+    <p:sldId id="277" r:id="rId28"/>
+    <p:sldId id="278" r:id="rId29"/>
+    <p:sldId id="279" r:id="rId30"/>
+    <p:sldId id="280" r:id="rId31"/>
+    <p:sldId id="281" r:id="rId32"/>
   </p:sldIdLst>
-  <p:sldSz cx="12192000" cy="6858000"/>
+  <p:sldSz cx="12191695" cy="6858000" type="screen4x3"/>
   <p:notesSz cx="6858000" cy="9144000"/>
   <p:defaultTextStyle>
     <a:defPPr>
@@ -128,22 +129,6 @@
       </a:defRPr>
     </a:lvl9pPr>
   </p:defaultTextStyle>
-  <p:extLst>
-    <p:ext uri="{EFAFB233-063F-42B5-8137-9DF3F51BA10A}">
-      <p15:sldGuideLst xmlns:p15="http://schemas.microsoft.com/office/powerpoint/2012/main">
-        <p15:guide id="1" orient="horz" pos="2160">
-          <p15:clr>
-            <a:srgbClr val="A4A3A4"/>
-          </p15:clr>
-        </p15:guide>
-        <p15:guide id="2" pos="2880">
-          <p15:clr>
-            <a:srgbClr val="A4A3A4"/>
-          </p15:clr>
-        </p15:guide>
-      </p15:sldGuideLst>
-    </p:ext>
-  </p:extLst>
 </p:presentation>
 </file>
 
@@ -185,9 +170,10 @@
           <a:lstStyle/>
           <a:p>
             <a:r>
-              <a:rPr lang="en-US"/>
+              <a:rPr lang="en-US" smtClean="0"/>
               <a:t>Click to edit Master title style</a:t>
             </a:r>
+            <a:endParaRPr lang="en-US"/>
           </a:p>
         </p:txBody>
       </p:sp>
@@ -303,9 +289,10 @@
           </a:lstStyle>
           <a:p>
             <a:r>
-              <a:rPr lang="en-US"/>
+              <a:rPr lang="en-US" smtClean="0"/>
               <a:t>Click to edit Master subtitle style</a:t>
             </a:r>
+            <a:endParaRPr lang="en-US"/>
           </a:p>
         </p:txBody>
       </p:sp>
@@ -326,7 +313,7 @@
           <a:p>
             <a:fld id="{5BCAD085-E8A6-8845-BD4E-CB4CCA059FC4}" type="datetimeFigureOut">
               <a:rPr lang="en-US" smtClean="0"/>
-              <a:t>7/21/26</a:t>
+              <a:t>1/27/13</a:t>
             </a:fld>
             <a:endParaRPr lang="en-US"/>
           </a:p>
@@ -420,9 +407,10 @@
           <a:lstStyle/>
           <a:p>
             <a:r>
-              <a:rPr lang="en-US"/>
+              <a:rPr lang="en-US" smtClean="0"/>
               <a:t>Click to edit Master title style</a:t>
             </a:r>
+            <a:endParaRPr lang="en-US"/>
           </a:p>
         </p:txBody>
       </p:sp>
@@ -443,37 +431,38 @@
           <a:p>
             <a:pPr lvl="0"/>
             <a:r>
-              <a:rPr lang="en-US"/>
+              <a:rPr lang="en-US" smtClean="0"/>
               <a:t>Click to edit Master text styles</a:t>
             </a:r>
           </a:p>
           <a:p>
             <a:pPr lvl="1"/>
             <a:r>
-              <a:rPr lang="en-US"/>
+              <a:rPr lang="en-US" smtClean="0"/>
               <a:t>Second level</a:t>
             </a:r>
           </a:p>
           <a:p>
             <a:pPr lvl="2"/>
             <a:r>
-              <a:rPr lang="en-US"/>
+              <a:rPr lang="en-US" smtClean="0"/>
               <a:t>Third level</a:t>
             </a:r>
           </a:p>
           <a:p>
             <a:pPr lvl="3"/>
             <a:r>
-              <a:rPr lang="en-US"/>
+              <a:rPr lang="en-US" smtClean="0"/>
               <a:t>Fourth level</a:t>
             </a:r>
           </a:p>
           <a:p>
             <a:pPr lvl="4"/>
             <a:r>
-              <a:rPr lang="en-US"/>
+              <a:rPr lang="en-US" smtClean="0"/>
               <a:t>Fifth level</a:t>
             </a:r>
+            <a:endParaRPr lang="en-US"/>
           </a:p>
         </p:txBody>
       </p:sp>
@@ -494,7 +483,7 @@
           <a:p>
             <a:fld id="{5BCAD085-E8A6-8845-BD4E-CB4CCA059FC4}" type="datetimeFigureOut">
               <a:rPr lang="en-US" smtClean="0"/>
-              <a:t>7/21/26</a:t>
+              <a:t>1/27/13</a:t>
             </a:fld>
             <a:endParaRPr lang="en-US"/>
           </a:p>
@@ -593,9 +582,10 @@
           <a:lstStyle/>
           <a:p>
             <a:r>
-              <a:rPr lang="en-US"/>
+              <a:rPr lang="en-US" smtClean="0"/>
               <a:t>Click to edit Master title style</a:t>
             </a:r>
+            <a:endParaRPr lang="en-US"/>
           </a:p>
         </p:txBody>
       </p:sp>
@@ -621,37 +611,38 @@
           <a:p>
             <a:pPr lvl="0"/>
             <a:r>
-              <a:rPr lang="en-US"/>
+              <a:rPr lang="en-US" smtClean="0"/>
               <a:t>Click to edit Master text styles</a:t>
             </a:r>
           </a:p>
           <a:p>
             <a:pPr lvl="1"/>
             <a:r>
-              <a:rPr lang="en-US"/>
+              <a:rPr lang="en-US" smtClean="0"/>
               <a:t>Second level</a:t>
             </a:r>
           </a:p>
           <a:p>
             <a:pPr lvl="2"/>
             <a:r>
-              <a:rPr lang="en-US"/>
+              <a:rPr lang="en-US" smtClean="0"/>
               <a:t>Third level</a:t>
             </a:r>
           </a:p>
           <a:p>
             <a:pPr lvl="3"/>
             <a:r>
-              <a:rPr lang="en-US"/>
+              <a:rPr lang="en-US" smtClean="0"/>
               <a:t>Fourth level</a:t>
             </a:r>
           </a:p>
           <a:p>
             <a:pPr lvl="4"/>
             <a:r>
-              <a:rPr lang="en-US"/>
+              <a:rPr lang="en-US" smtClean="0"/>
               <a:t>Fifth level</a:t>
             </a:r>
+            <a:endParaRPr lang="en-US"/>
           </a:p>
         </p:txBody>
       </p:sp>
@@ -672,7 +663,7 @@
           <a:p>
             <a:fld id="{5BCAD085-E8A6-8845-BD4E-CB4CCA059FC4}" type="datetimeFigureOut">
               <a:rPr lang="en-US" smtClean="0"/>
-              <a:t>7/21/26</a:t>
+              <a:t>1/27/13</a:t>
             </a:fld>
             <a:endParaRPr lang="en-US"/>
           </a:p>
@@ -766,9 +757,10 @@
           <a:lstStyle/>
           <a:p>
             <a:r>
-              <a:rPr lang="en-US"/>
+              <a:rPr lang="en-US" smtClean="0"/>
               <a:t>Click to edit Master title style</a:t>
             </a:r>
+            <a:endParaRPr lang="en-US"/>
           </a:p>
         </p:txBody>
       </p:sp>
@@ -789,37 +781,38 @@
           <a:p>
             <a:pPr lvl="0"/>
             <a:r>
-              <a:rPr lang="en-US"/>
+              <a:rPr lang="en-US" smtClean="0"/>
               <a:t>Click to edit Master text styles</a:t>
             </a:r>
           </a:p>
           <a:p>
             <a:pPr lvl="1"/>
             <a:r>
-              <a:rPr lang="en-US"/>
+              <a:rPr lang="en-US" smtClean="0"/>
               <a:t>Second level</a:t>
             </a:r>
           </a:p>
           <a:p>
             <a:pPr lvl="2"/>
             <a:r>
-              <a:rPr lang="en-US"/>
+              <a:rPr lang="en-US" smtClean="0"/>
               <a:t>Third level</a:t>
             </a:r>
           </a:p>
           <a:p>
             <a:pPr lvl="3"/>
             <a:r>
-              <a:rPr lang="en-US"/>
+              <a:rPr lang="en-US" smtClean="0"/>
               <a:t>Fourth level</a:t>
             </a:r>
           </a:p>
           <a:p>
             <a:pPr lvl="4"/>
             <a:r>
-              <a:rPr lang="en-US"/>
+              <a:rPr lang="en-US" smtClean="0"/>
               <a:t>Fifth level</a:t>
             </a:r>
+            <a:endParaRPr lang="en-US"/>
           </a:p>
         </p:txBody>
       </p:sp>
@@ -840,7 +833,7 @@
           <a:p>
             <a:fld id="{5BCAD085-E8A6-8845-BD4E-CB4CCA059FC4}" type="datetimeFigureOut">
               <a:rPr lang="en-US" smtClean="0"/>
-              <a:t>7/21/26</a:t>
+              <a:t>1/27/13</a:t>
             </a:fld>
             <a:endParaRPr lang="en-US"/>
           </a:p>
@@ -943,9 +936,10 @@
           </a:lstStyle>
           <a:p>
             <a:r>
-              <a:rPr lang="en-US"/>
+              <a:rPr lang="en-US" smtClean="0"/>
               <a:t>Click to edit Master title style</a:t>
             </a:r>
+            <a:endParaRPr lang="en-US"/>
           </a:p>
         </p:txBody>
       </p:sp>
@@ -1062,7 +1056,7 @@
           <a:p>
             <a:pPr lvl="0"/>
             <a:r>
-              <a:rPr lang="en-US"/>
+              <a:rPr lang="en-US" smtClean="0"/>
               <a:t>Click to edit Master text styles</a:t>
             </a:r>
           </a:p>
@@ -1085,7 +1079,7 @@
           <a:p>
             <a:fld id="{5BCAD085-E8A6-8845-BD4E-CB4CCA059FC4}" type="datetimeFigureOut">
               <a:rPr lang="en-US" smtClean="0"/>
-              <a:t>7/21/26</a:t>
+              <a:t>1/27/13</a:t>
             </a:fld>
             <a:endParaRPr lang="en-US"/>
           </a:p>
@@ -1179,9 +1173,10 @@
           <a:lstStyle/>
           <a:p>
             <a:r>
-              <a:rPr lang="en-US"/>
+              <a:rPr lang="en-US" smtClean="0"/>
               <a:t>Click to edit Master title style</a:t>
             </a:r>
+            <a:endParaRPr lang="en-US"/>
           </a:p>
         </p:txBody>
       </p:sp>
@@ -1235,37 +1230,38 @@
           <a:p>
             <a:pPr lvl="0"/>
             <a:r>
-              <a:rPr lang="en-US"/>
+              <a:rPr lang="en-US" smtClean="0"/>
               <a:t>Click to edit Master text styles</a:t>
             </a:r>
           </a:p>
           <a:p>
             <a:pPr lvl="1"/>
             <a:r>
-              <a:rPr lang="en-US"/>
+              <a:rPr lang="en-US" smtClean="0"/>
               <a:t>Second level</a:t>
             </a:r>
           </a:p>
           <a:p>
             <a:pPr lvl="2"/>
             <a:r>
-              <a:rPr lang="en-US"/>
+              <a:rPr lang="en-US" smtClean="0"/>
               <a:t>Third level</a:t>
             </a:r>
           </a:p>
           <a:p>
             <a:pPr lvl="3"/>
             <a:r>
-              <a:rPr lang="en-US"/>
+              <a:rPr lang="en-US" smtClean="0"/>
               <a:t>Fourth level</a:t>
             </a:r>
           </a:p>
           <a:p>
             <a:pPr lvl="4"/>
             <a:r>
-              <a:rPr lang="en-US"/>
+              <a:rPr lang="en-US" smtClean="0"/>
               <a:t>Fifth level</a:t>
             </a:r>
+            <a:endParaRPr lang="en-US"/>
           </a:p>
         </p:txBody>
       </p:sp>
@@ -1319,37 +1315,38 @@
           <a:p>
             <a:pPr lvl="0"/>
             <a:r>
-              <a:rPr lang="en-US"/>
+              <a:rPr lang="en-US" smtClean="0"/>
               <a:t>Click to edit Master text styles</a:t>
             </a:r>
           </a:p>
           <a:p>
             <a:pPr lvl="1"/>
             <a:r>
-              <a:rPr lang="en-US"/>
+              <a:rPr lang="en-US" smtClean="0"/>
               <a:t>Second level</a:t>
             </a:r>
           </a:p>
           <a:p>
             <a:pPr lvl="2"/>
             <a:r>
-              <a:rPr lang="en-US"/>
+              <a:rPr lang="en-US" smtClean="0"/>
               <a:t>Third level</a:t>
             </a:r>
           </a:p>
           <a:p>
             <a:pPr lvl="3"/>
             <a:r>
-              <a:rPr lang="en-US"/>
+              <a:rPr lang="en-US" smtClean="0"/>
               <a:t>Fourth level</a:t>
             </a:r>
           </a:p>
           <a:p>
             <a:pPr lvl="4"/>
             <a:r>
-              <a:rPr lang="en-US"/>
+              <a:rPr lang="en-US" smtClean="0"/>
               <a:t>Fifth level</a:t>
             </a:r>
+            <a:endParaRPr lang="en-US"/>
           </a:p>
         </p:txBody>
       </p:sp>
@@ -1370,7 +1367,7 @@
           <a:p>
             <a:fld id="{5BCAD085-E8A6-8845-BD4E-CB4CCA059FC4}" type="datetimeFigureOut">
               <a:rPr lang="en-US" smtClean="0"/>
-              <a:t>7/21/26</a:t>
+              <a:t>1/27/13</a:t>
             </a:fld>
             <a:endParaRPr lang="en-US"/>
           </a:p>
@@ -1468,9 +1465,10 @@
           </a:lstStyle>
           <a:p>
             <a:r>
-              <a:rPr lang="en-US"/>
+              <a:rPr lang="en-US" smtClean="0"/>
               <a:t>Click to edit Master title style</a:t>
             </a:r>
+            <a:endParaRPr lang="en-US"/>
           </a:p>
         </p:txBody>
       </p:sp>
@@ -1533,7 +1531,7 @@
           <a:p>
             <a:pPr lvl="0"/>
             <a:r>
-              <a:rPr lang="en-US"/>
+              <a:rPr lang="en-US" smtClean="0"/>
               <a:t>Click to edit Master text styles</a:t>
             </a:r>
           </a:p>
@@ -1589,37 +1587,38 @@
           <a:p>
             <a:pPr lvl="0"/>
             <a:r>
-              <a:rPr lang="en-US"/>
+              <a:rPr lang="en-US" smtClean="0"/>
               <a:t>Click to edit Master text styles</a:t>
             </a:r>
           </a:p>
           <a:p>
             <a:pPr lvl="1"/>
             <a:r>
-              <a:rPr lang="en-US"/>
+              <a:rPr lang="en-US" smtClean="0"/>
               <a:t>Second level</a:t>
             </a:r>
           </a:p>
           <a:p>
             <a:pPr lvl="2"/>
             <a:r>
-              <a:rPr lang="en-US"/>
+              <a:rPr lang="en-US" smtClean="0"/>
               <a:t>Third level</a:t>
             </a:r>
           </a:p>
           <a:p>
             <a:pPr lvl="3"/>
             <a:r>
-              <a:rPr lang="en-US"/>
+              <a:rPr lang="en-US" smtClean="0"/>
               <a:t>Fourth level</a:t>
             </a:r>
           </a:p>
           <a:p>
             <a:pPr lvl="4"/>
             <a:r>
-              <a:rPr lang="en-US"/>
+              <a:rPr lang="en-US" smtClean="0"/>
               <a:t>Fifth level</a:t>
             </a:r>
+            <a:endParaRPr lang="en-US"/>
           </a:p>
         </p:txBody>
       </p:sp>
@@ -1682,7 +1681,7 @@
           <a:p>
             <a:pPr lvl="0"/>
             <a:r>
-              <a:rPr lang="en-US"/>
+              <a:rPr lang="en-US" smtClean="0"/>
               <a:t>Click to edit Master text styles</a:t>
             </a:r>
           </a:p>
@@ -1738,37 +1737,38 @@
           <a:p>
             <a:pPr lvl="0"/>
             <a:r>
-              <a:rPr lang="en-US"/>
+              <a:rPr lang="en-US" smtClean="0"/>
               <a:t>Click to edit Master text styles</a:t>
             </a:r>
           </a:p>
           <a:p>
             <a:pPr lvl="1"/>
             <a:r>
-              <a:rPr lang="en-US"/>
+              <a:rPr lang="en-US" smtClean="0"/>
               <a:t>Second level</a:t>
             </a:r>
           </a:p>
           <a:p>
             <a:pPr lvl="2"/>
             <a:r>
-              <a:rPr lang="en-US"/>
+              <a:rPr lang="en-US" smtClean="0"/>
               <a:t>Third level</a:t>
             </a:r>
           </a:p>
           <a:p>
             <a:pPr lvl="3"/>
             <a:r>
-              <a:rPr lang="en-US"/>
+              <a:rPr lang="en-US" smtClean="0"/>
               <a:t>Fourth level</a:t>
             </a:r>
           </a:p>
           <a:p>
             <a:pPr lvl="4"/>
             <a:r>
-              <a:rPr lang="en-US"/>
+              <a:rPr lang="en-US" smtClean="0"/>
               <a:t>Fifth level</a:t>
             </a:r>
+            <a:endParaRPr lang="en-US"/>
           </a:p>
         </p:txBody>
       </p:sp>
@@ -1789,7 +1789,7 @@
           <a:p>
             <a:fld id="{5BCAD085-E8A6-8845-BD4E-CB4CCA059FC4}" type="datetimeFigureOut">
               <a:rPr lang="en-US" smtClean="0"/>
-              <a:t>7/21/26</a:t>
+              <a:t>1/27/13</a:t>
             </a:fld>
             <a:endParaRPr lang="en-US"/>
           </a:p>
@@ -1883,9 +1883,10 @@
           <a:lstStyle/>
           <a:p>
             <a:r>
-              <a:rPr lang="en-US"/>
+              <a:rPr lang="en-US" smtClean="0"/>
               <a:t>Click to edit Master title style</a:t>
             </a:r>
+            <a:endParaRPr lang="en-US"/>
           </a:p>
         </p:txBody>
       </p:sp>
@@ -1906,7 +1907,7 @@
           <a:p>
             <a:fld id="{5BCAD085-E8A6-8845-BD4E-CB4CCA059FC4}" type="datetimeFigureOut">
               <a:rPr lang="en-US" smtClean="0"/>
-              <a:t>7/21/26</a:t>
+              <a:t>1/27/13</a:t>
             </a:fld>
             <a:endParaRPr lang="en-US"/>
           </a:p>
@@ -2001,7 +2002,7 @@
           <a:p>
             <a:fld id="{5BCAD085-E8A6-8845-BD4E-CB4CCA059FC4}" type="datetimeFigureOut">
               <a:rPr lang="en-US" smtClean="0"/>
-              <a:t>7/21/26</a:t>
+              <a:t>1/27/13</a:t>
             </a:fld>
             <a:endParaRPr lang="en-US"/>
           </a:p>
@@ -2104,9 +2105,10 @@
           </a:lstStyle>
           <a:p>
             <a:r>
-              <a:rPr lang="en-US"/>
+              <a:rPr lang="en-US" smtClean="0"/>
               <a:t>Click to edit Master title style</a:t>
             </a:r>
+            <a:endParaRPr lang="en-US"/>
           </a:p>
         </p:txBody>
       </p:sp>
@@ -2160,37 +2162,38 @@
           <a:p>
             <a:pPr lvl="0"/>
             <a:r>
-              <a:rPr lang="en-US"/>
+              <a:rPr lang="en-US" smtClean="0"/>
               <a:t>Click to edit Master text styles</a:t>
             </a:r>
           </a:p>
           <a:p>
             <a:pPr lvl="1"/>
             <a:r>
-              <a:rPr lang="en-US"/>
+              <a:rPr lang="en-US" smtClean="0"/>
               <a:t>Second level</a:t>
             </a:r>
           </a:p>
           <a:p>
             <a:pPr lvl="2"/>
             <a:r>
-              <a:rPr lang="en-US"/>
+              <a:rPr lang="en-US" smtClean="0"/>
               <a:t>Third level</a:t>
             </a:r>
           </a:p>
           <a:p>
             <a:pPr lvl="3"/>
             <a:r>
-              <a:rPr lang="en-US"/>
+              <a:rPr lang="en-US" smtClean="0"/>
               <a:t>Fourth level</a:t>
             </a:r>
           </a:p>
           <a:p>
             <a:pPr lvl="4"/>
             <a:r>
-              <a:rPr lang="en-US"/>
+              <a:rPr lang="en-US" smtClean="0"/>
               <a:t>Fifth level</a:t>
             </a:r>
+            <a:endParaRPr lang="en-US"/>
           </a:p>
         </p:txBody>
       </p:sp>
@@ -2253,7 +2256,7 @@
           <a:p>
             <a:pPr lvl="0"/>
             <a:r>
-              <a:rPr lang="en-US"/>
+              <a:rPr lang="en-US" smtClean="0"/>
               <a:t>Click to edit Master text styles</a:t>
             </a:r>
           </a:p>
@@ -2276,7 +2279,7 @@
           <a:p>
             <a:fld id="{5BCAD085-E8A6-8845-BD4E-CB4CCA059FC4}" type="datetimeFigureOut">
               <a:rPr lang="en-US" smtClean="0"/>
-              <a:t>7/21/26</a:t>
+              <a:t>1/27/13</a:t>
             </a:fld>
             <a:endParaRPr lang="en-US"/>
           </a:p>
@@ -2379,9 +2382,10 @@
           </a:lstStyle>
           <a:p>
             <a:r>
-              <a:rPr lang="en-US"/>
+              <a:rPr lang="en-US" smtClean="0"/>
               <a:t>Click to edit Master title style</a:t>
             </a:r>
+            <a:endParaRPr lang="en-US"/>
           </a:p>
         </p:txBody>
       </p:sp>
@@ -2505,7 +2509,7 @@
           <a:p>
             <a:pPr lvl="0"/>
             <a:r>
-              <a:rPr lang="en-US"/>
+              <a:rPr lang="en-US" smtClean="0"/>
               <a:t>Click to edit Master text styles</a:t>
             </a:r>
           </a:p>
@@ -2528,7 +2532,7 @@
           <a:p>
             <a:fld id="{5BCAD085-E8A6-8845-BD4E-CB4CCA059FC4}" type="datetimeFigureOut">
               <a:rPr lang="en-US" smtClean="0"/>
-              <a:t>7/21/26</a:t>
+              <a:t>1/27/13</a:t>
             </a:fld>
             <a:endParaRPr lang="en-US"/>
           </a:p>
@@ -2637,9 +2641,10 @@
           <a:lstStyle/>
           <a:p>
             <a:r>
-              <a:rPr lang="en-US"/>
+              <a:rPr lang="en-US" smtClean="0"/>
               <a:t>Click to edit Master title style</a:t>
             </a:r>
+            <a:endParaRPr lang="en-US"/>
           </a:p>
         </p:txBody>
       </p:sp>
@@ -2670,37 +2675,38 @@
           <a:p>
             <a:pPr lvl="0"/>
             <a:r>
-              <a:rPr lang="en-US"/>
+              <a:rPr lang="en-US" smtClean="0"/>
               <a:t>Click to edit Master text styles</a:t>
             </a:r>
           </a:p>
           <a:p>
             <a:pPr lvl="1"/>
             <a:r>
-              <a:rPr lang="en-US"/>
+              <a:rPr lang="en-US" smtClean="0"/>
               <a:t>Second level</a:t>
             </a:r>
           </a:p>
           <a:p>
             <a:pPr lvl="2"/>
             <a:r>
-              <a:rPr lang="en-US"/>
+              <a:rPr lang="en-US" smtClean="0"/>
               <a:t>Third level</a:t>
             </a:r>
           </a:p>
           <a:p>
             <a:pPr lvl="3"/>
             <a:r>
-              <a:rPr lang="en-US"/>
+              <a:rPr lang="en-US" smtClean="0"/>
               <a:t>Fourth level</a:t>
             </a:r>
           </a:p>
           <a:p>
             <a:pPr lvl="4"/>
             <a:r>
-              <a:rPr lang="en-US"/>
+              <a:rPr lang="en-US" smtClean="0"/>
               <a:t>Fifth level</a:t>
             </a:r>
+            <a:endParaRPr lang="en-US"/>
           </a:p>
         </p:txBody>
       </p:sp>
@@ -2739,7 +2745,7 @@
           <a:p>
             <a:fld id="{5BCAD085-E8A6-8845-BD4E-CB4CCA059FC4}" type="datetimeFigureOut">
               <a:rPr lang="en-US" smtClean="0"/>
-              <a:t>7/21/26</a:t>
+              <a:t>1/27/13</a:t>
             </a:fld>
             <a:endParaRPr lang="en-US"/>
           </a:p>
@@ -3098,7 +3104,7 @@
 </file>
 
 <file path=ppt/slides/slide1.xml><?xml version="1.0" encoding="utf-8"?>
-<p:sld xmlns:a="http://schemas.openxmlformats.org/drawingml/2006/main" xmlns:r="http://schemas.openxmlformats.org/officeDocument/2006/relationships" xmlns:p="http://schemas.openxmlformats.org/presentationml/2006/main">
+<p:sld xmlns:a="http://schemas.openxmlformats.org/drawingml/2006/main" xmlns:p="http://schemas.openxmlformats.org/presentationml/2006/main" xmlns:r="http://schemas.openxmlformats.org/officeDocument/2006/relationships">
   <p:cSld>
     <p:bg>
       <p:bgPr>
@@ -3114,14 +3120,7 @@
         <p:cNvGrpSpPr/>
         <p:nvPr/>
       </p:nvGrpSpPr>
-      <p:grpSpPr>
-        <a:xfrm>
-          <a:off x="0" y="0"/>
-          <a:ext cx="0" cy="0"/>
-          <a:chOff x="0" y="0"/>
-          <a:chExt cx="0" cy="0"/>
-        </a:xfrm>
-      </p:grpSpPr>
+      <p:grpSpPr/>
       <p:sp>
         <p:nvSpPr>
           <p:cNvPr id="2" name="Rectangle 1"/>
@@ -3163,7 +3162,6 @@
           <a:lstStyle/>
           <a:p>
             <a:pPr algn="ctr"/>
-            <a:endParaRPr/>
           </a:p>
         </p:txBody>
       </p:sp>
@@ -3280,7 +3278,7 @@
                 <a:latin typeface="Calibri"/>
               </a:rPr>
               <a:t>Pick a 3D-printed I-beam that carries the most load per gram.
-The equations give you a start. They will not give you the answer.</a:t>
+The equations give you a start, not the answer.</a:t>
             </a:r>
           </a:p>
         </p:txBody>
@@ -3294,7 +3292,7 @@
 </file>
 
 <file path=ppt/slides/slide10.xml><?xml version="1.0" encoding="utf-8"?>
-<p:sld xmlns:a="http://schemas.openxmlformats.org/drawingml/2006/main" xmlns:r="http://schemas.openxmlformats.org/officeDocument/2006/relationships" xmlns:p="http://schemas.openxmlformats.org/presentationml/2006/main">
+<p:sld xmlns:a="http://schemas.openxmlformats.org/drawingml/2006/main" xmlns:p="http://schemas.openxmlformats.org/presentationml/2006/main" xmlns:r="http://schemas.openxmlformats.org/officeDocument/2006/relationships">
   <p:cSld>
     <p:bg>
       <p:bgPr>
@@ -3310,14 +3308,7 @@
         <p:cNvGrpSpPr/>
         <p:nvPr/>
       </p:nvGrpSpPr>
-      <p:grpSpPr>
-        <a:xfrm>
-          <a:off x="0" y="0"/>
-          <a:ext cx="0" cy="0"/>
-          <a:chOff x="0" y="0"/>
-          <a:chExt cx="0" cy="0"/>
-        </a:xfrm>
-      </p:grpSpPr>
+      <p:grpSpPr/>
       <p:sp>
         <p:nvSpPr>
           <p:cNvPr id="2" name="TextBox 1"/>
@@ -3352,7 +3343,7 @@
                 </a:solidFill>
                 <a:latin typeface="Calibri"/>
               </a:rPr>
-              <a:t>Flange-web separation: shear flow at the printed junction</a:t>
+              <a:t>Shear in a beam: the check you already know</a:t>
             </a:r>
           </a:p>
         </p:txBody>
@@ -3398,13 +3389,12 @@
           <a:lstStyle/>
           <a:p>
             <a:pPr algn="ctr"/>
-            <a:endParaRPr/>
           </a:p>
         </p:txBody>
       </p:sp>
       <p:pic>
         <p:nvPicPr>
-          <p:cNvPr id="4" name="Picture 3" descr="sepflow.png"/>
+          <p:cNvPr id="4" name="Picture 3" descr="vqit.png"/>
           <p:cNvPicPr>
             <a:picLocks noChangeAspect="1"/>
           </p:cNvPicPr>
@@ -3418,48 +3408,24 @@
         </p:blipFill>
         <p:spPr>
           <a:xfrm>
-            <a:off x="2986887" y="1371600"/>
-            <a:ext cx="6217920" cy="777240"/>
+            <a:off x="4141952" y="2011680"/>
+            <a:ext cx="3907789" cy="1554479"/>
           </a:xfrm>
           <a:prstGeom prst="rect">
             <a:avLst/>
           </a:prstGeom>
         </p:spPr>
       </p:pic>
-      <p:pic>
-        <p:nvPicPr>
-          <p:cNvPr id="5" name="Picture 4" descr="fig_shear_web.png"/>
-          <p:cNvPicPr>
-            <a:picLocks noChangeAspect="1"/>
-          </p:cNvPicPr>
-          <p:nvPr/>
-        </p:nvPicPr>
-        <p:blipFill>
-          <a:blip r:embed="rId3"/>
-          <a:stretch>
-            <a:fillRect/>
-          </a:stretch>
-        </p:blipFill>
-        <p:spPr>
-          <a:xfrm>
-            <a:off x="3376501" y="2286000"/>
-            <a:ext cx="5438692" cy="3474720"/>
-          </a:xfrm>
-          <a:prstGeom prst="rect">
-            <a:avLst/>
-          </a:prstGeom>
-        </p:spPr>
-      </p:pic>
-      <p:sp>
-        <p:nvSpPr>
-          <p:cNvPr id="6" name="TextBox 5"/>
+      <p:sp>
+        <p:nvSpPr>
+          <p:cNvPr id="5" name="TextBox 4"/>
           <p:cNvSpPr txBox="1"/>
           <p:nvPr/>
         </p:nvSpPr>
         <p:spPr>
           <a:xfrm>
-            <a:off x="822960" y="5833872"/>
-            <a:ext cx="10607040" cy="548640"/>
+            <a:off x="1097280" y="4023360"/>
+            <a:ext cx="10058400" cy="1828800"/>
           </a:xfrm>
           <a:prstGeom prst="rect">
             <a:avLst/>
@@ -3474,17 +3440,65 @@
           <a:p>
             <a:pPr algn="ctr">
               <a:spcAft>
-                <a:spcPts val="600"/>
-              </a:spcAft>
-            </a:pPr>
-            <a:r>
-              <a:rPr sz="1500" b="0">
-                <a:solidFill>
-                  <a:srgbClr val="0B0B0B"/>
-                </a:solidFill>
-                <a:latin typeface="Calibri"/>
-              </a:rPr>
-              <a:t>Every observed shear-type failure is a flange peeling off the web. The stress on that plane is the classic built-up-beam shear flow (V = P/2).</a:t>
+                <a:spcPts val="1000"/>
+              </a:spcAft>
+            </a:pPr>
+            <a:r>
+              <a:rPr sz="1900" b="0">
+                <a:solidFill>
+                  <a:srgbClr val="0B0B0B"/>
+                </a:solidFill>
+                <a:latin typeface="Calibri"/>
+              </a:rPr>
+              <a:t>In each half-span V = P/2. Quick estimate: the web carries it all, tau_avg = V/(b*H_web). The full formula prices the longitudinal shear on ANY horizontal plane: Q(y) is the first moment of the area beyond the plane, t(y) the width there.</a:t>
+            </a:r>
+          </a:p>
+          <a:p>
+            <a:pPr algn="ctr">
+              <a:spcAft>
+                <a:spcPts val="1000"/>
+              </a:spcAft>
+            </a:pPr>
+            <a:r>
+              <a:rPr sz="1900" b="0">
+                <a:solidFill>
+                  <a:srgbClr val="0B0B0B"/>
+                </a:solidFill>
+                <a:latin typeface="Calibri"/>
+              </a:rPr>
+              <a:t>It peaks at the neutral axis (3V/2A for a rectangle) — so that is where the textbook check compares against sigma_y/sqrt(3) = 43.9 MPa.</a:t>
+            </a:r>
+          </a:p>
+          <a:p>
+            <a:pPr algn="ctr">
+              <a:spcAft>
+                <a:spcPts val="1000"/>
+              </a:spcAft>
+            </a:pPr>
+            <a:r>
+              <a:rPr sz="1900" b="0">
+                <a:solidFill>
+                  <a:srgbClr val="0B0B0B"/>
+                </a:solidFill>
+                <a:latin typeface="Calibri"/>
+              </a:rPr>
+              <a:t>Run it: at (b, H_web) = (2, 12) the web would not rupture until ~2495 N, but bending yields the flange at 835 N — a 3x margin.</a:t>
+            </a:r>
+          </a:p>
+          <a:p>
+            <a:pPr algn="ctr">
+              <a:spcAft>
+                <a:spcPts val="1000"/>
+              </a:spcAft>
+            </a:pPr>
+            <a:r>
+              <a:rPr sz="1900" b="0">
+                <a:solidFill>
+                  <a:srgbClr val="0B0B0B"/>
+                </a:solidFill>
+                <a:latin typeface="Calibri"/>
+              </a:rPr>
+              <a:t>Verdict: for a beam made of ONE material, shear never governs here. Ours is not one material.</a:t>
             </a:r>
           </a:p>
         </p:txBody>
@@ -3498,7 +3512,7 @@
 </file>
 
 <file path=ppt/slides/slide11.xml><?xml version="1.0" encoding="utf-8"?>
-<p:sld xmlns:a="http://schemas.openxmlformats.org/drawingml/2006/main" xmlns:r="http://schemas.openxmlformats.org/officeDocument/2006/relationships" xmlns:p="http://schemas.openxmlformats.org/presentationml/2006/main">
+<p:sld xmlns:a="http://schemas.openxmlformats.org/drawingml/2006/main" xmlns:p="http://schemas.openxmlformats.org/presentationml/2006/main" xmlns:r="http://schemas.openxmlformats.org/officeDocument/2006/relationships">
   <p:cSld>
     <p:bg>
       <p:bgPr>
@@ -3514,14 +3528,7 @@
         <p:cNvGrpSpPr/>
         <p:nvPr/>
       </p:nvGrpSpPr>
-      <p:grpSpPr>
-        <a:xfrm>
-          <a:off x="0" y="0"/>
-          <a:ext cx="0" cy="0"/>
-          <a:chOff x="0" y="0"/>
-          <a:chExt cx="0" cy="0"/>
-        </a:xfrm>
-      </p:grpSpPr>
+      <p:grpSpPr/>
       <p:sp>
         <p:nvSpPr>
           <p:cNvPr id="2" name="TextBox 1"/>
@@ -3556,7 +3563,7 @@
                 </a:solidFill>
                 <a:latin typeface="Calibri"/>
               </a:rPr>
-              <a:t>What the separation check assumes</a:t>
+              <a:t>Flange-web separation: shear flow at the printed junction</a:t>
             </a:r>
           </a:p>
         </p:txBody>
@@ -3602,20 +3609,67 @@
           <a:lstStyle/>
           <a:p>
             <a:pPr algn="ctr"/>
-            <a:endParaRPr/>
-          </a:p>
-        </p:txBody>
-      </p:sp>
-      <p:sp>
-        <p:nvSpPr>
-          <p:cNvPr id="4" name="TextBox 3"/>
+          </a:p>
+        </p:txBody>
+      </p:sp>
+      <p:pic>
+        <p:nvPicPr>
+          <p:cNvPr id="4" name="Picture 3" descr="sepflow.png"/>
+          <p:cNvPicPr>
+            <a:picLocks noChangeAspect="1"/>
+          </p:cNvPicPr>
+          <p:nvPr/>
+        </p:nvPicPr>
+        <p:blipFill>
+          <a:blip r:embed="rId2"/>
+          <a:stretch>
+            <a:fillRect/>
+          </a:stretch>
+        </p:blipFill>
+        <p:spPr>
+          <a:xfrm>
+            <a:off x="2986887" y="1371600"/>
+            <a:ext cx="6217920" cy="777240"/>
+          </a:xfrm>
+          <a:prstGeom prst="rect">
+            <a:avLst/>
+          </a:prstGeom>
+        </p:spPr>
+      </p:pic>
+      <p:pic>
+        <p:nvPicPr>
+          <p:cNvPr id="5" name="Picture 4" descr="fig_shear_web.png"/>
+          <p:cNvPicPr>
+            <a:picLocks noChangeAspect="1"/>
+          </p:cNvPicPr>
+          <p:nvPr/>
+        </p:nvPicPr>
+        <p:blipFill>
+          <a:blip r:embed="rId3"/>
+          <a:stretch>
+            <a:fillRect/>
+          </a:stretch>
+        </p:blipFill>
+        <p:spPr>
+          <a:xfrm>
+            <a:off x="3591186" y="2286000"/>
+            <a:ext cx="5009321" cy="3200399"/>
+          </a:xfrm>
+          <a:prstGeom prst="rect">
+            <a:avLst/>
+          </a:prstGeom>
+        </p:spPr>
+      </p:pic>
+      <p:sp>
+        <p:nvSpPr>
+          <p:cNvPr id="6" name="TextBox 5"/>
           <p:cNvSpPr txBox="1"/>
           <p:nvPr/>
         </p:nvSpPr>
         <p:spPr>
           <a:xfrm>
-            <a:off x="868680" y="1554480"/>
-            <a:ext cx="10424160" cy="4754880"/>
+            <a:off x="822960" y="5559552"/>
+            <a:ext cx="10607040" cy="548640"/>
           </a:xfrm>
           <a:prstGeom prst="rect">
             <a:avLst/>
@@ -3628,67 +3682,58 @@
           </a:bodyPr>
           <a:lstStyle/>
           <a:p>
-            <a:pPr algn="l">
-              <a:spcAft>
-                <a:spcPts val="1200"/>
-              </a:spcAft>
-            </a:pPr>
-            <a:r>
-              <a:rPr sz="2200" b="0">
-                <a:solidFill>
-                  <a:srgbClr val="0B0B0B"/>
-                </a:solidFill>
-                <a:latin typeface="Calibri"/>
-              </a:rPr>
-              <a:t>The stress measure is textbook mechanics — the same glue-line check used for any built-up member.</a:t>
-            </a:r>
-          </a:p>
-          <a:p>
-            <a:pPr algn="l">
-              <a:spcAft>
-                <a:spcPts val="1200"/>
-              </a:spcAft>
-            </a:pPr>
-            <a:r>
-              <a:rPr sz="2200" b="0">
-                <a:solidFill>
-                  <a:srgbClr val="0B0B0B"/>
-                </a:solidFill>
-                <a:latin typeface="Calibri"/>
-              </a:rPr>
-              <a:t>The strength side is not: tau_i is the bond strength along the printed layer lines, weaker than the bulk plastic, listed in no handbook.</a:t>
-            </a:r>
-          </a:p>
-          <a:p>
-            <a:pPr algn="l">
-              <a:spcAft>
-                <a:spcPts val="1200"/>
-              </a:spcAft>
-            </a:pPr>
-            <a:r>
-              <a:rPr sz="2200" b="0">
-                <a:solidFill>
-                  <a:srgbClr val="0B0B0B"/>
-                </a:solidFill>
-                <a:latin typeface="Calibri"/>
-              </a:rPr>
-              <a:t>Pre-lab 1 starts it at the bulk guess sigma_y/sqrt(3) = 43.9 MPa and calibrates it from the data — it lands near 18 MPa, and it drifts with print session and support condition.</a:t>
-            </a:r>
-          </a:p>
-          <a:p>
-            <a:pPr algn="l">
-              <a:spcAft>
-                <a:spcPts val="1200"/>
-              </a:spcAft>
-            </a:pPr>
-            <a:r>
-              <a:rPr sz="2200" b="0">
-                <a:solidFill>
-                  <a:srgbClr val="0B0B0B"/>
-                </a:solidFill>
-                <a:latin typeface="Calibri"/>
-              </a:rPr>
-              <a:t>The check predicts a capacity trend on one candidate plane. It is a dominant-mode proxy, not a fracture diagnosis.</a:t>
+            <a:pPr algn="ctr">
+              <a:spcAft>
+                <a:spcPts val="600"/>
+              </a:spcAft>
+            </a:pPr>
+            <a:r>
+              <a:rPr sz="1500" b="0">
+                <a:solidFill>
+                  <a:srgbClr val="0B0B0B"/>
+                </a:solidFill>
+                <a:latin typeface="Calibri"/>
+              </a:rPr>
+              <a:t>Every observed shear-type failure is a flange peeling off the web — not the most-stressed plane, the weakest one. Slide the same VQ/(I_x t) to the junction: Q becomes the flange's first moment, t the joint width — the classic built-up-beam glue-line check (V = P/2).</a:t>
+            </a:r>
+          </a:p>
+        </p:txBody>
+      </p:sp>
+      <p:sp>
+        <p:nvSpPr>
+          <p:cNvPr id="7" name="TextBox 6"/>
+          <p:cNvSpPr txBox="1"/>
+          <p:nvPr/>
+        </p:nvSpPr>
+        <p:spPr>
+          <a:xfrm>
+            <a:off x="822960" y="6016752"/>
+            <a:ext cx="10607040" cy="365760"/>
+          </a:xfrm>
+          <a:prstGeom prst="rect">
+            <a:avLst/>
+          </a:prstGeom>
+          <a:noFill/>
+        </p:spPr>
+        <p:txBody>
+          <a:bodyPr wrap="square" anchor="t">
+            <a:spAutoFit/>
+          </a:bodyPr>
+          <a:lstStyle/>
+          <a:p>
+            <a:pPr algn="ctr">
+              <a:spcAft>
+                <a:spcPts val="600"/>
+              </a:spcAft>
+            </a:pPr>
+            <a:r>
+              <a:rPr sz="1150" b="0">
+                <a:solidFill>
+                  <a:srgbClr val="52514E"/>
+                </a:solidFill>
+                <a:latin typeface="Calibri"/>
+              </a:rPr>
+              <a:t>At the junction the stress is ~14% LOWER than at the neutral axis: this plane fails first because it is weaker, not because it is more stressed.</a:t>
             </a:r>
           </a:p>
         </p:txBody>
@@ -3702,7 +3747,7 @@
 </file>
 
 <file path=ppt/slides/slide12.xml><?xml version="1.0" encoding="utf-8"?>
-<p:sld xmlns:a="http://schemas.openxmlformats.org/drawingml/2006/main" xmlns:r="http://schemas.openxmlformats.org/officeDocument/2006/relationships" xmlns:p="http://schemas.openxmlformats.org/presentationml/2006/main">
+<p:sld xmlns:a="http://schemas.openxmlformats.org/drawingml/2006/main" xmlns:p="http://schemas.openxmlformats.org/presentationml/2006/main" xmlns:r="http://schemas.openxmlformats.org/officeDocument/2006/relationships">
   <p:cSld>
     <p:bg>
       <p:bgPr>
@@ -3718,14 +3763,7 @@
         <p:cNvGrpSpPr/>
         <p:nvPr/>
       </p:nvGrpSpPr>
-      <p:grpSpPr>
-        <a:xfrm>
-          <a:off x="0" y="0"/>
-          <a:ext cx="0" cy="0"/>
-          <a:chOff x="0" y="0"/>
-          <a:chExt cx="0" cy="0"/>
-        </a:xfrm>
-      </p:grpSpPr>
+      <p:grpSpPr/>
       <p:sp>
         <p:nvSpPr>
           <p:cNvPr id="2" name="TextBox 1"/>
@@ -3760,7 +3798,7 @@
                 </a:solidFill>
                 <a:latin typeface="Calibri"/>
               </a:rPr>
-              <a:t>Fracture vs yield, on the test machine</a:t>
+              <a:t>What the separation check assumes</a:t>
             </a:r>
           </a:p>
         </p:txBody>
@@ -3806,44 +3844,19 @@
           <a:lstStyle/>
           <a:p>
             <a:pPr algn="ctr"/>
-            <a:endParaRPr/>
-          </a:p>
-        </p:txBody>
-      </p:sp>
-      <p:pic>
-        <p:nvPicPr>
-          <p:cNvPr id="4" name="Picture 3" descr="fig_brittle_traces.png"/>
-          <p:cNvPicPr>
-            <a:picLocks noChangeAspect="1"/>
-          </p:cNvPicPr>
-          <p:nvPr/>
-        </p:nvPicPr>
-        <p:blipFill>
-          <a:blip r:embed="rId2"/>
-          <a:stretch>
-            <a:fillRect/>
-          </a:stretch>
-        </p:blipFill>
-        <p:spPr>
-          <a:xfrm>
-            <a:off x="2696664" y="1371600"/>
-            <a:ext cx="6798365" cy="4343400"/>
-          </a:xfrm>
-          <a:prstGeom prst="rect">
-            <a:avLst/>
-          </a:prstGeom>
-        </p:spPr>
-      </p:pic>
-      <p:sp>
-        <p:nvSpPr>
-          <p:cNvPr id="5" name="TextBox 4"/>
+          </a:p>
+        </p:txBody>
+      </p:sp>
+      <p:sp>
+        <p:nvSpPr>
+          <p:cNvPr id="4" name="TextBox 3"/>
           <p:cNvSpPr txBox="1"/>
           <p:nvPr/>
         </p:nvSpPr>
         <p:spPr>
           <a:xfrm>
-            <a:off x="822960" y="5788152"/>
-            <a:ext cx="10607040" cy="548640"/>
+            <a:off x="868680" y="1554480"/>
+            <a:ext cx="10424160" cy="4754880"/>
           </a:xfrm>
           <a:prstGeom prst="rect">
             <a:avLst/>
@@ -3856,58 +3869,67 @@
           </a:bodyPr>
           <a:lstStyle/>
           <a:p>
-            <a:pPr algn="ctr">
-              <a:spcAft>
-                <a:spcPts val="600"/>
-              </a:spcAft>
-            </a:pPr>
-            <a:r>
-              <a:rPr sz="1500" b="0">
-                <a:solidFill>
-                  <a:srgbClr val="0B0B0B"/>
-                </a:solidFill>
-                <a:latin typeface="Calibri"/>
-              </a:rPr>
-              <a:t>Same fixture, same material. Thin webs shed the load in one drop; thicker webs plateau.</a:t>
-            </a:r>
-          </a:p>
-        </p:txBody>
-      </p:sp>
-      <p:sp>
-        <p:nvSpPr>
-          <p:cNvPr id="6" name="TextBox 5"/>
-          <p:cNvSpPr txBox="1"/>
-          <p:nvPr/>
-        </p:nvSpPr>
-        <p:spPr>
-          <a:xfrm>
-            <a:off x="822960" y="6245352"/>
-            <a:ext cx="10607040" cy="365760"/>
-          </a:xfrm>
-          <a:prstGeom prst="rect">
-            <a:avLst/>
-          </a:prstGeom>
-          <a:noFill/>
-        </p:spPr>
-        <p:txBody>
-          <a:bodyPr wrap="square" anchor="t">
-            <a:spAutoFit/>
-          </a:bodyPr>
-          <a:lstStyle/>
-          <a:p>
-            <a:pPr algn="ctr">
-              <a:spcAft>
-                <a:spcPts val="600"/>
-              </a:spcAft>
-            </a:pPr>
-            <a:r>
-              <a:rPr sz="1150" b="0">
-                <a:solidFill>
-                  <a:srgbClr val="52514E"/>
-                </a:solidFill>
-                <a:latin typeface="Calibri"/>
-              </a:rPr>
-              <a:t>No equation on the previous slides distinguishes these two endings.</a:t>
+            <a:pPr algn="l">
+              <a:spcAft>
+                <a:spcPts val="1200"/>
+              </a:spcAft>
+            </a:pPr>
+            <a:r>
+              <a:rPr sz="2200" b="0">
+                <a:solidFill>
+                  <a:srgbClr val="0B0B0B"/>
+                </a:solidFill>
+                <a:latin typeface="Calibri"/>
+              </a:rPr>
+              <a:t>The stress side is textbook mechanics — the same VQ/(I_x t) you already knew, evaluated one plane up.</a:t>
+            </a:r>
+          </a:p>
+          <a:p>
+            <a:pPr algn="l">
+              <a:spcAft>
+                <a:spcPts val="1200"/>
+              </a:spcAft>
+            </a:pPr>
+            <a:r>
+              <a:rPr sz="2200" b="0">
+                <a:solidFill>
+                  <a:srgbClr val="0B0B0B"/>
+                </a:solidFill>
+                <a:latin typeface="Calibri"/>
+              </a:rPr>
+              <a:t>The strength side is not: tau_i is the bond strength along the printed layer lines, weaker than the bulk plastic, listed in no handbook.</a:t>
+            </a:r>
+          </a:p>
+          <a:p>
+            <a:pPr algn="l">
+              <a:spcAft>
+                <a:spcPts val="1200"/>
+              </a:spcAft>
+            </a:pPr>
+            <a:r>
+              <a:rPr sz="2200" b="0">
+                <a:solidFill>
+                  <a:srgbClr val="0B0B0B"/>
+                </a:solidFill>
+                <a:latin typeface="Calibri"/>
+              </a:rPr>
+              <a:t>Pre-lab 1 starts it at the bulk guess sigma_y/sqrt(3) = 43.9 MPa and calibrates it from the data — it lands near 18 MPa, and it drifts with print session and support condition.</a:t>
+            </a:r>
+          </a:p>
+          <a:p>
+            <a:pPr algn="l">
+              <a:spcAft>
+                <a:spcPts val="1200"/>
+              </a:spcAft>
+            </a:pPr>
+            <a:r>
+              <a:rPr sz="2200" b="0">
+                <a:solidFill>
+                  <a:srgbClr val="0B0B0B"/>
+                </a:solidFill>
+                <a:latin typeface="Calibri"/>
+              </a:rPr>
+              <a:t>The check predicts a capacity trend on one candidate plane. It is a dominant-mode proxy, not a fracture diagnosis.</a:t>
             </a:r>
           </a:p>
         </p:txBody>
@@ -3921,7 +3943,7 @@
 </file>
 
 <file path=ppt/slides/slide13.xml><?xml version="1.0" encoding="utf-8"?>
-<p:sld xmlns:a="http://schemas.openxmlformats.org/drawingml/2006/main" xmlns:r="http://schemas.openxmlformats.org/officeDocument/2006/relationships" xmlns:p="http://schemas.openxmlformats.org/presentationml/2006/main">
+<p:sld xmlns:a="http://schemas.openxmlformats.org/drawingml/2006/main" xmlns:p="http://schemas.openxmlformats.org/presentationml/2006/main" xmlns:r="http://schemas.openxmlformats.org/officeDocument/2006/relationships">
   <p:cSld>
     <p:bg>
       <p:bgPr>
@@ -3937,14 +3959,7 @@
         <p:cNvGrpSpPr/>
         <p:nvPr/>
       </p:nvGrpSpPr>
-      <p:grpSpPr>
-        <a:xfrm>
-          <a:off x="0" y="0"/>
-          <a:ext cx="0" cy="0"/>
-          <a:chOff x="0" y="0"/>
-          <a:chExt cx="0" cy="0"/>
-        </a:xfrm>
-      </p:grpSpPr>
+      <p:grpSpPr/>
       <p:sp>
         <p:nvSpPr>
           <p:cNvPr id="2" name="TextBox 1"/>
@@ -3979,7 +3994,7 @@
                 </a:solidFill>
                 <a:latin typeface="Calibri"/>
               </a:rPr>
-              <a:t>Lateral-torsional buckling: the idea</a:t>
+              <a:t>Fracture vs yield, on the test machine</a:t>
             </a:r>
           </a:p>
         </p:txBody>
@@ -4025,13 +4040,12 @@
           <a:lstStyle/>
           <a:p>
             <a:pPr algn="ctr"/>
-            <a:endParaRPr/>
           </a:p>
         </p:txBody>
       </p:sp>
       <p:pic>
         <p:nvPicPr>
-          <p:cNvPr id="4" name="Picture 3" descr="ltb.png"/>
+          <p:cNvPr id="4" name="Picture 3" descr="fig_brittle_traces.png"/>
           <p:cNvPicPr>
             <a:picLocks noChangeAspect="1"/>
           </p:cNvPicPr>
@@ -4045,8 +4059,8 @@
         </p:blipFill>
         <p:spPr>
           <a:xfrm>
-            <a:off x="1554480" y="1874520"/>
-            <a:ext cx="5975789" cy="1554480"/>
+            <a:off x="2696664" y="1371600"/>
+            <a:ext cx="6798365" cy="4343400"/>
           </a:xfrm>
           <a:prstGeom prst="rect">
             <a:avLst/>
@@ -4061,8 +4075,8 @@
         </p:nvSpPr>
         <p:spPr>
           <a:xfrm>
-            <a:off x="1097280" y="4023360"/>
-            <a:ext cx="10058400" cy="1828800"/>
+            <a:off x="822960" y="5788152"/>
+            <a:ext cx="10607040" cy="548640"/>
           </a:xfrm>
           <a:prstGeom prst="rect">
             <a:avLst/>
@@ -4077,108 +4091,60 @@
           <a:p>
             <a:pPr algn="ctr">
               <a:spcAft>
-                <a:spcPts val="1000"/>
-              </a:spcAft>
-            </a:pPr>
-            <a:r>
-              <a:rPr sz="1900" b="0" dirty="0">
-                <a:solidFill>
-                  <a:srgbClr val="0B0B0B"/>
-                </a:solidFill>
-                <a:latin typeface="Calibri"/>
-              </a:rPr>
-              <a:t>A tall, thin-flanged beam does not yield in place. </a:t>
-            </a:r>
-            <a:r>
-              <a:rPr sz="1900" b="0">
-                <a:solidFill>
-                  <a:srgbClr val="0B0B0B"/>
-                </a:solidFill>
-                <a:latin typeface="Calibri"/>
-              </a:rPr>
-              <a:t>It rolls sideways and twists at a load below its bending strength — a stability failure, not a strength one.</a:t>
-            </a:r>
-          </a:p>
+                <a:spcPts val="600"/>
+              </a:spcAft>
+            </a:pPr>
+            <a:r>
+              <a:rPr sz="1500" b="0">
+                <a:solidFill>
+                  <a:srgbClr val="0B0B0B"/>
+                </a:solidFill>
+                <a:latin typeface="Calibri"/>
+              </a:rPr>
+              <a:t>Same fixture, same material. Thin webs shed the load in one drop; thicker webs plateau.</a:t>
+            </a:r>
+          </a:p>
+        </p:txBody>
+      </p:sp>
+      <p:sp>
+        <p:nvSpPr>
+          <p:cNvPr id="6" name="TextBox 5"/>
+          <p:cNvSpPr txBox="1"/>
+          <p:nvPr/>
+        </p:nvSpPr>
+        <p:spPr>
+          <a:xfrm>
+            <a:off x="822960" y="6245352"/>
+            <a:ext cx="10607040" cy="365760"/>
+          </a:xfrm>
+          <a:prstGeom prst="rect">
+            <a:avLst/>
+          </a:prstGeom>
+          <a:noFill/>
+        </p:spPr>
+        <p:txBody>
+          <a:bodyPr wrap="square" anchor="t">
+            <a:spAutoFit/>
+          </a:bodyPr>
+          <a:lstStyle/>
           <a:p>
             <a:pPr algn="ctr">
               <a:spcAft>
-                <a:spcPts val="1000"/>
-              </a:spcAft>
-            </a:pPr>
-            <a:r>
-              <a:rPr sz="1900" b="0" dirty="0">
-                <a:solidFill>
-                  <a:srgbClr val="0B0B0B"/>
-                </a:solidFill>
-                <a:latin typeface="Calibri"/>
-              </a:rPr>
-              <a:t>The elastic critical moment, in the Eurocode C1/C2 closed form (Timoshenko elastic-stability theory).</a:t>
-            </a:r>
-          </a:p>
-          <a:p>
-            <a:pPr algn="ctr">
-              <a:spcAft>
-                <a:spcPts val="1000"/>
-              </a:spcAft>
-            </a:pPr>
-            <a:r>
-              <a:rPr sz="1900" b="0" dirty="0">
-                <a:solidFill>
-                  <a:srgbClr val="0B0B0B"/>
-                </a:solidFill>
-                <a:latin typeface="Calibri"/>
-              </a:rPr>
-              <a:t>The next four slides open up every symbol, because LTB decides your optimum and rests on the most assumptions.</a:t>
-            </a:r>
-          </a:p>
-          <a:p>
-            <a:pPr algn="ctr">
-              <a:spcAft>
-                <a:spcPts val="1000"/>
-              </a:spcAft>
-            </a:pPr>
-            <a:r>
-              <a:rPr sz="1900" b="0" dirty="0">
-                <a:solidFill>
-                  <a:srgbClr val="0B0B0B"/>
-                </a:solidFill>
-                <a:latin typeface="Calibri"/>
-              </a:rPr>
-              <a:t>You will not re-derive any of it: P_LTB arrives pre-coded in Pre-lab 1. The goal is to read that code knowing what each symbol assumes.</a:t>
-            </a:r>
-          </a:p>
-        </p:txBody>
-      </p:sp>
-      <p:pic>
-        <p:nvPicPr>
-          <p:cNvPr id="6" name="Picture 5">
-            <a:extLst>
-              <a:ext uri="{FF2B5EF4-FFF2-40B4-BE49-F238E27FC236}">
-                <a16:creationId xmlns:a16="http://schemas.microsoft.com/office/drawing/2014/main" id="{B44F08F5-15FC-FD03-C14B-6C83F72C6A1B}"/>
-              </a:ext>
-            </a:extLst>
-          </p:cNvPr>
-          <p:cNvPicPr>
-            <a:picLocks noChangeAspect="1"/>
-          </p:cNvPicPr>
-          <p:nvPr/>
-        </p:nvPicPr>
-        <p:blipFill>
-          <a:blip r:embed="rId3"/>
-          <a:stretch>
-            <a:fillRect/>
-          </a:stretch>
-        </p:blipFill>
-        <p:spPr>
-          <a:xfrm>
-            <a:off x="8575288" y="1005840"/>
-            <a:ext cx="2706494" cy="2530851"/>
-          </a:xfrm>
-          <a:prstGeom prst="rect">
-            <a:avLst/>
-          </a:prstGeom>
-        </p:spPr>
-      </p:pic>
+                <a:spcPts val="600"/>
+              </a:spcAft>
+            </a:pPr>
+            <a:r>
+              <a:rPr sz="1150" b="0">
+                <a:solidFill>
+                  <a:srgbClr val="52514E"/>
+                </a:solidFill>
+                <a:latin typeface="Calibri"/>
+              </a:rPr>
+              <a:t>No equation on the previous slides distinguishes these two endings.</a:t>
+            </a:r>
+          </a:p>
+        </p:txBody>
+      </p:sp>
     </p:spTree>
   </p:cSld>
   <p:clrMapOvr>
@@ -4188,7 +4154,7 @@
 </file>
 
 <file path=ppt/slides/slide14.xml><?xml version="1.0" encoding="utf-8"?>
-<p:sld xmlns:a="http://schemas.openxmlformats.org/drawingml/2006/main" xmlns:r="http://schemas.openxmlformats.org/officeDocument/2006/relationships" xmlns:p="http://schemas.openxmlformats.org/presentationml/2006/main">
+<p:sld xmlns:a="http://schemas.openxmlformats.org/drawingml/2006/main" xmlns:p="http://schemas.openxmlformats.org/presentationml/2006/main" xmlns:r="http://schemas.openxmlformats.org/officeDocument/2006/relationships">
   <p:cSld>
     <p:bg>
       <p:bgPr>
@@ -4204,14 +4170,7 @@
         <p:cNvGrpSpPr/>
         <p:nvPr/>
       </p:nvGrpSpPr>
-      <p:grpSpPr>
-        <a:xfrm>
-          <a:off x="0" y="0"/>
-          <a:ext cx="0" cy="0"/>
-          <a:chOff x="0" y="0"/>
-          <a:chExt cx="0" cy="0"/>
-        </a:xfrm>
-      </p:grpSpPr>
+      <p:grpSpPr/>
       <p:sp>
         <p:nvSpPr>
           <p:cNvPr id="2" name="TextBox 1"/>
@@ -4246,7 +4205,7 @@
                 </a:solidFill>
                 <a:latin typeface="Calibri"/>
               </a:rPr>
-              <a:t>The critical moment, term by term</a:t>
+              <a:t>Lateral-torsional buckling: the idea</a:t>
             </a:r>
           </a:p>
         </p:txBody>
@@ -4292,13 +4251,12 @@
           <a:lstStyle/>
           <a:p>
             <a:pPr algn="ctr"/>
-            <a:endParaRPr/>
           </a:p>
         </p:txBody>
       </p:sp>
       <p:pic>
         <p:nvPicPr>
-          <p:cNvPr id="4" name="Picture 3" descr="ltb_R.png"/>
+          <p:cNvPr id="4" name="Picture 3" descr="ltb.png"/>
           <p:cNvPicPr>
             <a:picLocks noChangeAspect="1"/>
           </p:cNvPicPr>
@@ -4312,8 +4270,8 @@
         </p:blipFill>
         <p:spPr>
           <a:xfrm>
-            <a:off x="3000334" y="2011680"/>
-            <a:ext cx="6191025" cy="1554480"/>
+            <a:off x="3107953" y="2011680"/>
+            <a:ext cx="5975789" cy="1554480"/>
           </a:xfrm>
           <a:prstGeom prst="rect">
             <a:avLst/>
@@ -4354,7 +4312,7 @@
                 </a:solidFill>
                 <a:latin typeface="Calibri"/>
               </a:rPr>
-              <a:t>Under the root, three effects trade against each other:</a:t>
+              <a:t>A tall, thin-flanged beam does not yield in place. It rolls sideways and twists at a load below its bending strength — a stability failure, not a strength one.</a:t>
             </a:r>
           </a:p>
           <a:p>
@@ -4370,7 +4328,7 @@
                 </a:solidFill>
                 <a:latin typeface="Calibri"/>
               </a:rPr>
-              <a:t>C_w / I_y  —  warping rigidity: the flanges resisting counter-bending.</a:t>
+              <a:t>The elastic critical moment, in the Eurocode C1/C2 closed form (Timoshenko elastic-stability theory).</a:t>
             </a:r>
           </a:p>
           <a:p>
@@ -4386,7 +4344,7 @@
                 </a:solidFill>
                 <a:latin typeface="Calibri"/>
               </a:rPr>
-              <a:t>L_b^2 GJ / (pi^2 E I_y)  —  St. Venant torsion: the open section's twisting stiffness.</a:t>
+              <a:t>The next four slides open up every symbol, because LTB decides your optimum and rests on the most assumptions.</a:t>
             </a:r>
           </a:p>
           <a:p>
@@ -4402,23 +4360,7 @@
                 </a:solidFill>
                 <a:latin typeface="Calibri"/>
               </a:rPr>
-              <a:t>(C_2 z_g)^2  —  load height: loading the top flange is destabilizing, so it subtracts.</a:t>
-            </a:r>
-          </a:p>
-          <a:p>
-            <a:pPr algn="ctr">
-              <a:spcAft>
-                <a:spcPts val="1000"/>
-              </a:spcAft>
-            </a:pPr>
-            <a:r>
-              <a:rPr sz="1900" b="0">
-                <a:solidFill>
-                  <a:srgbClr val="0B0B0B"/>
-                </a:solidFill>
-                <a:latin typeface="Calibri"/>
-              </a:rPr>
-              <a:t>C_1 = 1.35 (central point load),  C_2 = 0.55 (load-height factor).</a:t>
+              <a:t>You will not re-derive any of it: P_LTB arrives pre-coded in Pre-lab 1. The goal is to read that code knowing what each symbol assumes.</a:t>
             </a:r>
           </a:p>
         </p:txBody>
@@ -4432,7 +4374,7 @@
 </file>
 
 <file path=ppt/slides/slide15.xml><?xml version="1.0" encoding="utf-8"?>
-<p:sld xmlns:a="http://schemas.openxmlformats.org/drawingml/2006/main" xmlns:r="http://schemas.openxmlformats.org/officeDocument/2006/relationships" xmlns:p="http://schemas.openxmlformats.org/presentationml/2006/main">
+<p:sld xmlns:a="http://schemas.openxmlformats.org/drawingml/2006/main" xmlns:p="http://schemas.openxmlformats.org/presentationml/2006/main" xmlns:r="http://schemas.openxmlformats.org/officeDocument/2006/relationships">
   <p:cSld>
     <p:bg>
       <p:bgPr>
@@ -4448,14 +4390,7 @@
         <p:cNvGrpSpPr/>
         <p:nvPr/>
       </p:nvGrpSpPr>
-      <p:grpSpPr>
-        <a:xfrm>
-          <a:off x="0" y="0"/>
-          <a:ext cx="0" cy="0"/>
-          <a:chOff x="0" y="0"/>
-          <a:chExt cx="0" cy="0"/>
-        </a:xfrm>
-      </p:grpSpPr>
+      <p:grpSpPr/>
       <p:sp>
         <p:nvSpPr>
           <p:cNvPr id="2" name="TextBox 1"/>
@@ -4490,7 +4425,7 @@
                 </a:solidFill>
                 <a:latin typeface="Calibri"/>
               </a:rPr>
-              <a:t>From critical moment to a load</a:t>
+              <a:t>The critical moment, term by term</a:t>
             </a:r>
           </a:p>
         </p:txBody>
@@ -4536,13 +4471,12 @@
           <a:lstStyle/>
           <a:p>
             <a:pPr algn="ctr"/>
-            <a:endParaRPr/>
           </a:p>
         </p:txBody>
       </p:sp>
       <p:pic>
         <p:nvPicPr>
-          <p:cNvPr id="4" name="Picture 3" descr="ltb_cap.png"/>
+          <p:cNvPr id="4" name="Picture 3" descr="ltb_R.png"/>
           <p:cNvPicPr>
             <a:picLocks noChangeAspect="1"/>
           </p:cNvPicPr>
@@ -4556,8 +4490,8 @@
         </p:blipFill>
         <p:spPr>
           <a:xfrm>
-            <a:off x="1752447" y="2011680"/>
-            <a:ext cx="8686800" cy="1411921"/>
+            <a:off x="3000334" y="2011680"/>
+            <a:ext cx="6191025" cy="1554480"/>
           </a:xfrm>
           <a:prstGeom prst="rect">
             <a:avLst/>
@@ -4572,7 +4506,7 @@
         </p:nvSpPr>
         <p:spPr>
           <a:xfrm>
-            <a:off x="1097280" y="3880801"/>
+            <a:off x="1097280" y="4023360"/>
             <a:ext cx="10058400" cy="1828800"/>
           </a:xfrm>
           <a:prstGeom prst="rect">
@@ -4598,7 +4532,7 @@
                 </a:solidFill>
                 <a:latin typeface="Calibri"/>
               </a:rPr>
-              <a:t>The beam cannot exceed its yield moment, so LTB is capped at yield:</a:t>
+              <a:t>Under the root, three effects trade against each other:</a:t>
             </a:r>
           </a:p>
           <a:p>
@@ -4614,7 +4548,7 @@
                 </a:solidFill>
                 <a:latin typeface="Calibri"/>
               </a:rPr>
-              <a:t>take the smaller of the elastic buckling moment and the yield moment,</a:t>
+              <a:t>C_w / I_y  —  warping rigidity: the flanges resisting counter-bending.</a:t>
             </a:r>
           </a:p>
           <a:p>
@@ -4630,7 +4564,7 @@
                 </a:solidFill>
                 <a:latin typeface="Calibri"/>
               </a:rPr>
-              <a:t>convert moment to load with M_max = PL/4, so P = 4M / L,</a:t>
+              <a:t>L_b^2 GJ / (pi^2 E I_y)  —  St. Venant torsion: the open section's twisting stiffness.</a:t>
             </a:r>
           </a:p>
           <a:p>
@@ -4646,7 +4580,7 @@
                 </a:solidFill>
                 <a:latin typeface="Calibri"/>
               </a:rPr>
-              <a:t>with L_b = kL and z_g = c = TH/2 (load at the top surface).</a:t>
+              <a:t>(C_2 z_g)^2  —  load height: loading the top flange is destabilizing, so it subtracts.</a:t>
             </a:r>
           </a:p>
           <a:p>
@@ -4662,7 +4596,7 @@
                 </a:solidFill>
                 <a:latin typeface="Calibri"/>
               </a:rPr>
-              <a:t>The min is a crude nod to inelastic buckling.</a:t>
+              <a:t>C_1 = 1.35 (central point load),  C_2 = 0.55 (load-height factor).</a:t>
             </a:r>
           </a:p>
         </p:txBody>
@@ -4676,7 +4610,7 @@
 </file>
 
 <file path=ppt/slides/slide16.xml><?xml version="1.0" encoding="utf-8"?>
-<p:sld xmlns:a="http://schemas.openxmlformats.org/drawingml/2006/main" xmlns:r="http://schemas.openxmlformats.org/officeDocument/2006/relationships" xmlns:p="http://schemas.openxmlformats.org/presentationml/2006/main">
+<p:sld xmlns:a="http://schemas.openxmlformats.org/drawingml/2006/main" xmlns:p="http://schemas.openxmlformats.org/presentationml/2006/main" xmlns:r="http://schemas.openxmlformats.org/officeDocument/2006/relationships">
   <p:cSld>
     <p:bg>
       <p:bgPr>
@@ -4692,14 +4626,7 @@
         <p:cNvGrpSpPr/>
         <p:nvPr/>
       </p:nvGrpSpPr>
-      <p:grpSpPr>
-        <a:xfrm>
-          <a:off x="0" y="0"/>
-          <a:ext cx="0" cy="0"/>
-          <a:chOff x="0" y="0"/>
-          <a:chExt cx="0" cy="0"/>
-        </a:xfrm>
-      </p:grpSpPr>
+      <p:grpSpPr/>
       <p:sp>
         <p:nvSpPr>
           <p:cNvPr id="2" name="TextBox 1"/>
@@ -4734,7 +4661,7 @@
                 </a:solidFill>
                 <a:latin typeface="Calibri"/>
               </a:rPr>
-              <a:t>What feeds it: the section constants</a:t>
+              <a:t>From critical moment to a load</a:t>
             </a:r>
           </a:p>
         </p:txBody>
@@ -4780,13 +4707,12 @@
           <a:lstStyle/>
           <a:p>
             <a:pPr algn="ctr"/>
-            <a:endParaRPr/>
           </a:p>
         </p:txBody>
       </p:sp>
       <p:pic>
         <p:nvPicPr>
-          <p:cNvPr id="4" name="Picture 3" descr="sec_all.png"/>
+          <p:cNvPr id="4" name="Picture 3" descr="ltb_cap.png"/>
           <p:cNvPicPr>
             <a:picLocks noChangeAspect="1"/>
           </p:cNvPicPr>
@@ -4800,8 +4726,8 @@
         </p:blipFill>
         <p:spPr>
           <a:xfrm>
-            <a:off x="2651818" y="1417320"/>
-            <a:ext cx="6888058" cy="2651760"/>
+            <a:off x="1752447" y="2011680"/>
+            <a:ext cx="8686800" cy="1411921"/>
           </a:xfrm>
           <a:prstGeom prst="rect">
             <a:avLst/>
@@ -4816,8 +4742,8 @@
         </p:nvSpPr>
         <p:spPr>
           <a:xfrm>
-            <a:off x="640080" y="4297680"/>
-            <a:ext cx="10972800" cy="2377440"/>
+            <a:off x="1097280" y="3880801"/>
+            <a:ext cx="10058400" cy="1828800"/>
           </a:xfrm>
           <a:prstGeom prst="rect">
             <a:avLst/>
@@ -4830,67 +4756,83 @@
           </a:bodyPr>
           <a:lstStyle/>
           <a:p>
-            <a:pPr lvl="1" algn="l">
-              <a:spcAft>
-                <a:spcPts val="800"/>
-              </a:spcAft>
-            </a:pPr>
-            <a:r>
-              <a:rPr sz="1500" b="0">
-                <a:solidFill>
-                  <a:srgbClr val="0B0B0B"/>
-                </a:solidFill>
-                <a:latin typeface="Calibri"/>
-              </a:rPr>
-              <a:t>•  I_y: weak-axis stiffness — small for narrow flanges, which is why tall thin beams tip.</a:t>
-            </a:r>
-          </a:p>
-          <a:p>
-            <a:pPr lvl="1" algn="l">
-              <a:spcAft>
-                <a:spcPts val="800"/>
-              </a:spcAft>
-            </a:pPr>
-            <a:r>
-              <a:rPr sz="1500" b="0">
-                <a:solidFill>
-                  <a:srgbClr val="0B0B0B"/>
-                </a:solidFill>
-                <a:latin typeface="Calibri"/>
-              </a:rPr>
-              <a:t>•  J: St. Venant torsion, summed over web and flanges as thin rectangles.</a:t>
-            </a:r>
-          </a:p>
-          <a:p>
-            <a:pPr lvl="1" algn="l">
-              <a:spcAft>
-                <a:spcPts val="800"/>
-              </a:spcAft>
-            </a:pPr>
-            <a:r>
-              <a:rPr sz="1500" b="0">
-                <a:solidFill>
-                  <a:srgbClr val="0B0B0B"/>
-                </a:solidFill>
-                <a:latin typeface="Calibri"/>
-              </a:rPr>
-              <a:t>•  C_w: warping constant, the flanges' resistance to counter-bending.</a:t>
-            </a:r>
-          </a:p>
-          <a:p>
-            <a:pPr algn="l">
-              <a:spcAft>
-                <a:spcPts val="800"/>
-              </a:spcAft>
-            </a:pPr>
-            <a:r>
-              <a:rPr sz="1700" b="0">
-                <a:solidFill>
-                  <a:srgbClr val="0B0B0B"/>
-                </a:solidFill>
-                <a:latin typeface="Calibri"/>
-              </a:rPr>
-              <a:t>All three come from section_props in Pre-lab 1.</a:t>
+            <a:pPr algn="ctr">
+              <a:spcAft>
+                <a:spcPts val="1000"/>
+              </a:spcAft>
+            </a:pPr>
+            <a:r>
+              <a:rPr sz="1900" b="0">
+                <a:solidFill>
+                  <a:srgbClr val="0B0B0B"/>
+                </a:solidFill>
+                <a:latin typeface="Calibri"/>
+              </a:rPr>
+              <a:t>The beam cannot exceed its yield moment, so LTB is capped at yield:</a:t>
+            </a:r>
+          </a:p>
+          <a:p>
+            <a:pPr algn="ctr">
+              <a:spcAft>
+                <a:spcPts val="1000"/>
+              </a:spcAft>
+            </a:pPr>
+            <a:r>
+              <a:rPr sz="1900" b="0">
+                <a:solidFill>
+                  <a:srgbClr val="0B0B0B"/>
+                </a:solidFill>
+                <a:latin typeface="Calibri"/>
+              </a:rPr>
+              <a:t>take the smaller of the elastic buckling moment and the yield moment,</a:t>
+            </a:r>
+          </a:p>
+          <a:p>
+            <a:pPr algn="ctr">
+              <a:spcAft>
+                <a:spcPts val="1000"/>
+              </a:spcAft>
+            </a:pPr>
+            <a:r>
+              <a:rPr sz="1900" b="0">
+                <a:solidFill>
+                  <a:srgbClr val="0B0B0B"/>
+                </a:solidFill>
+                <a:latin typeface="Calibri"/>
+              </a:rPr>
+              <a:t>convert moment to load with M_max = PL/4, so P = 4M / L,</a:t>
+            </a:r>
+          </a:p>
+          <a:p>
+            <a:pPr algn="ctr">
+              <a:spcAft>
+                <a:spcPts val="1000"/>
+              </a:spcAft>
+            </a:pPr>
+            <a:r>
+              <a:rPr sz="1900" b="0">
+                <a:solidFill>
+                  <a:srgbClr val="0B0B0B"/>
+                </a:solidFill>
+                <a:latin typeface="Calibri"/>
+              </a:rPr>
+              <a:t>with L_b = kL and z_g = c = TH/2 (load at the top surface).</a:t>
+            </a:r>
+          </a:p>
+          <a:p>
+            <a:pPr algn="ctr">
+              <a:spcAft>
+                <a:spcPts val="1000"/>
+              </a:spcAft>
+            </a:pPr>
+            <a:r>
+              <a:rPr sz="1900" b="0">
+                <a:solidFill>
+                  <a:srgbClr val="0B0B0B"/>
+                </a:solidFill>
+                <a:latin typeface="Calibri"/>
+              </a:rPr>
+              <a:t>The min is a crude nod to inelastic buckling.</a:t>
             </a:r>
           </a:p>
         </p:txBody>
@@ -4904,7 +4846,7 @@
 </file>
 
 <file path=ppt/slides/slide17.xml><?xml version="1.0" encoding="utf-8"?>
-<p:sld xmlns:a="http://schemas.openxmlformats.org/drawingml/2006/main" xmlns:r="http://schemas.openxmlformats.org/officeDocument/2006/relationships" xmlns:p="http://schemas.openxmlformats.org/presentationml/2006/main">
+<p:sld xmlns:a="http://schemas.openxmlformats.org/drawingml/2006/main" xmlns:p="http://schemas.openxmlformats.org/presentationml/2006/main" xmlns:r="http://schemas.openxmlformats.org/officeDocument/2006/relationships">
   <p:cSld>
     <p:bg>
       <p:bgPr>
@@ -4920,14 +4862,7 @@
         <p:cNvGrpSpPr/>
         <p:nvPr/>
       </p:nvGrpSpPr>
-      <p:grpSpPr>
-        <a:xfrm>
-          <a:off x="0" y="0"/>
-          <a:ext cx="0" cy="0"/>
-          <a:chOff x="0" y="0"/>
-          <a:chExt cx="0" cy="0"/>
-        </a:xfrm>
-      </p:grpSpPr>
+      <p:grpSpPr/>
       <p:sp>
         <p:nvSpPr>
           <p:cNvPr id="2" name="TextBox 1"/>
@@ -4962,7 +4897,7 @@
                 </a:solidFill>
                 <a:latin typeface="Calibri"/>
               </a:rPr>
-              <a:t>The assumptions underneath</a:t>
+              <a:t>What feeds it: the section constants</a:t>
             </a:r>
           </a:p>
         </p:txBody>
@@ -5008,20 +4943,43 @@
           <a:lstStyle/>
           <a:p>
             <a:pPr algn="ctr"/>
-            <a:endParaRPr/>
-          </a:p>
-        </p:txBody>
-      </p:sp>
-      <p:sp>
-        <p:nvSpPr>
-          <p:cNvPr id="4" name="TextBox 3"/>
+          </a:p>
+        </p:txBody>
+      </p:sp>
+      <p:pic>
+        <p:nvPicPr>
+          <p:cNvPr id="4" name="Picture 3" descr="sec_all.png"/>
+          <p:cNvPicPr>
+            <a:picLocks noChangeAspect="1"/>
+          </p:cNvPicPr>
+          <p:nvPr/>
+        </p:nvPicPr>
+        <p:blipFill>
+          <a:blip r:embed="rId2"/>
+          <a:stretch>
+            <a:fillRect/>
+          </a:stretch>
+        </p:blipFill>
+        <p:spPr>
+          <a:xfrm>
+            <a:off x="2651818" y="1417320"/>
+            <a:ext cx="6888058" cy="2651760"/>
+          </a:xfrm>
+          <a:prstGeom prst="rect">
+            <a:avLst/>
+          </a:prstGeom>
+        </p:spPr>
+      </p:pic>
+      <p:sp>
+        <p:nvSpPr>
+          <p:cNvPr id="5" name="TextBox 4"/>
           <p:cNvSpPr txBox="1"/>
           <p:nvPr/>
         </p:nvSpPr>
         <p:spPr>
           <a:xfrm>
-            <a:off x="868680" y="1554480"/>
-            <a:ext cx="10424160" cy="4754880"/>
+            <a:off x="640080" y="4297680"/>
+            <a:ext cx="10972800" cy="2377440"/>
           </a:xfrm>
           <a:prstGeom prst="rect">
             <a:avLst/>
@@ -5034,99 +4992,67 @@
           </a:bodyPr>
           <a:lstStyle/>
           <a:p>
+            <a:pPr algn="l" lvl="1">
+              <a:spcAft>
+                <a:spcPts val="800"/>
+              </a:spcAft>
+            </a:pPr>
+            <a:r>
+              <a:rPr sz="1500" b="0">
+                <a:solidFill>
+                  <a:srgbClr val="0B0B0B"/>
+                </a:solidFill>
+                <a:latin typeface="Calibri"/>
+              </a:rPr>
+              <a:t>•  I_y: weak-axis stiffness — small for narrow flanges, which is why tall thin beams tip.</a:t>
+            </a:r>
+          </a:p>
+          <a:p>
+            <a:pPr algn="l" lvl="1">
+              <a:spcAft>
+                <a:spcPts val="800"/>
+              </a:spcAft>
+            </a:pPr>
+            <a:r>
+              <a:rPr sz="1500" b="0">
+                <a:solidFill>
+                  <a:srgbClr val="0B0B0B"/>
+                </a:solidFill>
+                <a:latin typeface="Calibri"/>
+              </a:rPr>
+              <a:t>•  J: St. Venant torsion, summed over web and flanges as thin rectangles.</a:t>
+            </a:r>
+          </a:p>
+          <a:p>
+            <a:pPr algn="l" lvl="1">
+              <a:spcAft>
+                <a:spcPts val="800"/>
+              </a:spcAft>
+            </a:pPr>
+            <a:r>
+              <a:rPr sz="1500" b="0">
+                <a:solidFill>
+                  <a:srgbClr val="0B0B0B"/>
+                </a:solidFill>
+                <a:latin typeface="Calibri"/>
+              </a:rPr>
+              <a:t>•  C_w: warping constant, the flanges' resistance to counter-bending.</a:t>
+            </a:r>
+          </a:p>
+          <a:p>
             <a:pPr algn="l">
               <a:spcAft>
-                <a:spcPts val="1200"/>
-              </a:spcAft>
-            </a:pPr>
-            <a:r>
-              <a:rPr sz="1800" b="0">
-                <a:solidFill>
-                  <a:srgbClr val="0B0B0B"/>
-                </a:solidFill>
-                <a:latin typeface="Calibri"/>
-              </a:rPr>
-              <a:t>The formula is exact only for an idealized beam. Ours is not quite that beam.</a:t>
-            </a:r>
-          </a:p>
-          <a:p>
-            <a:pPr lvl="1" algn="l">
-              <a:spcAft>
-                <a:spcPts val="1200"/>
-              </a:spcAft>
-            </a:pPr>
-            <a:r>
-              <a:rPr sz="1600" b="0">
-                <a:solidFill>
-                  <a:srgbClr val="0B0B0B"/>
-                </a:solidFill>
-                <a:latin typeface="Calibri"/>
-              </a:rPr>
-              <a:t>•  Thin-walled open section: J and C_w use thin-rectangle theory. Webs up to 7 mm against a 10 mm flange stretch 'thin'; J drifts.</a:t>
-            </a:r>
-          </a:p>
-          <a:p>
-            <a:pPr lvl="1" algn="l">
-              <a:spcAft>
-                <a:spcPts val="1200"/>
-              </a:spcAft>
-            </a:pPr>
-            <a:r>
-              <a:rPr sz="1600" b="0">
-                <a:solidFill>
-                  <a:srgbClr val="0B0B0B"/>
-                </a:solidFill>
-                <a:latin typeface="Calibri"/>
-              </a:rPr>
-              <a:t>•  Timoshenko elastic stability: M_cr assumes linear-elastic, perfectly straight, no residual stress. A print has all three imperfections.</a:t>
-            </a:r>
-          </a:p>
-          <a:p>
-            <a:pPr lvl="1" algn="l">
-              <a:spcAft>
-                <a:spcPts val="1200"/>
-              </a:spcAft>
-            </a:pPr>
-            <a:r>
-              <a:rPr sz="1600" b="0">
-                <a:solidFill>
-                  <a:srgbClr val="0B0B0B"/>
-                </a:solidFill>
-                <a:latin typeface="Calibri"/>
-              </a:rPr>
-              <a:t>•  Warping torsion: the C_w term assumes ends free to warp. The real fixture restrains them — which is what k absorbs.</a:t>
-            </a:r>
-          </a:p>
-          <a:p>
-            <a:pPr lvl="1" algn="l">
-              <a:spcAft>
-                <a:spcPts val="1200"/>
-              </a:spcAft>
-            </a:pPr>
-            <a:r>
-              <a:rPr sz="1600" b="0">
-                <a:solidFill>
-                  <a:srgbClr val="0B0B0B"/>
-                </a:solidFill>
-                <a:latin typeface="Calibri"/>
-              </a:rPr>
-              <a:t>•  Elastic, isotropic material: E = 2.5 GPa, G = E/2.6 (nu = 0.3). Printed PLA is layered and anisotropic.</a:t>
-            </a:r>
-          </a:p>
-          <a:p>
-            <a:pPr algn="l">
-              <a:spcAft>
-                <a:spcPts val="1200"/>
-              </a:spcAft>
-            </a:pPr>
-            <a:r>
-              <a:rPr sz="1800" b="0">
-                <a:solidFill>
-                  <a:srgbClr val="0B0B0B"/>
-                </a:solidFill>
-                <a:latin typeface="Calibri"/>
-              </a:rPr>
-              <a:t>Each gap is a reason the equation narrows the answer without settling it.</a:t>
+                <a:spcPts val="800"/>
+              </a:spcAft>
+            </a:pPr>
+            <a:r>
+              <a:rPr sz="1700" b="0">
+                <a:solidFill>
+                  <a:srgbClr val="0B0B0B"/>
+                </a:solidFill>
+                <a:latin typeface="Calibri"/>
+              </a:rPr>
+              <a:t>All three come from section_props in Pre-lab 1.</a:t>
             </a:r>
           </a:p>
         </p:txBody>
@@ -5140,7 +5066,7 @@
 </file>
 
 <file path=ppt/slides/slide18.xml><?xml version="1.0" encoding="utf-8"?>
-<p:sld xmlns:a="http://schemas.openxmlformats.org/drawingml/2006/main" xmlns:r="http://schemas.openxmlformats.org/officeDocument/2006/relationships" xmlns:p="http://schemas.openxmlformats.org/presentationml/2006/main">
+<p:sld xmlns:a="http://schemas.openxmlformats.org/drawingml/2006/main" xmlns:p="http://schemas.openxmlformats.org/presentationml/2006/main" xmlns:r="http://schemas.openxmlformats.org/officeDocument/2006/relationships">
   <p:cSld>
     <p:bg>
       <p:bgPr>
@@ -5156,14 +5082,7 @@
         <p:cNvGrpSpPr/>
         <p:nvPr/>
       </p:nvGrpSpPr>
-      <p:grpSpPr>
-        <a:xfrm>
-          <a:off x="0" y="0"/>
-          <a:ext cx="0" cy="0"/>
-          <a:chOff x="0" y="0"/>
-          <a:chExt cx="0" cy="0"/>
-        </a:xfrm>
-      </p:grpSpPr>
+      <p:grpSpPr/>
       <p:sp>
         <p:nvSpPr>
           <p:cNvPr id="2" name="TextBox 1"/>
@@ -5198,7 +5117,7 @@
                 </a:solidFill>
                 <a:latin typeface="Calibri"/>
               </a:rPr>
-              <a:t>The one number that rules LTB: k</a:t>
+              <a:t>The assumptions underneath</a:t>
             </a:r>
           </a:p>
         </p:txBody>
@@ -5244,44 +5163,19 @@
           <a:lstStyle/>
           <a:p>
             <a:pPr algn="ctr"/>
-            <a:endParaRPr/>
-          </a:p>
-        </p:txBody>
-      </p:sp>
-      <p:pic>
-        <p:nvPicPr>
-          <p:cNvPr id="4" name="Picture 3" descr="k_scale.png"/>
-          <p:cNvPicPr>
-            <a:picLocks noChangeAspect="1"/>
-          </p:cNvPicPr>
-          <p:nvPr/>
-        </p:nvPicPr>
-        <p:blipFill>
-          <a:blip r:embed="rId2"/>
-          <a:stretch>
-            <a:fillRect/>
-          </a:stretch>
-        </p:blipFill>
-        <p:spPr>
-          <a:xfrm>
-            <a:off x="1880423" y="2011680"/>
-            <a:ext cx="8430847" cy="1554480"/>
-          </a:xfrm>
-          <a:prstGeom prst="rect">
-            <a:avLst/>
-          </a:prstGeom>
-        </p:spPr>
-      </p:pic>
-      <p:sp>
-        <p:nvSpPr>
-          <p:cNvPr id="5" name="TextBox 4"/>
+          </a:p>
+        </p:txBody>
+      </p:sp>
+      <p:sp>
+        <p:nvSpPr>
+          <p:cNvPr id="4" name="TextBox 3"/>
           <p:cNvSpPr txBox="1"/>
           <p:nvPr/>
         </p:nvSpPr>
         <p:spPr>
           <a:xfrm>
-            <a:off x="1097280" y="4023360"/>
-            <a:ext cx="10058400" cy="1828800"/>
+            <a:off x="868680" y="1554480"/>
+            <a:ext cx="10424160" cy="4754880"/>
           </a:xfrm>
           <a:prstGeom prst="rect">
             <a:avLst/>
@@ -5294,83 +5188,99 @@
           </a:bodyPr>
           <a:lstStyle/>
           <a:p>
-            <a:pPr algn="ctr">
-              <a:spcAft>
-                <a:spcPts val="1000"/>
-              </a:spcAft>
-            </a:pPr>
-            <a:r>
-              <a:rPr sz="1900" b="0">
-                <a:solidFill>
-                  <a:srgbClr val="0B0B0B"/>
-                </a:solidFill>
-                <a:latin typeface="Calibri"/>
-              </a:rPr>
-              <a:t>k is the effective-length factor: how far the beam twists and bends sideways between whatever restrains it.</a:t>
-            </a:r>
-          </a:p>
-          <a:p>
-            <a:pPr algn="ctr">
-              <a:spcAft>
-                <a:spcPts val="1000"/>
-              </a:spcAft>
-            </a:pPr>
-            <a:r>
-              <a:rPr sz="1900" b="0">
-                <a:solidFill>
-                  <a:srgbClr val="0B0B0B"/>
-                </a:solidFill>
-                <a:latin typeface="Calibri"/>
-              </a:rPr>
-              <a:t>Set by the fixture — how the ends grip, whether they warp, where load lands — not by the beam.</a:t>
-            </a:r>
-          </a:p>
-          <a:p>
-            <a:pPr algn="ctr">
-              <a:spcAft>
-                <a:spcPts val="1000"/>
-              </a:spcAft>
-            </a:pPr>
-            <a:r>
-              <a:rPr sz="1900" b="0">
-                <a:solidFill>
-                  <a:srgbClr val="0B0B0B"/>
-                </a:solidFill>
-                <a:latin typeface="Calibri"/>
-              </a:rPr>
-              <a:t>Textbook k = 1 is a simply-supported fork end free to warp; stiffer restraint drops k below 1.</a:t>
-            </a:r>
-          </a:p>
-          <a:p>
-            <a:pPr algn="ctr">
-              <a:spcAft>
-                <a:spcPts val="1000"/>
-              </a:spcAft>
-            </a:pPr>
-            <a:r>
-              <a:rPr sz="1900" b="0">
-                <a:solidFill>
-                  <a:srgbClr val="0B0B0B"/>
-                </a:solidFill>
-                <a:latin typeface="Calibri"/>
-              </a:rPr>
-              <a:t>Handbook starting value k = 0.33. Calibration on the class subset gives k = 0.377, which sets the equation design.</a:t>
-            </a:r>
-          </a:p>
-          <a:p>
-            <a:pPr algn="ctr">
-              <a:spcAft>
-                <a:spcPts val="1000"/>
-              </a:spcAft>
-            </a:pPr>
-            <a:r>
-              <a:rPr sz="1900" b="0">
-                <a:solidFill>
-                  <a:srgbClr val="0B0B0B"/>
-                </a:solidFill>
-                <a:latin typeface="Calibri"/>
-              </a:rPr>
-              <a:t>Since M_cr ~ 1/k^2, a small change swings LTB hard — and the calibrated equation optimum sits on a bend-LTB knife edge (capacities within ~1%). k does not transfer between fixtures: confirm it on ours before betting on that optimum.</a:t>
+            <a:pPr algn="l">
+              <a:spcAft>
+                <a:spcPts val="1200"/>
+              </a:spcAft>
+            </a:pPr>
+            <a:r>
+              <a:rPr sz="1800" b="0">
+                <a:solidFill>
+                  <a:srgbClr val="0B0B0B"/>
+                </a:solidFill>
+                <a:latin typeface="Calibri"/>
+              </a:rPr>
+              <a:t>The formula is exact for an idealized beam, and ours differs from it in four ways.</a:t>
+            </a:r>
+          </a:p>
+          <a:p>
+            <a:pPr algn="l" lvl="1">
+              <a:spcAft>
+                <a:spcPts val="1200"/>
+              </a:spcAft>
+            </a:pPr>
+            <a:r>
+              <a:rPr sz="1600" b="0">
+                <a:solidFill>
+                  <a:srgbClr val="0B0B0B"/>
+                </a:solidFill>
+                <a:latin typeface="Calibri"/>
+              </a:rPr>
+              <a:t>•  Thin-walled open section: J and C_w use thin-rectangle theory. Webs up to 7 mm against a 10 mm flange stretch 'thin'; J drifts.</a:t>
+            </a:r>
+          </a:p>
+          <a:p>
+            <a:pPr algn="l" lvl="1">
+              <a:spcAft>
+                <a:spcPts val="1200"/>
+              </a:spcAft>
+            </a:pPr>
+            <a:r>
+              <a:rPr sz="1600" b="0">
+                <a:solidFill>
+                  <a:srgbClr val="0B0B0B"/>
+                </a:solidFill>
+                <a:latin typeface="Calibri"/>
+              </a:rPr>
+              <a:t>•  Timoshenko elastic stability: M_cr assumes linear-elastic, perfectly straight, no residual stress. A print has all three imperfections.</a:t>
+            </a:r>
+          </a:p>
+          <a:p>
+            <a:pPr algn="l" lvl="1">
+              <a:spcAft>
+                <a:spcPts val="1200"/>
+              </a:spcAft>
+            </a:pPr>
+            <a:r>
+              <a:rPr sz="1600" b="0">
+                <a:solidFill>
+                  <a:srgbClr val="0B0B0B"/>
+                </a:solidFill>
+                <a:latin typeface="Calibri"/>
+              </a:rPr>
+              <a:t>•  Warping torsion: the C_w term assumes ends free to warp. The real fixture restrains them — which is what k absorbs.</a:t>
+            </a:r>
+          </a:p>
+          <a:p>
+            <a:pPr algn="l" lvl="1">
+              <a:spcAft>
+                <a:spcPts val="1200"/>
+              </a:spcAft>
+            </a:pPr>
+            <a:r>
+              <a:rPr sz="1600" b="0">
+                <a:solidFill>
+                  <a:srgbClr val="0B0B0B"/>
+                </a:solidFill>
+                <a:latin typeface="Calibri"/>
+              </a:rPr>
+              <a:t>•  Elastic, isotropic material: E = 2.5 GPa, G = E/2.6 (nu = 0.3). Printed PLA is layered and anisotropic.</a:t>
+            </a:r>
+          </a:p>
+          <a:p>
+            <a:pPr algn="l">
+              <a:spcAft>
+                <a:spcPts val="1200"/>
+              </a:spcAft>
+            </a:pPr>
+            <a:r>
+              <a:rPr sz="1800" b="0">
+                <a:solidFill>
+                  <a:srgbClr val="0B0B0B"/>
+                </a:solidFill>
+                <a:latin typeface="Calibri"/>
+              </a:rPr>
+              <a:t>Each gap widens the error bar you should carry on the LTB capacity.</a:t>
             </a:r>
           </a:p>
         </p:txBody>
@@ -5384,7 +5294,7 @@
 </file>
 
 <file path=ppt/slides/slide19.xml><?xml version="1.0" encoding="utf-8"?>
-<p:sld xmlns:a="http://schemas.openxmlformats.org/drawingml/2006/main" xmlns:r="http://schemas.openxmlformats.org/officeDocument/2006/relationships" xmlns:p="http://schemas.openxmlformats.org/presentationml/2006/main">
+<p:sld xmlns:a="http://schemas.openxmlformats.org/drawingml/2006/main" xmlns:p="http://schemas.openxmlformats.org/presentationml/2006/main" xmlns:r="http://schemas.openxmlformats.org/officeDocument/2006/relationships">
   <p:cSld>
     <p:bg>
       <p:bgPr>
@@ -5400,14 +5310,7 @@
         <p:cNvGrpSpPr/>
         <p:nvPr/>
       </p:nvGrpSpPr>
-      <p:grpSpPr>
-        <a:xfrm>
-          <a:off x="0" y="0"/>
-          <a:ext cx="0" cy="0"/>
-          <a:chOff x="0" y="0"/>
-          <a:chExt cx="0" cy="0"/>
-        </a:xfrm>
-      </p:grpSpPr>
+      <p:grpSpPr/>
       <p:sp>
         <p:nvSpPr>
           <p:cNvPr id="2" name="TextBox 1"/>
@@ -5442,7 +5345,7 @@
                 </a:solidFill>
                 <a:latin typeface="Calibri"/>
               </a:rPr>
-              <a:t>LTB: what you must own, and what is background</a:t>
+              <a:t>The one number that rules LTB: k</a:t>
             </a:r>
           </a:p>
         </p:txBody>
@@ -5488,20 +5391,43 @@
           <a:lstStyle/>
           <a:p>
             <a:pPr algn="ctr"/>
-            <a:endParaRPr/>
-          </a:p>
-        </p:txBody>
-      </p:sp>
-      <p:sp>
-        <p:nvSpPr>
-          <p:cNvPr id="4" name="TextBox 3"/>
+          </a:p>
+        </p:txBody>
+      </p:sp>
+      <p:pic>
+        <p:nvPicPr>
+          <p:cNvPr id="4" name="Picture 3" descr="k_scale.png"/>
+          <p:cNvPicPr>
+            <a:picLocks noChangeAspect="1"/>
+          </p:cNvPicPr>
+          <p:nvPr/>
+        </p:nvPicPr>
+        <p:blipFill>
+          <a:blip r:embed="rId2"/>
+          <a:stretch>
+            <a:fillRect/>
+          </a:stretch>
+        </p:blipFill>
+        <p:spPr>
+          <a:xfrm>
+            <a:off x="1880423" y="2011680"/>
+            <a:ext cx="8430847" cy="1554480"/>
+          </a:xfrm>
+          <a:prstGeom prst="rect">
+            <a:avLst/>
+          </a:prstGeom>
+        </p:spPr>
+      </p:pic>
+      <p:sp>
+        <p:nvSpPr>
+          <p:cNvPr id="5" name="TextBox 4"/>
           <p:cNvSpPr txBox="1"/>
           <p:nvPr/>
         </p:nvSpPr>
         <p:spPr>
           <a:xfrm>
-            <a:off x="868680" y="1554480"/>
-            <a:ext cx="10424160" cy="4754880"/>
+            <a:off x="1097280" y="4023360"/>
+            <a:ext cx="10058400" cy="1828800"/>
           </a:xfrm>
           <a:prstGeom prst="rect">
             <a:avLst/>
@@ -5514,9 +5440,9 @@
           </a:bodyPr>
           <a:lstStyle/>
           <a:p>
-            <a:pPr algn="l">
-              <a:spcAft>
-                <a:spcPts val="1200"/>
+            <a:pPr algn="ctr">
+              <a:spcAft>
+                <a:spcPts val="1000"/>
               </a:spcAft>
             </a:pPr>
             <a:r>
@@ -5526,61 +5452,13 @@
                 </a:solidFill>
                 <a:latin typeface="Calibri"/>
               </a:rPr>
-              <a:t>You just saw Iy, J, Cw, warping, load height, and effective length. Here is exactly what you are responsible for:</a:t>
-            </a:r>
-          </a:p>
-          <a:p>
-            <a:pPr lvl="1" algn="l">
-              <a:spcAft>
-                <a:spcPts val="1200"/>
-              </a:spcAft>
-            </a:pPr>
-            <a:r>
-              <a:rPr sz="1700" b="0">
-                <a:solidFill>
-                  <a:srgbClr val="0B0B0B"/>
-                </a:solidFill>
-                <a:latin typeface="Calibri"/>
-              </a:rPr>
-              <a:t>•  Yours: what LTB is (a tall thin web tipping sideways before the material yields), when it competes (thin b, large H_web), what k means physically, and why a calibrated k does not transfer between fixtures.</a:t>
-            </a:r>
-          </a:p>
-          <a:p>
-            <a:pPr lvl="1" algn="l">
-              <a:spcAft>
-                <a:spcPts val="1200"/>
-              </a:spcAft>
-            </a:pPr>
-            <a:r>
-              <a:rPr sz="1700" b="0">
-                <a:solidFill>
-                  <a:srgbClr val="0B0B0B"/>
-                </a:solidFill>
-                <a:latin typeface="Calibri"/>
-              </a:rPr>
-              <a:t>•  Yours: reading the capacity plot — which branch governs where, and how much margin the runner-up has.</a:t>
-            </a:r>
-          </a:p>
-          <a:p>
-            <a:pPr lvl="1" algn="l">
-              <a:spcAft>
-                <a:spcPts val="1200"/>
-              </a:spcAft>
-            </a:pPr>
-            <a:r>
-              <a:rPr sz="1700" b="0">
-                <a:solidFill>
-                  <a:srgbClr val="0B0B0B"/>
-                </a:solidFill>
-                <a:latin typeface="Calibri"/>
-              </a:rPr>
-              <a:t>•  Background: deriving Iy, J, Cw, or the Mcr formula. The code is supplied; you will never derive or re-implement it in this module.</a:t>
-            </a:r>
-          </a:p>
-          <a:p>
-            <a:pPr algn="l">
-              <a:spcAft>
-                <a:spcPts val="1200"/>
+              <a:t>k is the effective-length factor: how far the beam twists and bends sideways between whatever restrains it.</a:t>
+            </a:r>
+          </a:p>
+          <a:p>
+            <a:pPr algn="ctr">
+              <a:spcAft>
+                <a:spcPts val="1000"/>
               </a:spcAft>
             </a:pPr>
             <a:r>
@@ -5590,7 +5468,55 @@
                 </a:solidFill>
                 <a:latin typeface="Calibri"/>
               </a:rPr>
-              <a:t>The test of understanding is not the derivation. It is: what happens to the LTB branch if the fixture braces the compression flange, and would you still trust the equation optimum?</a:t>
+              <a:t>Set by the fixture — how the ends grip, whether they warp, where load lands — not by the beam.</a:t>
+            </a:r>
+          </a:p>
+          <a:p>
+            <a:pPr algn="ctr">
+              <a:spcAft>
+                <a:spcPts val="1000"/>
+              </a:spcAft>
+            </a:pPr>
+            <a:r>
+              <a:rPr sz="1900" b="0">
+                <a:solidFill>
+                  <a:srgbClr val="0B0B0B"/>
+                </a:solidFill>
+                <a:latin typeface="Calibri"/>
+              </a:rPr>
+              <a:t>Textbook k = 1 is a simply-supported fork end free to warp; stiffer restraint drops k below 1.</a:t>
+            </a:r>
+          </a:p>
+          <a:p>
+            <a:pPr algn="ctr">
+              <a:spcAft>
+                <a:spcPts val="1000"/>
+              </a:spcAft>
+            </a:pPr>
+            <a:r>
+              <a:rPr sz="1900" b="0">
+                <a:solidFill>
+                  <a:srgbClr val="0B0B0B"/>
+                </a:solidFill>
+                <a:latin typeface="Calibri"/>
+              </a:rPr>
+              <a:t>Handbook starting value k = 0.33. Calibration on the class subset gives k = 0.377, which sets the equation design.</a:t>
+            </a:r>
+          </a:p>
+          <a:p>
+            <a:pPr algn="ctr">
+              <a:spcAft>
+                <a:spcPts val="1000"/>
+              </a:spcAft>
+            </a:pPr>
+            <a:r>
+              <a:rPr sz="1900" b="0">
+                <a:solidFill>
+                  <a:srgbClr val="0B0B0B"/>
+                </a:solidFill>
+                <a:latin typeface="Calibri"/>
+              </a:rPr>
+              <a:t>Since M_cr ~ 1/k^2, a small change swings LTB hard — and the calibrated equation optimum sits on a bend-LTB knife edge (capacities within ~1%). k does not transfer between fixtures: confirm it on ours before betting on that optimum.</a:t>
             </a:r>
           </a:p>
         </p:txBody>
@@ -5604,7 +5530,7 @@
 </file>
 
 <file path=ppt/slides/slide2.xml><?xml version="1.0" encoding="utf-8"?>
-<p:sld xmlns:a="http://schemas.openxmlformats.org/drawingml/2006/main" xmlns:r="http://schemas.openxmlformats.org/officeDocument/2006/relationships" xmlns:p="http://schemas.openxmlformats.org/presentationml/2006/main">
+<p:sld xmlns:a="http://schemas.openxmlformats.org/drawingml/2006/main" xmlns:p="http://schemas.openxmlformats.org/presentationml/2006/main" xmlns:r="http://schemas.openxmlformats.org/officeDocument/2006/relationships">
   <p:cSld>
     <p:bg>
       <p:bgPr>
@@ -5620,14 +5546,7 @@
         <p:cNvGrpSpPr/>
         <p:nvPr/>
       </p:nvGrpSpPr>
-      <p:grpSpPr>
-        <a:xfrm>
-          <a:off x="0" y="0"/>
-          <a:ext cx="0" cy="0"/>
-          <a:chOff x="0" y="0"/>
-          <a:chExt cx="0" cy="0"/>
-        </a:xfrm>
-      </p:grpSpPr>
+      <p:grpSpPr/>
       <p:sp>
         <p:nvSpPr>
           <p:cNvPr id="2" name="TextBox 1"/>
@@ -5708,7 +5627,6 @@
           <a:lstStyle/>
           <a:p>
             <a:pPr algn="ctr"/>
-            <a:endParaRPr/>
           </a:p>
         </p:txBody>
       </p:sp>
@@ -5734,7 +5652,7 @@
           </a:bodyPr>
           <a:lstStyle/>
           <a:p>
-            <a:pPr lvl="1" algn="l">
+            <a:pPr algn="l" lvl="1">
               <a:spcAft>
                 <a:spcPts val="1200"/>
               </a:spcAft>
@@ -5750,7 +5668,7 @@
             </a:r>
           </a:p>
           <a:p>
-            <a:pPr lvl="1" algn="l">
+            <a:pPr algn="l" lvl="1">
               <a:spcAft>
                 <a:spcPts val="1200"/>
               </a:spcAft>
@@ -5766,7 +5684,7 @@
             </a:r>
           </a:p>
           <a:p>
-            <a:pPr lvl="1" algn="l">
+            <a:pPr algn="l" lvl="1">
               <a:spcAft>
                 <a:spcPts val="1200"/>
               </a:spcAft>
@@ -5782,7 +5700,7 @@
             </a:r>
           </a:p>
           <a:p>
-            <a:pPr lvl="1" algn="l">
+            <a:pPr algn="l" lvl="1">
               <a:spcAft>
                 <a:spcPts val="1200"/>
               </a:spcAft>
@@ -5808,7 +5726,7 @@
 </file>
 
 <file path=ppt/slides/slide20.xml><?xml version="1.0" encoding="utf-8"?>
-<p:sld xmlns:a="http://schemas.openxmlformats.org/drawingml/2006/main" xmlns:r="http://schemas.openxmlformats.org/officeDocument/2006/relationships" xmlns:p="http://schemas.openxmlformats.org/presentationml/2006/main">
+<p:sld xmlns:a="http://schemas.openxmlformats.org/drawingml/2006/main" xmlns:p="http://schemas.openxmlformats.org/presentationml/2006/main" xmlns:r="http://schemas.openxmlformats.org/officeDocument/2006/relationships">
   <p:cSld>
     <p:bg>
       <p:bgPr>
@@ -5824,14 +5742,7 @@
         <p:cNvGrpSpPr/>
         <p:nvPr/>
       </p:nvGrpSpPr>
-      <p:grpSpPr>
-        <a:xfrm>
-          <a:off x="0" y="0"/>
-          <a:ext cx="0" cy="0"/>
-          <a:chOff x="0" y="0"/>
-          <a:chExt cx="0" cy="0"/>
-        </a:xfrm>
-      </p:grpSpPr>
+      <p:grpSpPr/>
       <p:sp>
         <p:nvSpPr>
           <p:cNvPr id="2" name="TextBox 1"/>
@@ -5866,7 +5777,7 @@
                 </a:solidFill>
                 <a:latin typeface="Calibri"/>
               </a:rPr>
-              <a:t>Which mode drives?</a:t>
+              <a:t>LTB: what you must own, and what is background</a:t>
             </a:r>
           </a:p>
         </p:txBody>
@@ -5912,44 +5823,19 @@
           <a:lstStyle/>
           <a:p>
             <a:pPr algn="ctr"/>
-            <a:endParaRPr/>
-          </a:p>
-        </p:txBody>
-      </p:sp>
-      <p:pic>
-        <p:nvPicPr>
-          <p:cNvPr id="4" name="Picture 3" descr="fig_failure_mode_map.png"/>
-          <p:cNvPicPr>
-            <a:picLocks noChangeAspect="1"/>
-          </p:cNvPicPr>
-          <p:nvPr/>
-        </p:nvPicPr>
-        <p:blipFill>
-          <a:blip r:embed="rId2"/>
-          <a:stretch>
-            <a:fillRect/>
-          </a:stretch>
-        </p:blipFill>
-        <p:spPr>
-          <a:xfrm>
-            <a:off x="3088878" y="1371600"/>
-            <a:ext cx="6013938" cy="4343400"/>
-          </a:xfrm>
-          <a:prstGeom prst="rect">
-            <a:avLst/>
-          </a:prstGeom>
-        </p:spPr>
-      </p:pic>
-      <p:sp>
-        <p:nvSpPr>
-          <p:cNvPr id="5" name="TextBox 4"/>
+          </a:p>
+        </p:txBody>
+      </p:sp>
+      <p:sp>
+        <p:nvSpPr>
+          <p:cNvPr id="4" name="TextBox 3"/>
           <p:cNvSpPr txBox="1"/>
           <p:nvPr/>
         </p:nvSpPr>
         <p:spPr>
           <a:xfrm>
-            <a:off x="822960" y="5788152"/>
-            <a:ext cx="10607040" cy="548640"/>
+            <a:off x="868680" y="1554480"/>
+            <a:ext cx="10424160" cy="4754880"/>
           </a:xfrm>
           <a:prstGeom prst="rect">
             <a:avLst/>
@@ -5962,19 +5848,83 @@
           </a:bodyPr>
           <a:lstStyle/>
           <a:p>
-            <a:pPr algn="ctr">
-              <a:spcAft>
-                <a:spcPts val="600"/>
-              </a:spcAft>
-            </a:pPr>
-            <a:r>
-              <a:rPr sz="1500" b="0">
-                <a:solidFill>
-                  <a:srgbClr val="0B0B0B"/>
-                </a:solidFill>
-                <a:latin typeface="Calibri"/>
-              </a:rPr>
-              <a:t>Tall thin webs tip (LTB). Short thin webs are separation-limited: junction shear flow beats the layer-line bond. The middle bends.</a:t>
+            <a:pPr algn="l">
+              <a:spcAft>
+                <a:spcPts val="1200"/>
+              </a:spcAft>
+            </a:pPr>
+            <a:r>
+              <a:rPr sz="1900" b="0">
+                <a:solidFill>
+                  <a:srgbClr val="0B0B0B"/>
+                </a:solidFill>
+                <a:latin typeface="Calibri"/>
+              </a:rPr>
+              <a:t>You just saw Iy, J, Cw, warping, load height, and effective length. You are responsible for this much of it:</a:t>
+            </a:r>
+          </a:p>
+          <a:p>
+            <a:pPr algn="l" lvl="1">
+              <a:spcAft>
+                <a:spcPts val="1200"/>
+              </a:spcAft>
+            </a:pPr>
+            <a:r>
+              <a:rPr sz="1700" b="0">
+                <a:solidFill>
+                  <a:srgbClr val="0B0B0B"/>
+                </a:solidFill>
+                <a:latin typeface="Calibri"/>
+              </a:rPr>
+              <a:t>•  Yours: what LTB is (a tall thin web tipping sideways before the material yields), when it competes (thin b, large H_web), what k means physically, and why a calibrated k does not transfer between fixtures.</a:t>
+            </a:r>
+          </a:p>
+          <a:p>
+            <a:pPr algn="l" lvl="1">
+              <a:spcAft>
+                <a:spcPts val="1200"/>
+              </a:spcAft>
+            </a:pPr>
+            <a:r>
+              <a:rPr sz="1700" b="0">
+                <a:solidFill>
+                  <a:srgbClr val="0B0B0B"/>
+                </a:solidFill>
+                <a:latin typeface="Calibri"/>
+              </a:rPr>
+              <a:t>•  Yours: reading the capacity plot — which branch governs where, and how much margin the runner-up has.</a:t>
+            </a:r>
+          </a:p>
+          <a:p>
+            <a:pPr algn="l" lvl="1">
+              <a:spcAft>
+                <a:spcPts val="1200"/>
+              </a:spcAft>
+            </a:pPr>
+            <a:r>
+              <a:rPr sz="1700" b="0">
+                <a:solidFill>
+                  <a:srgbClr val="0B0B0B"/>
+                </a:solidFill>
+                <a:latin typeface="Calibri"/>
+              </a:rPr>
+              <a:t>•  Background: deriving Iy, J, Cw, or the Mcr formula. The code is supplied; you will never derive or re-implement it in this module.</a:t>
+            </a:r>
+          </a:p>
+          <a:p>
+            <a:pPr algn="l">
+              <a:spcAft>
+                <a:spcPts val="1200"/>
+              </a:spcAft>
+            </a:pPr>
+            <a:r>
+              <a:rPr sz="1900" b="0">
+                <a:solidFill>
+                  <a:srgbClr val="0B0B0B"/>
+                </a:solidFill>
+                <a:latin typeface="Calibri"/>
+              </a:rPr>
+              <a:t>The test of understanding: what happens to the LTB branch if the fixture braces the compression flange, and would you still trust the equation optimum?</a:t>
             </a:r>
           </a:p>
         </p:txBody>
@@ -5988,7 +5938,7 @@
 </file>
 
 <file path=ppt/slides/slide21.xml><?xml version="1.0" encoding="utf-8"?>
-<p:sld xmlns:a="http://schemas.openxmlformats.org/drawingml/2006/main" xmlns:r="http://schemas.openxmlformats.org/officeDocument/2006/relationships" xmlns:p="http://schemas.openxmlformats.org/presentationml/2006/main">
+<p:sld xmlns:a="http://schemas.openxmlformats.org/drawingml/2006/main" xmlns:p="http://schemas.openxmlformats.org/presentationml/2006/main" xmlns:r="http://schemas.openxmlformats.org/officeDocument/2006/relationships">
   <p:cSld>
     <p:bg>
       <p:bgPr>
@@ -6004,14 +5954,7 @@
         <p:cNvGrpSpPr/>
         <p:nvPr/>
       </p:nvGrpSpPr>
-      <p:grpSpPr>
-        <a:xfrm>
-          <a:off x="0" y="0"/>
-          <a:ext cx="0" cy="0"/>
-          <a:chOff x="0" y="0"/>
-          <a:chExt cx="0" cy="0"/>
-        </a:xfrm>
-      </p:grpSpPr>
+      <p:grpSpPr/>
       <p:sp>
         <p:nvSpPr>
           <p:cNvPr id="2" name="TextBox 1"/>
@@ -6046,7 +5989,7 @@
                 </a:solidFill>
                 <a:latin typeface="Calibri"/>
               </a:rPr>
-              <a:t>Does the theory match the data?</a:t>
+              <a:t>Which mode drives?</a:t>
             </a:r>
           </a:p>
         </p:txBody>
@@ -6092,20 +6035,43 @@
           <a:lstStyle/>
           <a:p>
             <a:pPr algn="ctr"/>
-            <a:endParaRPr/>
-          </a:p>
-        </p:txBody>
-      </p:sp>
-      <p:sp>
-        <p:nvSpPr>
-          <p:cNvPr id="4" name="TextBox 3"/>
+          </a:p>
+        </p:txBody>
+      </p:sp>
+      <p:pic>
+        <p:nvPicPr>
+          <p:cNvPr id="4" name="Picture 3" descr="fig_failure_mode_map.png"/>
+          <p:cNvPicPr>
+            <a:picLocks noChangeAspect="1"/>
+          </p:cNvPicPr>
+          <p:nvPr/>
+        </p:nvPicPr>
+        <p:blipFill>
+          <a:blip r:embed="rId2"/>
+          <a:stretch>
+            <a:fillRect/>
+          </a:stretch>
+        </p:blipFill>
+        <p:spPr>
+          <a:xfrm>
+            <a:off x="3088878" y="1371600"/>
+            <a:ext cx="6013938" cy="4343400"/>
+          </a:xfrm>
+          <a:prstGeom prst="rect">
+            <a:avLst/>
+          </a:prstGeom>
+        </p:spPr>
+      </p:pic>
+      <p:sp>
+        <p:nvSpPr>
+          <p:cNvPr id="5" name="TextBox 4"/>
           <p:cNvSpPr txBox="1"/>
           <p:nvPr/>
         </p:nvSpPr>
         <p:spPr>
           <a:xfrm>
-            <a:off x="868680" y="1554480"/>
-            <a:ext cx="10424160" cy="4754880"/>
+            <a:off x="822960" y="5788152"/>
+            <a:ext cx="10607040" cy="548640"/>
           </a:xfrm>
           <a:prstGeom prst="rect">
             <a:avLst/>
@@ -6118,83 +6084,19 @@
           </a:bodyPr>
           <a:lstStyle/>
           <a:p>
-            <a:pPr algn="l">
-              <a:spcAft>
-                <a:spcPts val="1200"/>
-              </a:spcAft>
-            </a:pPr>
-            <a:r>
-              <a:rPr sz="2000" b="0">
-                <a:solidFill>
-                  <a:srgbClr val="0B0B0B"/>
-                </a:solidFill>
-                <a:latin typeface="Calibri"/>
-              </a:rPr>
-              <a:t>Pre-lab 1 answers this with your beam dataset: compute each beam's predicted capacity and mode, then plot predictions against measurements.</a:t>
-            </a:r>
-          </a:p>
-          <a:p>
-            <a:pPr algn="l">
-              <a:spcAft>
-                <a:spcPts val="1200"/>
-              </a:spcAft>
-            </a:pPr>
-            <a:r>
-              <a:rPr sz="2000" b="0">
-                <a:solidFill>
-                  <a:srgbClr val="0B0B0B"/>
-                </a:solidFill>
-                <a:latin typeface="Calibri"/>
-              </a:rPr>
-              <a:t>Watch for two things:</a:t>
-            </a:r>
-          </a:p>
-          <a:p>
-            <a:pPr lvl="1" algn="l">
-              <a:spcAft>
-                <a:spcPts val="1200"/>
-              </a:spcAft>
-            </a:pPr>
-            <a:r>
-              <a:rPr sz="1800" b="0">
-                <a:solidFill>
-                  <a:srgbClr val="0B0B0B"/>
-                </a:solidFill>
-                <a:latin typeface="Calibri"/>
-              </a:rPr>
-              <a:t>•  Points below the line: beams that broke before the equations said they would.</a:t>
-            </a:r>
-          </a:p>
-          <a:p>
-            <a:pPr lvl="1" algn="l">
-              <a:spcAft>
-                <a:spcPts val="1200"/>
-              </a:spcAft>
-            </a:pPr>
-            <a:r>
-              <a:rPr sz="1800" b="0">
-                <a:solidFill>
-                  <a:srgbClr val="0B0B0B"/>
-                </a:solidFill>
-                <a:latin typeface="Calibri"/>
-              </a:rPr>
-              <a:t>•  Beams whose recorded failure looks nothing like the predicted mode.</a:t>
-            </a:r>
-          </a:p>
-          <a:p>
-            <a:pPr algn="l">
-              <a:spcAft>
-                <a:spcPts val="1200"/>
-              </a:spcAft>
-            </a:pPr>
-            <a:r>
-              <a:rPr sz="2000" b="0">
-                <a:solidFill>
-                  <a:srgbClr val="0B0B0B"/>
-                </a:solidFill>
-                <a:latin typeface="Calibri"/>
-              </a:rPr>
-              <a:t>[Placeholder: parity plot from the 44-beam dataset once strength_N lands.]</a:t>
+            <a:pPr algn="ctr">
+              <a:spcAft>
+                <a:spcPts val="600"/>
+              </a:spcAft>
+            </a:pPr>
+            <a:r>
+              <a:rPr sz="1500" b="0">
+                <a:solidFill>
+                  <a:srgbClr val="0B0B0B"/>
+                </a:solidFill>
+                <a:latin typeface="Calibri"/>
+              </a:rPr>
+              <a:t>Tall thin webs tip (LTB). Short thin webs are separation-limited: junction shear flow beats the layer-line bond. The middle bends.</a:t>
             </a:r>
           </a:p>
         </p:txBody>
@@ -6208,7 +6110,7 @@
 </file>
 
 <file path=ppt/slides/slide22.xml><?xml version="1.0" encoding="utf-8"?>
-<p:sld xmlns:a="http://schemas.openxmlformats.org/drawingml/2006/main" xmlns:r="http://schemas.openxmlformats.org/officeDocument/2006/relationships" xmlns:p="http://schemas.openxmlformats.org/presentationml/2006/main">
+<p:sld xmlns:a="http://schemas.openxmlformats.org/drawingml/2006/main" xmlns:p="http://schemas.openxmlformats.org/presentationml/2006/main" xmlns:r="http://schemas.openxmlformats.org/officeDocument/2006/relationships">
   <p:cSld>
     <p:bg>
       <p:bgPr>
@@ -6224,14 +6126,7 @@
         <p:cNvGrpSpPr/>
         <p:nvPr/>
       </p:nvGrpSpPr>
-      <p:grpSpPr>
-        <a:xfrm>
-          <a:off x="0" y="0"/>
-          <a:ext cx="0" cy="0"/>
-          <a:chOff x="0" y="0"/>
-          <a:chExt cx="0" cy="0"/>
-        </a:xfrm>
-      </p:grpSpPr>
+      <p:grpSpPr/>
       <p:sp>
         <p:nvSpPr>
           <p:cNvPr id="2" name="TextBox 1"/>
@@ -6266,7 +6161,7 @@
                 </a:solidFill>
                 <a:latin typeface="Calibri"/>
               </a:rPr>
-              <a:t>One assumption, two different beams</a:t>
+              <a:t>Does the theory match the data?</a:t>
             </a:r>
           </a:p>
         </p:txBody>
@@ -6312,44 +6207,19 @@
           <a:lstStyle/>
           <a:p>
             <a:pPr algn="ctr"/>
-            <a:endParaRPr/>
-          </a:p>
-        </p:txBody>
-      </p:sp>
-      <p:pic>
-        <p:nvPicPr>
-          <p:cNvPr id="4" name="Picture 3" descr="fig_two_optima.png"/>
-          <p:cNvPicPr>
-            <a:picLocks noChangeAspect="1"/>
-          </p:cNvPicPr>
-          <p:nvPr/>
-        </p:nvPicPr>
-        <p:blipFill>
-          <a:blip r:embed="rId2"/>
-          <a:stretch>
-            <a:fillRect/>
-          </a:stretch>
-        </p:blipFill>
-        <p:spPr>
-          <a:xfrm>
-            <a:off x="792327" y="1371600"/>
-            <a:ext cx="10607040" cy="4242816"/>
-          </a:xfrm>
-          <a:prstGeom prst="rect">
-            <a:avLst/>
-          </a:prstGeom>
-        </p:spPr>
-      </p:pic>
-      <p:sp>
-        <p:nvSpPr>
-          <p:cNvPr id="5" name="TextBox 4"/>
+          </a:p>
+        </p:txBody>
+      </p:sp>
+      <p:sp>
+        <p:nvSpPr>
+          <p:cNvPr id="4" name="TextBox 3"/>
           <p:cNvSpPr txBox="1"/>
           <p:nvPr/>
         </p:nvSpPr>
         <p:spPr>
           <a:xfrm>
-            <a:off x="822960" y="5687568"/>
-            <a:ext cx="10607040" cy="548640"/>
+            <a:off x="868680" y="1554480"/>
+            <a:ext cx="10424160" cy="4754880"/>
           </a:xfrm>
           <a:prstGeom prst="rect">
             <a:avLst/>
@@ -6362,19 +6232,83 @@
           </a:bodyPr>
           <a:lstStyle/>
           <a:p>
-            <a:pPr algn="ctr">
-              <a:spcAft>
-                <a:spcPts val="600"/>
-              </a:spcAft>
-            </a:pPr>
-            <a:r>
-              <a:rPr sz="1500" b="0">
-                <a:solidFill>
-                  <a:srgbClr val="0B0B0B"/>
-                </a:solidFill>
-                <a:latin typeface="Calibri"/>
-              </a:rPr>
-              <a:t>Illustration: handbook starting values versus the class calibration (66.8 MPa, k = 0.377, tau_i = 16.8 MPa), which moves the equation optimum to (1.10, 13.25).</a:t>
+            <a:pPr algn="l">
+              <a:spcAft>
+                <a:spcPts val="1200"/>
+              </a:spcAft>
+            </a:pPr>
+            <a:r>
+              <a:rPr sz="2000" b="0">
+                <a:solidFill>
+                  <a:srgbClr val="0B0B0B"/>
+                </a:solidFill>
+                <a:latin typeface="Calibri"/>
+              </a:rPr>
+              <a:t>Pre-lab 1 answers this with your beam dataset: compute each beam's predicted capacity and mode, then plot predictions against measurements.</a:t>
+            </a:r>
+          </a:p>
+          <a:p>
+            <a:pPr algn="l">
+              <a:spcAft>
+                <a:spcPts val="1200"/>
+              </a:spcAft>
+            </a:pPr>
+            <a:r>
+              <a:rPr sz="2000" b="0">
+                <a:solidFill>
+                  <a:srgbClr val="0B0B0B"/>
+                </a:solidFill>
+                <a:latin typeface="Calibri"/>
+              </a:rPr>
+              <a:t>Watch for two things:</a:t>
+            </a:r>
+          </a:p>
+          <a:p>
+            <a:pPr algn="l" lvl="1">
+              <a:spcAft>
+                <a:spcPts val="1200"/>
+              </a:spcAft>
+            </a:pPr>
+            <a:r>
+              <a:rPr sz="1800" b="0">
+                <a:solidFill>
+                  <a:srgbClr val="0B0B0B"/>
+                </a:solidFill>
+                <a:latin typeface="Calibri"/>
+              </a:rPr>
+              <a:t>•  Points below the line: beams that broke before the equations said they would.</a:t>
+            </a:r>
+          </a:p>
+          <a:p>
+            <a:pPr algn="l" lvl="1">
+              <a:spcAft>
+                <a:spcPts val="1200"/>
+              </a:spcAft>
+            </a:pPr>
+            <a:r>
+              <a:rPr sz="1800" b="0">
+                <a:solidFill>
+                  <a:srgbClr val="0B0B0B"/>
+                </a:solidFill>
+                <a:latin typeface="Calibri"/>
+              </a:rPr>
+              <a:t>•  Beams whose recorded failure looks nothing like the predicted mode.</a:t>
+            </a:r>
+          </a:p>
+          <a:p>
+            <a:pPr algn="l">
+              <a:spcAft>
+                <a:spcPts val="1200"/>
+              </a:spcAft>
+            </a:pPr>
+            <a:r>
+              <a:rPr sz="2000" b="0">
+                <a:solidFill>
+                  <a:srgbClr val="0B0B0B"/>
+                </a:solidFill>
+                <a:latin typeface="Calibri"/>
+              </a:rPr>
+              <a:t>[Placeholder: parity plot from the 44-beam dataset once strength_N lands.]</a:t>
             </a:r>
           </a:p>
         </p:txBody>
@@ -6388,7 +6322,7 @@
 </file>
 
 <file path=ppt/slides/slide23.xml><?xml version="1.0" encoding="utf-8"?>
-<p:sld xmlns:a="http://schemas.openxmlformats.org/drawingml/2006/main" xmlns:r="http://schemas.openxmlformats.org/officeDocument/2006/relationships" xmlns:p="http://schemas.openxmlformats.org/presentationml/2006/main">
+<p:sld xmlns:a="http://schemas.openxmlformats.org/drawingml/2006/main" xmlns:p="http://schemas.openxmlformats.org/presentationml/2006/main" xmlns:r="http://schemas.openxmlformats.org/officeDocument/2006/relationships">
   <p:cSld>
     <p:bg>
       <p:bgPr>
@@ -6404,14 +6338,7 @@
         <p:cNvGrpSpPr/>
         <p:nvPr/>
       </p:nvGrpSpPr>
-      <p:grpSpPr>
-        <a:xfrm>
-          <a:off x="0" y="0"/>
-          <a:ext cx="0" cy="0"/>
-          <a:chOff x="0" y="0"/>
-          <a:chExt cx="0" cy="0"/>
-        </a:xfrm>
-      </p:grpSpPr>
+      <p:grpSpPr/>
       <p:sp>
         <p:nvSpPr>
           <p:cNvPr id="2" name="TextBox 1"/>
@@ -6446,7 +6373,7 @@
                 </a:solidFill>
                 <a:latin typeface="Calibri"/>
               </a:rPr>
-              <a:t>Where this leaves us</a:t>
+              <a:t>One assumption, two different beams</a:t>
             </a:r>
           </a:p>
         </p:txBody>
@@ -6492,20 +6419,43 @@
           <a:lstStyle/>
           <a:p>
             <a:pPr algn="ctr"/>
-            <a:endParaRPr/>
-          </a:p>
-        </p:txBody>
-      </p:sp>
-      <p:sp>
-        <p:nvSpPr>
-          <p:cNvPr id="4" name="TextBox 3"/>
+          </a:p>
+        </p:txBody>
+      </p:sp>
+      <p:pic>
+        <p:nvPicPr>
+          <p:cNvPr id="4" name="Picture 3" descr="fig_two_optima.png"/>
+          <p:cNvPicPr>
+            <a:picLocks noChangeAspect="1"/>
+          </p:cNvPicPr>
+          <p:nvPr/>
+        </p:nvPicPr>
+        <p:blipFill>
+          <a:blip r:embed="rId2"/>
+          <a:stretch>
+            <a:fillRect/>
+          </a:stretch>
+        </p:blipFill>
+        <p:spPr>
+          <a:xfrm>
+            <a:off x="792327" y="1371600"/>
+            <a:ext cx="10607040" cy="4242816"/>
+          </a:xfrm>
+          <a:prstGeom prst="rect">
+            <a:avLst/>
+          </a:prstGeom>
+        </p:spPr>
+      </p:pic>
+      <p:sp>
+        <p:nvSpPr>
+          <p:cNvPr id="5" name="TextBox 4"/>
           <p:cNvSpPr txBox="1"/>
           <p:nvPr/>
         </p:nvSpPr>
         <p:spPr>
           <a:xfrm>
-            <a:off x="868680" y="1554480"/>
-            <a:ext cx="10424160" cy="4754880"/>
+            <a:off x="822960" y="5687568"/>
+            <a:ext cx="10607040" cy="548640"/>
           </a:xfrm>
           <a:prstGeom prst="rect">
             <a:avLst/>
@@ -6518,99 +6468,19 @@
           </a:bodyPr>
           <a:lstStyle/>
           <a:p>
-            <a:pPr algn="l">
-              <a:spcAft>
-                <a:spcPts val="1200"/>
-              </a:spcAft>
-            </a:pPr>
-            <a:r>
-              <a:rPr sz="2000" b="0">
-                <a:solidFill>
-                  <a:srgbClr val="0B0B0B"/>
-                </a:solidFill>
-                <a:latin typeface="Calibri"/>
-              </a:rPr>
-              <a:t>The equations are useful but partial:</a:t>
-            </a:r>
-          </a:p>
-          <a:p>
-            <a:pPr lvl="1" algn="l">
-              <a:spcAft>
-                <a:spcPts val="1200"/>
-              </a:spcAft>
-            </a:pPr>
-            <a:r>
-              <a:rPr sz="1800" b="0">
-                <a:solidFill>
-                  <a:srgbClr val="0B0B0B"/>
-                </a:solidFill>
-                <a:latin typeface="Calibri"/>
-              </a:rPr>
-              <a:t>•  they cannot tell a yield plateau from a one-drop fracture,</a:t>
-            </a:r>
-          </a:p>
-          <a:p>
-            <a:pPr lvl="1" algn="l">
-              <a:spcAft>
-                <a:spcPts val="1200"/>
-              </a:spcAft>
-            </a:pPr>
-            <a:r>
-              <a:rPr sz="1800" b="0">
-                <a:solidFill>
-                  <a:srgbClr val="0B0B0B"/>
-                </a:solidFill>
-                <a:latin typeface="Calibri"/>
-              </a:rPr>
-              <a:t>•  their LTB term rests on fixture assumptions,</a:t>
-            </a:r>
-          </a:p>
-          <a:p>
-            <a:pPr lvl="1" algn="l">
-              <a:spcAft>
-                <a:spcPts val="1200"/>
-              </a:spcAft>
-            </a:pPr>
-            <a:r>
-              <a:rPr sz="1800" b="0">
-                <a:solidFill>
-                  <a:srgbClr val="0B0B0B"/>
-                </a:solidFill>
-                <a:latin typeface="Calibri"/>
-              </a:rPr>
-              <a:t>•  the modes blur,</a:t>
-            </a:r>
-          </a:p>
-          <a:p>
-            <a:pPr lvl="1" algn="l">
-              <a:spcAft>
-                <a:spcPts val="1200"/>
-              </a:spcAft>
-            </a:pPr>
-            <a:r>
-              <a:rPr sz="1800" b="0">
-                <a:solidFill>
-                  <a:srgbClr val="0B0B0B"/>
-                </a:solidFill>
-                <a:latin typeface="Calibri"/>
-              </a:rPr>
-              <a:t>•  and we have only a few expensive tests.</a:t>
-            </a:r>
-          </a:p>
-          <a:p>
-            <a:pPr algn="l">
-              <a:spcAft>
-                <a:spcPts val="1200"/>
-              </a:spcAft>
-            </a:pPr>
-            <a:r>
-              <a:rPr sz="2000" b="0">
-                <a:solidFill>
-                  <a:srgbClr val="0B0B0B"/>
-                </a:solidFill>
-                <a:latin typeface="Calibri"/>
-              </a:rPr>
-              <a:t>A data-driven model that carries its own uncertainty is built for this. Next lecture: Gaussian Processes and Bayesian optimization.</a:t>
+            <a:pPr algn="ctr">
+              <a:spcAft>
+                <a:spcPts val="600"/>
+              </a:spcAft>
+            </a:pPr>
+            <a:r>
+              <a:rPr sz="1500" b="0">
+                <a:solidFill>
+                  <a:srgbClr val="0B0B0B"/>
+                </a:solidFill>
+                <a:latin typeface="Calibri"/>
+              </a:rPr>
+              <a:t>Illustration: handbook starting values versus the class calibration (66.8 MPa, k = 0.377, tau_i = 16.8 MPa), which moves the equation optimum to (1.10, 13.25).</a:t>
             </a:r>
           </a:p>
         </p:txBody>
@@ -6624,7 +6494,7 @@
 </file>
 
 <file path=ppt/slides/slide24.xml><?xml version="1.0" encoding="utf-8"?>
-<p:sld xmlns:a="http://schemas.openxmlformats.org/drawingml/2006/main" xmlns:r="http://schemas.openxmlformats.org/officeDocument/2006/relationships" xmlns:p="http://schemas.openxmlformats.org/presentationml/2006/main">
+<p:sld xmlns:a="http://schemas.openxmlformats.org/drawingml/2006/main" xmlns:p="http://schemas.openxmlformats.org/presentationml/2006/main" xmlns:r="http://schemas.openxmlformats.org/officeDocument/2006/relationships">
   <p:cSld>
     <p:bg>
       <p:bgPr>
@@ -6640,14 +6510,7 @@
         <p:cNvGrpSpPr/>
         <p:nvPr/>
       </p:nvGrpSpPr>
-      <p:grpSpPr>
-        <a:xfrm>
-          <a:off x="0" y="0"/>
-          <a:ext cx="0" cy="0"/>
-          <a:chOff x="0" y="0"/>
-          <a:chExt cx="0" cy="0"/>
-        </a:xfrm>
-      </p:grpSpPr>
+      <p:grpSpPr/>
       <p:sp>
         <p:nvSpPr>
           <p:cNvPr id="2" name="TextBox 1"/>
@@ -6682,7 +6545,7 @@
                 </a:solidFill>
                 <a:latin typeface="Calibri"/>
               </a:rPr>
-              <a:t>The loop this module runs</a:t>
+              <a:t>Where this leaves us</a:t>
             </a:r>
           </a:p>
         </p:txBody>
@@ -6728,44 +6591,19 @@
           <a:lstStyle/>
           <a:p>
             <a:pPr algn="ctr"/>
-            <a:endParaRPr/>
-          </a:p>
-        </p:txBody>
-      </p:sp>
-      <p:pic>
-        <p:nvPicPr>
-          <p:cNvPr id="4" name="Picture 3" descr="fig_workflow_end2end.png"/>
-          <p:cNvPicPr>
-            <a:picLocks noChangeAspect="1"/>
-          </p:cNvPicPr>
-          <p:nvPr/>
-        </p:nvPicPr>
-        <p:blipFill>
-          <a:blip r:embed="rId2"/>
-          <a:stretch>
-            <a:fillRect/>
-          </a:stretch>
-        </p:blipFill>
-        <p:spPr>
-          <a:xfrm>
-            <a:off x="792327" y="1371600"/>
-            <a:ext cx="10607040" cy="3650993"/>
-          </a:xfrm>
-          <a:prstGeom prst="rect">
-            <a:avLst/>
-          </a:prstGeom>
-        </p:spPr>
-      </p:pic>
-      <p:sp>
-        <p:nvSpPr>
-          <p:cNvPr id="5" name="TextBox 4"/>
+          </a:p>
+        </p:txBody>
+      </p:sp>
+      <p:sp>
+        <p:nvSpPr>
+          <p:cNvPr id="4" name="TextBox 3"/>
           <p:cNvSpPr txBox="1"/>
           <p:nvPr/>
         </p:nvSpPr>
         <p:spPr>
           <a:xfrm>
-            <a:off x="822960" y="5095745"/>
-            <a:ext cx="10607040" cy="548640"/>
+            <a:off x="868680" y="1554480"/>
+            <a:ext cx="10424160" cy="4754880"/>
           </a:xfrm>
           <a:prstGeom prst="rect">
             <a:avLst/>
@@ -6778,19 +6616,99 @@
           </a:bodyPr>
           <a:lstStyle/>
           <a:p>
-            <a:pPr algn="ctr">
-              <a:spcAft>
-                <a:spcPts val="600"/>
-              </a:spcAft>
-            </a:pPr>
-            <a:r>
-              <a:rPr sz="1500" b="0">
-                <a:solidFill>
-                  <a:srgbClr val="0B0B0B"/>
-                </a:solidFill>
-                <a:latin typeface="Calibri"/>
-              </a:rPr>
-              <a:t>Physics says what should happen and where failure lives. The data model says what the tests support and where we're still uncertain. Your judgment decides what to build. The test says what we got wrong.</a:t>
+            <a:pPr algn="l">
+              <a:spcAft>
+                <a:spcPts val="1200"/>
+              </a:spcAft>
+            </a:pPr>
+            <a:r>
+              <a:rPr sz="2000" b="0">
+                <a:solidFill>
+                  <a:srgbClr val="0B0B0B"/>
+                </a:solidFill>
+                <a:latin typeface="Calibri"/>
+              </a:rPr>
+              <a:t>The equations are useful but partial:</a:t>
+            </a:r>
+          </a:p>
+          <a:p>
+            <a:pPr algn="l" lvl="1">
+              <a:spcAft>
+                <a:spcPts val="1200"/>
+              </a:spcAft>
+            </a:pPr>
+            <a:r>
+              <a:rPr sz="1800" b="0">
+                <a:solidFill>
+                  <a:srgbClr val="0B0B0B"/>
+                </a:solidFill>
+                <a:latin typeface="Calibri"/>
+              </a:rPr>
+              <a:t>•  they cannot tell a yield plateau from a one-drop fracture,</a:t>
+            </a:r>
+          </a:p>
+          <a:p>
+            <a:pPr algn="l" lvl="1">
+              <a:spcAft>
+                <a:spcPts val="1200"/>
+              </a:spcAft>
+            </a:pPr>
+            <a:r>
+              <a:rPr sz="1800" b="0">
+                <a:solidFill>
+                  <a:srgbClr val="0B0B0B"/>
+                </a:solidFill>
+                <a:latin typeface="Calibri"/>
+              </a:rPr>
+              <a:t>•  their LTB term rests on fixture assumptions,</a:t>
+            </a:r>
+          </a:p>
+          <a:p>
+            <a:pPr algn="l" lvl="1">
+              <a:spcAft>
+                <a:spcPts val="1200"/>
+              </a:spcAft>
+            </a:pPr>
+            <a:r>
+              <a:rPr sz="1800" b="0">
+                <a:solidFill>
+                  <a:srgbClr val="0B0B0B"/>
+                </a:solidFill>
+                <a:latin typeface="Calibri"/>
+              </a:rPr>
+              <a:t>•  the modes blur,</a:t>
+            </a:r>
+          </a:p>
+          <a:p>
+            <a:pPr algn="l" lvl="1">
+              <a:spcAft>
+                <a:spcPts val="1200"/>
+              </a:spcAft>
+            </a:pPr>
+            <a:r>
+              <a:rPr sz="1800" b="0">
+                <a:solidFill>
+                  <a:srgbClr val="0B0B0B"/>
+                </a:solidFill>
+                <a:latin typeface="Calibri"/>
+              </a:rPr>
+              <a:t>•  and we have only a few expensive tests.</a:t>
+            </a:r>
+          </a:p>
+          <a:p>
+            <a:pPr algn="l">
+              <a:spcAft>
+                <a:spcPts val="1200"/>
+              </a:spcAft>
+            </a:pPr>
+            <a:r>
+              <a:rPr sz="2000" b="0">
+                <a:solidFill>
+                  <a:srgbClr val="0B0B0B"/>
+                </a:solidFill>
+                <a:latin typeface="Calibri"/>
+              </a:rPr>
+              <a:t>A data-driven model that carries its own uncertainty is built for this. Next lecture: Gaussian Processes and Bayesian optimization.</a:t>
             </a:r>
           </a:p>
         </p:txBody>
@@ -6804,7 +6722,7 @@
 </file>
 
 <file path=ppt/slides/slide25.xml><?xml version="1.0" encoding="utf-8"?>
-<p:sld xmlns:a="http://schemas.openxmlformats.org/drawingml/2006/main" xmlns:r="http://schemas.openxmlformats.org/officeDocument/2006/relationships" xmlns:p="http://schemas.openxmlformats.org/presentationml/2006/main">
+<p:sld xmlns:a="http://schemas.openxmlformats.org/drawingml/2006/main" xmlns:p="http://schemas.openxmlformats.org/presentationml/2006/main" xmlns:r="http://schemas.openxmlformats.org/officeDocument/2006/relationships">
   <p:cSld>
     <p:bg>
       <p:bgPr>
@@ -6820,14 +6738,7 @@
         <p:cNvGrpSpPr/>
         <p:nvPr/>
       </p:nvGrpSpPr>
-      <p:grpSpPr>
-        <a:xfrm>
-          <a:off x="0" y="0"/>
-          <a:ext cx="0" cy="0"/>
-          <a:chOff x="0" y="0"/>
-          <a:chExt cx="0" cy="0"/>
-        </a:xfrm>
-      </p:grpSpPr>
+      <p:grpSpPr/>
       <p:sp>
         <p:nvSpPr>
           <p:cNvPr id="2" name="TextBox 1"/>
@@ -6862,7 +6773,7 @@
                 </a:solidFill>
                 <a:latin typeface="Calibri"/>
               </a:rPr>
-              <a:t>Before next time: Pre-lab 1</a:t>
+              <a:t>The loop this module runs</a:t>
             </a:r>
           </a:p>
         </p:txBody>
@@ -6908,20 +6819,43 @@
           <a:lstStyle/>
           <a:p>
             <a:pPr algn="ctr"/>
-            <a:endParaRPr/>
-          </a:p>
-        </p:txBody>
-      </p:sp>
-      <p:sp>
-        <p:nvSpPr>
-          <p:cNvPr id="4" name="TextBox 3"/>
+          </a:p>
+        </p:txBody>
+      </p:sp>
+      <p:pic>
+        <p:nvPicPr>
+          <p:cNvPr id="4" name="Picture 3" descr="fig_workflow_end2end.png"/>
+          <p:cNvPicPr>
+            <a:picLocks noChangeAspect="1"/>
+          </p:cNvPicPr>
+          <p:nvPr/>
+        </p:nvPicPr>
+        <p:blipFill>
+          <a:blip r:embed="rId2"/>
+          <a:stretch>
+            <a:fillRect/>
+          </a:stretch>
+        </p:blipFill>
+        <p:spPr>
+          <a:xfrm>
+            <a:off x="792327" y="1371600"/>
+            <a:ext cx="10607040" cy="3650993"/>
+          </a:xfrm>
+          <a:prstGeom prst="rect">
+            <a:avLst/>
+          </a:prstGeom>
+        </p:spPr>
+      </p:pic>
+      <p:sp>
+        <p:nvSpPr>
+          <p:cNvPr id="5" name="TextBox 4"/>
           <p:cNvSpPr txBox="1"/>
           <p:nvPr/>
         </p:nvSpPr>
         <p:spPr>
           <a:xfrm>
-            <a:off x="868680" y="1554480"/>
-            <a:ext cx="10424160" cy="4754880"/>
+            <a:off x="822960" y="5095745"/>
+            <a:ext cx="10607040" cy="548640"/>
           </a:xfrm>
           <a:prstGeom prst="rect">
             <a:avLst/>
@@ -6934,115 +6868,19 @@
           </a:bodyPr>
           <a:lstStyle/>
           <a:p>
-            <a:pPr algn="l">
-              <a:spcAft>
-                <a:spcPts val="1200"/>
-              </a:spcAft>
-            </a:pPr>
-            <a:r>
-              <a:rPr sz="2000" b="0">
-                <a:solidFill>
-                  <a:srgbClr val="0B0B0B"/>
-                </a:solidFill>
-                <a:latin typeface="Calibri"/>
-              </a:rPr>
-              <a:t>In ME323_Module1_Prelab1_FailureModes:</a:t>
-            </a:r>
-          </a:p>
-          <a:p>
-            <a:pPr lvl="1" algn="l">
-              <a:spcAft>
-                <a:spcPts val="1200"/>
-              </a:spcAft>
-            </a:pPr>
-            <a:r>
-              <a:rPr sz="1800" b="0">
-                <a:solidFill>
-                  <a:srgbClr val="0B0B0B"/>
-                </a:solidFill>
-                <a:latin typeface="Calibri"/>
-              </a:rPr>
-              <a:t>•  reduce four raw force-displacement traces to strength — including deciding what beam 9's "twisted off the test stand" peak really measures,</a:t>
-            </a:r>
-          </a:p>
-          <a:p>
-            <a:pPr lvl="1" algn="l">
-              <a:spcAft>
-                <a:spcPts val="1200"/>
-              </a:spcAft>
-            </a:pPr>
-            <a:r>
-              <a:rPr sz="1800" b="0">
-                <a:solidFill>
-                  <a:srgbClr val="0B0B0B"/>
-                </a:solidFill>
-                <a:latin typeface="Calibri"/>
-              </a:rPr>
-              <a:t>•  load the beam data, compute strength-to-weight,</a:t>
-            </a:r>
-          </a:p>
-          <a:p>
-            <a:pPr lvl="1" algn="l">
-              <a:spcAft>
-                <a:spcPts val="1200"/>
-              </a:spcAft>
-            </a:pPr>
-            <a:r>
-              <a:rPr sz="1800" b="0">
-                <a:solidFill>
-                  <a:srgbClr val="0B0B0B"/>
-                </a:solidFill>
-                <a:latin typeface="Calibri"/>
-              </a:rPr>
-              <a:t>•  code flexural yield and the junction shear-flow separation check (start tau_i at the bulk guess 43.9 MPa),</a:t>
-            </a:r>
-          </a:p>
-          <a:p>
-            <a:pPr lvl="1" algn="l">
-              <a:spcAft>
-                <a:spcPts val="1200"/>
-              </a:spcAft>
-            </a:pPr>
-            <a:r>
-              <a:rPr sz="1800" b="0">
-                <a:solidFill>
-                  <a:srgbClr val="0B0B0B"/>
-                </a:solidFill>
-                <a:latin typeface="Calibri"/>
-              </a:rPr>
-              <a:t>•  compare dominant-mode proxies with measured strengths and failure notes, then calibrate (sigma_y, k, tau_i),</a:t>
-            </a:r>
-          </a:p>
-          <a:p>
-            <a:pPr lvl="1" algn="l">
-              <a:spcAft>
-                <a:spcPts val="1200"/>
-              </a:spcAft>
-            </a:pPr>
-            <a:r>
-              <a:rPr sz="1800" b="0">
-                <a:solidFill>
-                  <a:srgbClr val="0B0B0B"/>
-                </a:solidFill>
-                <a:latin typeface="Calibri"/>
-              </a:rPr>
-              <a:t>•  optimize strength-to-weight.</a:t>
-            </a:r>
-          </a:p>
-          <a:p>
-            <a:pPr algn="l">
-              <a:spcAft>
-                <a:spcPts val="1200"/>
-              </a:spcAft>
-            </a:pPr>
-            <a:r>
-              <a:rPr sz="2000" b="0">
-                <a:solidFill>
-                  <a:srgbClr val="0B0B0B"/>
-                </a:solidFill>
-                <a:latin typeface="Calibri"/>
-              </a:rPr>
-              <a:t>The design you find there becomes one of the class's two ground-truth queries later — the pre-lab explains how those queries work. Bring questions.</a:t>
+            <a:pPr algn="ctr">
+              <a:spcAft>
+                <a:spcPts val="600"/>
+              </a:spcAft>
+            </a:pPr>
+            <a:r>
+              <a:rPr sz="1500" b="0">
+                <a:solidFill>
+                  <a:srgbClr val="0B0B0B"/>
+                </a:solidFill>
+                <a:latin typeface="Calibri"/>
+              </a:rPr>
+              <a:t>Physics says what should happen and where failure lives. The data model says what the tests support and where we're still uncertain. Your judgment decides what to build. The test says what we got wrong.</a:t>
             </a:r>
           </a:p>
         </p:txBody>
@@ -7055,8 +6893,8 @@
 </p:sld>
 </file>
 
-<file path=ppt/slides/slide3.xml><?xml version="1.0" encoding="utf-8"?>
-<p:sld xmlns:a="http://schemas.openxmlformats.org/drawingml/2006/main" xmlns:r="http://schemas.openxmlformats.org/officeDocument/2006/relationships" xmlns:p="http://schemas.openxmlformats.org/presentationml/2006/main">
+<file path=ppt/slides/slide26.xml><?xml version="1.0" encoding="utf-8"?>
+<p:sld xmlns:a="http://schemas.openxmlformats.org/drawingml/2006/main" xmlns:p="http://schemas.openxmlformats.org/presentationml/2006/main" xmlns:r="http://schemas.openxmlformats.org/officeDocument/2006/relationships">
   <p:cSld>
     <p:bg>
       <p:bgPr>
@@ -7072,14 +6910,7 @@
         <p:cNvGrpSpPr/>
         <p:nvPr/>
       </p:nvGrpSpPr>
-      <p:grpSpPr>
-        <a:xfrm>
-          <a:off x="0" y="0"/>
-          <a:ext cx="0" cy="0"/>
-          <a:chOff x="0" y="0"/>
-          <a:chExt cx="0" cy="0"/>
-        </a:xfrm>
-      </p:grpSpPr>
+      <p:grpSpPr/>
       <p:sp>
         <p:nvSpPr>
           <p:cNvPr id="2" name="TextBox 1"/>
@@ -7114,7 +6945,7 @@
                 </a:solidFill>
                 <a:latin typeface="Calibri"/>
               </a:rPr>
-              <a:t>The challenge</a:t>
+              <a:t>Before next time: Pre-lab 1</a:t>
             </a:r>
           </a:p>
         </p:txBody>
@@ -7160,34 +6991,144 @@
           <a:lstStyle/>
           <a:p>
             <a:pPr algn="ctr"/>
-            <a:endParaRPr/>
-          </a:p>
-        </p:txBody>
-      </p:sp>
-      <p:pic>
-        <p:nvPicPr>
-          <p:cNvPr id="4" name="Picture 3" descr="fig_isection.png"/>
-          <p:cNvPicPr>
-            <a:picLocks noChangeAspect="1"/>
-          </p:cNvPicPr>
-          <p:nvPr/>
-        </p:nvPicPr>
-        <p:blipFill>
-          <a:blip r:embed="rId2"/>
-          <a:stretch>
-            <a:fillRect/>
-          </a:stretch>
-        </p:blipFill>
-        <p:spPr>
-          <a:xfrm>
-            <a:off x="3992727" y="1371600"/>
-            <a:ext cx="4206240" cy="4206240"/>
-          </a:xfrm>
-          <a:prstGeom prst="rect">
-            <a:avLst/>
-          </a:prstGeom>
-        </p:spPr>
-      </p:pic>
+          </a:p>
+        </p:txBody>
+      </p:sp>
+      <p:sp>
+        <p:nvSpPr>
+          <p:cNvPr id="4" name="TextBox 3"/>
+          <p:cNvSpPr txBox="1"/>
+          <p:nvPr/>
+        </p:nvSpPr>
+        <p:spPr>
+          <a:xfrm>
+            <a:off x="868680" y="1554480"/>
+            <a:ext cx="10424160" cy="4754880"/>
+          </a:xfrm>
+          <a:prstGeom prst="rect">
+            <a:avLst/>
+          </a:prstGeom>
+          <a:noFill/>
+        </p:spPr>
+        <p:txBody>
+          <a:bodyPr wrap="square" anchor="t">
+            <a:spAutoFit/>
+          </a:bodyPr>
+          <a:lstStyle/>
+          <a:p>
+            <a:pPr algn="l">
+              <a:spcAft>
+                <a:spcPts val="1200"/>
+              </a:spcAft>
+            </a:pPr>
+            <a:r>
+              <a:rPr sz="2000" b="0">
+                <a:solidFill>
+                  <a:srgbClr val="0B0B0B"/>
+                </a:solidFill>
+                <a:latin typeface="Calibri"/>
+              </a:rPr>
+              <a:t>In ME323_Module1_Prelab1_FailureModes:</a:t>
+            </a:r>
+          </a:p>
+          <a:p>
+            <a:pPr algn="l" lvl="1">
+              <a:spcAft>
+                <a:spcPts val="1200"/>
+              </a:spcAft>
+            </a:pPr>
+            <a:r>
+              <a:rPr sz="1800" b="0">
+                <a:solidFill>
+                  <a:srgbClr val="0B0B0B"/>
+                </a:solidFill>
+                <a:latin typeface="Calibri"/>
+              </a:rPr>
+              <a:t>•  reduce four raw force-displacement traces to strength — including deciding what beam 9's "twisted off the test stand" peak really measures,</a:t>
+            </a:r>
+          </a:p>
+          <a:p>
+            <a:pPr algn="l" lvl="1">
+              <a:spcAft>
+                <a:spcPts val="1200"/>
+              </a:spcAft>
+            </a:pPr>
+            <a:r>
+              <a:rPr sz="1800" b="0">
+                <a:solidFill>
+                  <a:srgbClr val="0B0B0B"/>
+                </a:solidFill>
+                <a:latin typeface="Calibri"/>
+              </a:rPr>
+              <a:t>•  load the beam data, compute strength-to-weight,</a:t>
+            </a:r>
+          </a:p>
+          <a:p>
+            <a:pPr algn="l" lvl="1">
+              <a:spcAft>
+                <a:spcPts val="1200"/>
+              </a:spcAft>
+            </a:pPr>
+            <a:r>
+              <a:rPr sz="1800" b="0">
+                <a:solidFill>
+                  <a:srgbClr val="0B0B0B"/>
+                </a:solidFill>
+                <a:latin typeface="Calibri"/>
+              </a:rPr>
+              <a:t>•  code flexural yield and the junction shear-flow separation check (start tau_i at the bulk guess 43.9 MPa),</a:t>
+            </a:r>
+          </a:p>
+          <a:p>
+            <a:pPr algn="l" lvl="1">
+              <a:spcAft>
+                <a:spcPts val="1200"/>
+              </a:spcAft>
+            </a:pPr>
+            <a:r>
+              <a:rPr sz="1800" b="0">
+                <a:solidFill>
+                  <a:srgbClr val="0B0B0B"/>
+                </a:solidFill>
+                <a:latin typeface="Calibri"/>
+              </a:rPr>
+              <a:t>•  compare dominant-mode proxies with measured strengths and failure notes, then calibrate (sigma_y, k, tau_i),</a:t>
+            </a:r>
+          </a:p>
+          <a:p>
+            <a:pPr algn="l" lvl="1">
+              <a:spcAft>
+                <a:spcPts val="1200"/>
+              </a:spcAft>
+            </a:pPr>
+            <a:r>
+              <a:rPr sz="1800" b="0">
+                <a:solidFill>
+                  <a:srgbClr val="0B0B0B"/>
+                </a:solidFill>
+                <a:latin typeface="Calibri"/>
+              </a:rPr>
+              <a:t>•  optimize strength-to-weight.</a:t>
+            </a:r>
+          </a:p>
+          <a:p>
+            <a:pPr algn="l">
+              <a:spcAft>
+                <a:spcPts val="1200"/>
+              </a:spcAft>
+            </a:pPr>
+            <a:r>
+              <a:rPr sz="2000" b="0">
+                <a:solidFill>
+                  <a:srgbClr val="0B0B0B"/>
+                </a:solidFill>
+                <a:latin typeface="Calibri"/>
+              </a:rPr>
+              <a:t>The design you find there becomes one of the class's two ground-truth queries later — the pre-lab explains how those queries work. Bring questions.</a:t>
+            </a:r>
+          </a:p>
+        </p:txBody>
+      </p:sp>
     </p:spTree>
   </p:cSld>
   <p:clrMapOvr>
@@ -7196,8 +7137,8 @@
 </p:sld>
 </file>
 
-<file path=ppt/slides/slide4.xml><?xml version="1.0" encoding="utf-8"?>
-<p:sld xmlns:a="http://schemas.openxmlformats.org/drawingml/2006/main" xmlns:r="http://schemas.openxmlformats.org/officeDocument/2006/relationships" xmlns:p="http://schemas.openxmlformats.org/presentationml/2006/main">
+<file path=ppt/slides/slide3.xml><?xml version="1.0" encoding="utf-8"?>
+<p:sld xmlns:a="http://schemas.openxmlformats.org/drawingml/2006/main" xmlns:p="http://schemas.openxmlformats.org/presentationml/2006/main" xmlns:r="http://schemas.openxmlformats.org/officeDocument/2006/relationships">
   <p:cSld>
     <p:bg>
       <p:bgPr>
@@ -7213,14 +7154,7 @@
         <p:cNvGrpSpPr/>
         <p:nvPr/>
       </p:nvGrpSpPr>
-      <p:grpSpPr>
-        <a:xfrm>
-          <a:off x="0" y="0"/>
-          <a:ext cx="0" cy="0"/>
-          <a:chOff x="0" y="0"/>
-          <a:chExt cx="0" cy="0"/>
-        </a:xfrm>
-      </p:grpSpPr>
+      <p:grpSpPr/>
       <p:sp>
         <p:nvSpPr>
           <p:cNvPr id="2" name="TextBox 1"/>
@@ -7255,7 +7189,7 @@
                 </a:solidFill>
                 <a:latin typeface="Calibri"/>
               </a:rPr>
-              <a:t>Why this is hard</a:t>
+              <a:t>The challenge</a:t>
             </a:r>
           </a:p>
         </p:txBody>
@@ -7301,113 +7235,33 @@
           <a:lstStyle/>
           <a:p>
             <a:pPr algn="ctr"/>
-            <a:endParaRPr/>
-          </a:p>
-        </p:txBody>
-      </p:sp>
-      <p:sp>
-        <p:nvSpPr>
-          <p:cNvPr id="4" name="TextBox 3"/>
-          <p:cNvSpPr txBox="1"/>
-          <p:nvPr/>
-        </p:nvSpPr>
-        <p:spPr>
-          <a:xfrm>
-            <a:off x="868680" y="1554480"/>
-            <a:ext cx="10424160" cy="4754880"/>
-          </a:xfrm>
-          <a:prstGeom prst="rect">
-            <a:avLst/>
-          </a:prstGeom>
-          <a:noFill/>
-        </p:spPr>
-        <p:txBody>
-          <a:bodyPr wrap="square" anchor="t">
-            <a:spAutoFit/>
-          </a:bodyPr>
-          <a:lstStyle/>
-          <a:p>
-            <a:pPr algn="l">
-              <a:spcAft>
-                <a:spcPts val="1200"/>
-              </a:spcAft>
-            </a:pPr>
-            <a:r>
-              <a:rPr sz="2000" b="0">
-                <a:solidFill>
-                  <a:srgbClr val="0B0B0B"/>
-                </a:solidFill>
-                <a:latin typeface="Calibri"/>
-              </a:rPr>
-              <a:t>Three things stand between you and a clean optimization:</a:t>
-            </a:r>
-          </a:p>
-          <a:p>
-            <a:pPr lvl="1" algn="l">
-              <a:spcAft>
-                <a:spcPts val="1200"/>
-              </a:spcAft>
-            </a:pPr>
-            <a:r>
-              <a:rPr sz="1800" b="0">
-                <a:solidFill>
-                  <a:srgbClr val="0B0B0B"/>
-                </a:solidFill>
-                <a:latin typeface="Calibri"/>
-              </a:rPr>
-              <a:t>•  Printed beams can fracture along the layer lines: the flange peels off the web at a printed interface whose strength appears in no handbook.</a:t>
-            </a:r>
-          </a:p>
-          <a:p>
-            <a:pPr lvl="1" algn="l">
-              <a:spcAft>
-                <a:spcPts val="1200"/>
-              </a:spcAft>
-            </a:pPr>
-            <a:r>
-              <a:rPr sz="1800" b="0">
-                <a:solidFill>
-                  <a:srgbClr val="0B0B0B"/>
-                </a:solidFill>
-                <a:latin typeface="Calibri"/>
-              </a:rPr>
-              <a:t>•  Lateral-torsional buckling depends on the fixture, not just the beam.</a:t>
-            </a:r>
-          </a:p>
-          <a:p>
-            <a:pPr lvl="1" algn="l">
-              <a:spcAft>
-                <a:spcPts val="1200"/>
-              </a:spcAft>
-            </a:pPr>
-            <a:r>
-              <a:rPr sz="1800" b="0">
-                <a:solidFill>
-                  <a:srgbClr val="0B0B0B"/>
-                </a:solidFill>
-                <a:latin typeface="Calibri"/>
-              </a:rPr>
-              <a:t>•  The failure modes overlap. Real beams fail in mixed, progressive ways.</a:t>
-            </a:r>
-          </a:p>
-          <a:p>
-            <a:pPr algn="l">
-              <a:spcAft>
-                <a:spcPts val="1200"/>
-              </a:spcAft>
-            </a:pPr>
-            <a:r>
-              <a:rPr sz="2000" b="0">
-                <a:solidFill>
-                  <a:srgbClr val="0B0B0B"/>
-                </a:solidFill>
-                <a:latin typeface="Calibri"/>
-              </a:rPr>
-              <a:t>We will price the layer-line mode with one calibrated number — but that number drifts with print session and support condition, and the other two problems remain. The equations narrow the problem. They do not solve it.</a:t>
-            </a:r>
-          </a:p>
-        </p:txBody>
-      </p:sp>
+          </a:p>
+        </p:txBody>
+      </p:sp>
+      <p:pic>
+        <p:nvPicPr>
+          <p:cNvPr id="4" name="Picture 3" descr="fig_isection.png"/>
+          <p:cNvPicPr>
+            <a:picLocks noChangeAspect="1"/>
+          </p:cNvPicPr>
+          <p:nvPr/>
+        </p:nvPicPr>
+        <p:blipFill>
+          <a:blip r:embed="rId2"/>
+          <a:stretch>
+            <a:fillRect/>
+          </a:stretch>
+        </p:blipFill>
+        <p:spPr>
+          <a:xfrm>
+            <a:off x="3992727" y="1371600"/>
+            <a:ext cx="4206240" cy="4206240"/>
+          </a:xfrm>
+          <a:prstGeom prst="rect">
+            <a:avLst/>
+          </a:prstGeom>
+        </p:spPr>
+      </p:pic>
     </p:spTree>
   </p:cSld>
   <p:clrMapOvr>
@@ -7416,8 +7270,8 @@
 </p:sld>
 </file>
 
-<file path=ppt/slides/slide5.xml><?xml version="1.0" encoding="utf-8"?>
-<p:sld xmlns:a="http://schemas.openxmlformats.org/drawingml/2006/main" xmlns:r="http://schemas.openxmlformats.org/officeDocument/2006/relationships" xmlns:p="http://schemas.openxmlformats.org/presentationml/2006/main">
+<file path=ppt/slides/slide4.xml><?xml version="1.0" encoding="utf-8"?>
+<p:sld xmlns:a="http://schemas.openxmlformats.org/drawingml/2006/main" xmlns:p="http://schemas.openxmlformats.org/presentationml/2006/main" xmlns:r="http://schemas.openxmlformats.org/officeDocument/2006/relationships">
   <p:cSld>
     <p:bg>
       <p:bgPr>
@@ -7433,14 +7287,7 @@
         <p:cNvGrpSpPr/>
         <p:nvPr/>
       </p:nvGrpSpPr>
-      <p:grpSpPr>
-        <a:xfrm>
-          <a:off x="0" y="0"/>
-          <a:ext cx="0" cy="0"/>
-          <a:chOff x="0" y="0"/>
-          <a:chExt cx="0" cy="0"/>
-        </a:xfrm>
-      </p:grpSpPr>
+      <p:grpSpPr/>
       <p:sp>
         <p:nvSpPr>
           <p:cNvPr id="2" name="TextBox 1"/>
@@ -7475,7 +7322,7 @@
                 </a:solidFill>
                 <a:latin typeface="Calibri"/>
               </a:rPr>
-              <a:t>Three modeled capacity branches</a:t>
+              <a:t>Why this is hard</a:t>
             </a:r>
           </a:p>
         </p:txBody>
@@ -7521,7 +7368,6 @@
           <a:lstStyle/>
           <a:p>
             <a:pPr algn="ctr"/>
-            <a:endParaRPr/>
           </a:p>
         </p:txBody>
       </p:sp>
@@ -7547,51 +7393,67 @@
           </a:bodyPr>
           <a:lstStyle/>
           <a:p>
-            <a:pPr lvl="1" algn="l">
+            <a:pPr algn="l">
               <a:spcAft>
                 <a:spcPts val="1200"/>
               </a:spcAft>
             </a:pPr>
             <a:r>
-              <a:rPr sz="1900" b="0">
-                <a:solidFill>
-                  <a:srgbClr val="0B0B0B"/>
-                </a:solidFill>
-                <a:latin typeface="Calibri"/>
-              </a:rPr>
-              <a:t>•  Bending: the beam yields in flexure.</a:t>
-            </a:r>
-          </a:p>
-          <a:p>
-            <a:pPr lvl="1" algn="l">
+              <a:rPr sz="2000" b="0">
+                <a:solidFill>
+                  <a:srgbClr val="0B0B0B"/>
+                </a:solidFill>
+                <a:latin typeface="Calibri"/>
+              </a:rPr>
+              <a:t>Three things stand between you and a clean optimization:</a:t>
+            </a:r>
+          </a:p>
+          <a:p>
+            <a:pPr algn="l" lvl="1">
               <a:spcAft>
                 <a:spcPts val="1200"/>
               </a:spcAft>
             </a:pPr>
             <a:r>
-              <a:rPr sz="1900" b="0">
-                <a:solidFill>
-                  <a:srgbClr val="0B0B0B"/>
-                </a:solidFill>
-                <a:latin typeface="Calibri"/>
-              </a:rPr>
-              <a:t>•  Flange-web separation: the shear flow at the printed junction exceeds the layer-line bond strength.</a:t>
-            </a:r>
-          </a:p>
-          <a:p>
-            <a:pPr lvl="1" algn="l">
+              <a:rPr sz="1800" b="0">
+                <a:solidFill>
+                  <a:srgbClr val="0B0B0B"/>
+                </a:solidFill>
+                <a:latin typeface="Calibri"/>
+              </a:rPr>
+              <a:t>•  Printed beams can fracture along the layer lines: the flange peels off the web at a printed interface whose strength appears in no handbook.</a:t>
+            </a:r>
+          </a:p>
+          <a:p>
+            <a:pPr algn="l" lvl="1">
               <a:spcAft>
                 <a:spcPts val="1200"/>
               </a:spcAft>
             </a:pPr>
             <a:r>
-              <a:rPr sz="1900" b="0">
-                <a:solidFill>
-                  <a:srgbClr val="0B0B0B"/>
-                </a:solidFill>
-                <a:latin typeface="Calibri"/>
-              </a:rPr>
-              <a:t>•  Lateral-torsional buckling (LTB): the beam tips over sideways.</a:t>
+              <a:rPr sz="1800" b="0">
+                <a:solidFill>
+                  <a:srgbClr val="0B0B0B"/>
+                </a:solidFill>
+                <a:latin typeface="Calibri"/>
+              </a:rPr>
+              <a:t>•  Lateral-torsional buckling depends on the fixture, not just the beam.</a:t>
+            </a:r>
+          </a:p>
+          <a:p>
+            <a:pPr algn="l" lvl="1">
+              <a:spcAft>
+                <a:spcPts val="1200"/>
+              </a:spcAft>
+            </a:pPr>
+            <a:r>
+              <a:rPr sz="1800" b="0">
+                <a:solidFill>
+                  <a:srgbClr val="0B0B0B"/>
+                </a:solidFill>
+                <a:latin typeface="Calibri"/>
+              </a:rPr>
+              <a:t>•  The failure modes overlap. Real beams fail in mixed, progressive ways.</a:t>
             </a:r>
           </a:p>
           <a:p>
@@ -7601,13 +7463,13 @@
               </a:spcAft>
             </a:pPr>
             <a:r>
-              <a:rPr sz="2100" b="0">
-                <a:solidFill>
-                  <a:srgbClr val="0B0B0B"/>
-                </a:solidFill>
-                <a:latin typeface="Calibri"/>
-              </a:rPr>
-              <a:t>The class capacity is the plain minimum of the three. The dominant-mode label is a model proxy, not proof of the observed fracture.</a:t>
+              <a:rPr sz="2000" b="0">
+                <a:solidFill>
+                  <a:srgbClr val="0B0B0B"/>
+                </a:solidFill>
+                <a:latin typeface="Calibri"/>
+              </a:rPr>
+              <a:t>We will price the layer-line mode with one calibrated number — but that number drifts with print session and support condition, and the other two problems remain. The equations narrow the problem without solving it.</a:t>
             </a:r>
           </a:p>
         </p:txBody>
@@ -7620,8 +7482,8 @@
 </p:sld>
 </file>
 
-<file path=ppt/slides/slide6.xml><?xml version="1.0" encoding="utf-8"?>
-<p:sld xmlns:a="http://schemas.openxmlformats.org/drawingml/2006/main" xmlns:r="http://schemas.openxmlformats.org/officeDocument/2006/relationships" xmlns:p="http://schemas.openxmlformats.org/presentationml/2006/main">
+<file path=ppt/slides/slide5.xml><?xml version="1.0" encoding="utf-8"?>
+<p:sld xmlns:a="http://schemas.openxmlformats.org/drawingml/2006/main" xmlns:p="http://schemas.openxmlformats.org/presentationml/2006/main" xmlns:r="http://schemas.openxmlformats.org/officeDocument/2006/relationships">
   <p:cSld>
     <p:bg>
       <p:bgPr>
@@ -7637,14 +7499,7 @@
         <p:cNvGrpSpPr/>
         <p:nvPr/>
       </p:nvGrpSpPr>
-      <p:grpSpPr>
-        <a:xfrm>
-          <a:off x="0" y="0"/>
-          <a:ext cx="0" cy="0"/>
-          <a:chOff x="0" y="0"/>
-          <a:chExt cx="0" cy="0"/>
-        </a:xfrm>
-      </p:grpSpPr>
+      <p:grpSpPr/>
       <p:sp>
         <p:nvSpPr>
           <p:cNvPr id="2" name="TextBox 1"/>
@@ -7679,7 +7534,7 @@
                 </a:solidFill>
                 <a:latin typeface="Calibri"/>
               </a:rPr>
-              <a:t>Bending</a:t>
+              <a:t>Three modeled capacity branches</a:t>
             </a:r>
           </a:p>
         </p:txBody>
@@ -7725,58 +7580,96 @@
           <a:lstStyle/>
           <a:p>
             <a:pPr algn="ctr"/>
-            <a:endParaRPr/>
-          </a:p>
-        </p:txBody>
-      </p:sp>
-      <p:pic>
-        <p:nvPicPr>
-          <p:cNvPr id="4" name="Picture 3" descr="bend.png"/>
-          <p:cNvPicPr>
-            <a:picLocks noChangeAspect="1"/>
-          </p:cNvPicPr>
-          <p:nvPr/>
-        </p:nvPicPr>
-        <p:blipFill>
-          <a:blip r:embed="rId2"/>
-          <a:stretch>
-            <a:fillRect/>
-          </a:stretch>
-        </p:blipFill>
-        <p:spPr>
-          <a:xfrm>
-            <a:off x="4129523" y="1371600"/>
-            <a:ext cx="3932648" cy="777240"/>
-          </a:xfrm>
-          <a:prstGeom prst="rect">
-            <a:avLst/>
-          </a:prstGeom>
-        </p:spPr>
-      </p:pic>
-      <p:pic>
-        <p:nvPicPr>
-          <p:cNvPr id="5" name="Picture 4" descr="fig_bending_stress.png"/>
-          <p:cNvPicPr>
-            <a:picLocks noChangeAspect="1"/>
-          </p:cNvPicPr>
-          <p:nvPr/>
-        </p:nvPicPr>
-        <p:blipFill>
-          <a:blip r:embed="rId3"/>
-          <a:stretch>
-            <a:fillRect/>
-          </a:stretch>
-        </p:blipFill>
-        <p:spPr>
-          <a:xfrm>
-            <a:off x="3090254" y="2286000"/>
-            <a:ext cx="6011186" cy="3840480"/>
-          </a:xfrm>
-          <a:prstGeom prst="rect">
-            <a:avLst/>
-          </a:prstGeom>
-        </p:spPr>
-      </p:pic>
+          </a:p>
+        </p:txBody>
+      </p:sp>
+      <p:sp>
+        <p:nvSpPr>
+          <p:cNvPr id="4" name="TextBox 3"/>
+          <p:cNvSpPr txBox="1"/>
+          <p:nvPr/>
+        </p:nvSpPr>
+        <p:spPr>
+          <a:xfrm>
+            <a:off x="868680" y="1554480"/>
+            <a:ext cx="10424160" cy="4754880"/>
+          </a:xfrm>
+          <a:prstGeom prst="rect">
+            <a:avLst/>
+          </a:prstGeom>
+          <a:noFill/>
+        </p:spPr>
+        <p:txBody>
+          <a:bodyPr wrap="square" anchor="t">
+            <a:spAutoFit/>
+          </a:bodyPr>
+          <a:lstStyle/>
+          <a:p>
+            <a:pPr algn="l" lvl="1">
+              <a:spcAft>
+                <a:spcPts val="1200"/>
+              </a:spcAft>
+            </a:pPr>
+            <a:r>
+              <a:rPr sz="1900" b="0">
+                <a:solidFill>
+                  <a:srgbClr val="0B0B0B"/>
+                </a:solidFill>
+                <a:latin typeface="Calibri"/>
+              </a:rPr>
+              <a:t>•  Bending: the beam yields in flexure.</a:t>
+            </a:r>
+          </a:p>
+          <a:p>
+            <a:pPr algn="l" lvl="1">
+              <a:spcAft>
+                <a:spcPts val="1200"/>
+              </a:spcAft>
+            </a:pPr>
+            <a:r>
+              <a:rPr sz="1900" b="0">
+                <a:solidFill>
+                  <a:srgbClr val="0B0B0B"/>
+                </a:solidFill>
+                <a:latin typeface="Calibri"/>
+              </a:rPr>
+              <a:t>•  Flange-web separation: the shear flow at the printed junction exceeds the layer-line bond strength.</a:t>
+            </a:r>
+          </a:p>
+          <a:p>
+            <a:pPr algn="l" lvl="1">
+              <a:spcAft>
+                <a:spcPts val="1200"/>
+              </a:spcAft>
+            </a:pPr>
+            <a:r>
+              <a:rPr sz="1900" b="0">
+                <a:solidFill>
+                  <a:srgbClr val="0B0B0B"/>
+                </a:solidFill>
+                <a:latin typeface="Calibri"/>
+              </a:rPr>
+              <a:t>•  Lateral-torsional buckling (LTB): the beam tips over sideways.</a:t>
+            </a:r>
+          </a:p>
+          <a:p>
+            <a:pPr algn="l">
+              <a:spcAft>
+                <a:spcPts val="1200"/>
+              </a:spcAft>
+            </a:pPr>
+            <a:r>
+              <a:rPr sz="2100" b="0">
+                <a:solidFill>
+                  <a:srgbClr val="0B0B0B"/>
+                </a:solidFill>
+                <a:latin typeface="Calibri"/>
+              </a:rPr>
+              <a:t>The class capacity is the plain minimum of the three. The dominant-mode label is a model proxy, not proof of the observed fracture.</a:t>
+            </a:r>
+          </a:p>
+        </p:txBody>
+      </p:sp>
     </p:spTree>
   </p:cSld>
   <p:clrMapOvr>
@@ -7785,8 +7678,8 @@
 </p:sld>
 </file>
 
-<file path=ppt/slides/slide7.xml><?xml version="1.0" encoding="utf-8"?>
-<p:sld xmlns:a="http://schemas.openxmlformats.org/drawingml/2006/main" xmlns:r="http://schemas.openxmlformats.org/officeDocument/2006/relationships" xmlns:p="http://schemas.openxmlformats.org/presentationml/2006/main">
+<file path=ppt/slides/slide6.xml><?xml version="1.0" encoding="utf-8"?>
+<p:sld xmlns:a="http://schemas.openxmlformats.org/drawingml/2006/main" xmlns:p="http://schemas.openxmlformats.org/presentationml/2006/main" xmlns:r="http://schemas.openxmlformats.org/officeDocument/2006/relationships">
   <p:cSld>
     <p:bg>
       <p:bgPr>
@@ -7802,14 +7695,7 @@
         <p:cNvGrpSpPr/>
         <p:nvPr/>
       </p:nvGrpSpPr>
-      <p:grpSpPr>
-        <a:xfrm>
-          <a:off x="0" y="0"/>
-          <a:ext cx="0" cy="0"/>
-          <a:chOff x="0" y="0"/>
-          <a:chExt cx="0" cy="0"/>
-        </a:xfrm>
-      </p:grpSpPr>
+      <p:grpSpPr/>
       <p:sp>
         <p:nvSpPr>
           <p:cNvPr id="2" name="TextBox 1"/>
@@ -7844,7 +7730,7 @@
                 </a:solidFill>
                 <a:latin typeface="Calibri"/>
               </a:rPr>
-              <a:t>Why I-beams work</a:t>
+              <a:t>Bending</a:t>
             </a:r>
           </a:p>
         </p:txBody>
@@ -7890,13 +7776,12 @@
           <a:lstStyle/>
           <a:p>
             <a:pPr algn="ctr"/>
-            <a:endParaRPr/>
           </a:p>
         </p:txBody>
       </p:sp>
       <p:pic>
         <p:nvPicPr>
-          <p:cNvPr id="4" name="Picture 3" descr="ix_integral.png"/>
+          <p:cNvPr id="4" name="Picture 3" descr="bend.png"/>
           <p:cNvPicPr>
             <a:picLocks noChangeAspect="1"/>
           </p:cNvPicPr>
@@ -7910,101 +7795,38 @@
         </p:blipFill>
         <p:spPr>
           <a:xfrm>
-            <a:off x="3789433" y="2011680"/>
-            <a:ext cx="4612829" cy="1554479"/>
+            <a:off x="4129523" y="1371600"/>
+            <a:ext cx="3932648" cy="777240"/>
           </a:xfrm>
           <a:prstGeom prst="rect">
             <a:avLst/>
           </a:prstGeom>
         </p:spPr>
       </p:pic>
-      <p:sp>
-        <p:nvSpPr>
-          <p:cNvPr id="5" name="TextBox 4"/>
-          <p:cNvSpPr txBox="1"/>
-          <p:nvPr/>
-        </p:nvSpPr>
-        <p:spPr>
-          <a:xfrm>
-            <a:off x="1097280" y="4023360"/>
-            <a:ext cx="10058400" cy="1828800"/>
-          </a:xfrm>
-          <a:prstGeom prst="rect">
-            <a:avLst/>
-          </a:prstGeom>
-          <a:noFill/>
-        </p:spPr>
-        <p:txBody>
-          <a:bodyPr wrap="square" anchor="t">
-            <a:spAutoFit/>
-          </a:bodyPr>
-          <a:lstStyle/>
-          <a:p>
-            <a:pPr algn="ctr">
-              <a:spcAft>
-                <a:spcPts val="1000"/>
-              </a:spcAft>
-            </a:pPr>
-            <a:r>
-              <a:rPr sz="1900" b="0">
-                <a:solidFill>
-                  <a:srgbClr val="0B0B0B"/>
-                </a:solidFill>
-                <a:latin typeface="Calibri"/>
-              </a:rPr>
-              <a:t>Bending strength is carried by I_x, and I_x counts each bit of area by the square of its distance from the neutral axis.</a:t>
-            </a:r>
-          </a:p>
-          <a:p>
-            <a:pPr algn="ctr">
-              <a:spcAft>
-                <a:spcPts val="1000"/>
-              </a:spcAft>
-            </a:pPr>
-            <a:r>
-              <a:rPr sz="1900" b="0">
-                <a:solidFill>
-                  <a:srgbClr val="0B0B0B"/>
-                </a:solidFill>
-                <a:latin typeface="Calibri"/>
-              </a:rPr>
-              <a:t>Material at the edges earns its mass; material near the center barely helps.</a:t>
-            </a:r>
-          </a:p>
-          <a:p>
-            <a:pPr algn="ctr">
-              <a:spcAft>
-                <a:spcPts val="1000"/>
-              </a:spcAft>
-            </a:pPr>
-            <a:r>
-              <a:rPr sz="1900" b="0">
-                <a:solidFill>
-                  <a:srgbClr val="0B0B0B"/>
-                </a:solidFill>
-                <a:latin typeface="Calibri"/>
-              </a:rPr>
-              <a:t>So put the mass in flanges far out, top and bottom. The web holds them apart (sets the lever arm) and carries the shear.</a:t>
-            </a:r>
-          </a:p>
-          <a:p>
-            <a:pPr algn="ctr">
-              <a:spcAft>
-                <a:spcPts val="1000"/>
-              </a:spcAft>
-            </a:pPr>
-            <a:r>
-              <a:rPr sz="1900" b="0">
-                <a:solidFill>
-                  <a:srgbClr val="0B0B0B"/>
-                </a:solidFill>
-                <a:latin typeface="Calibri"/>
-              </a:rPr>
-              <a:t>Maximize I_x per gram: that is the strength-to-weight game this module plays.</a:t>
-            </a:r>
-          </a:p>
-        </p:txBody>
-      </p:sp>
+      <p:pic>
+        <p:nvPicPr>
+          <p:cNvPr id="5" name="Picture 4" descr="fig_bending_stress.png"/>
+          <p:cNvPicPr>
+            <a:picLocks noChangeAspect="1"/>
+          </p:cNvPicPr>
+          <p:nvPr/>
+        </p:nvPicPr>
+        <p:blipFill>
+          <a:blip r:embed="rId3"/>
+          <a:stretch>
+            <a:fillRect/>
+          </a:stretch>
+        </p:blipFill>
+        <p:spPr>
+          <a:xfrm>
+            <a:off x="3090254" y="2286000"/>
+            <a:ext cx="6011186" cy="3840480"/>
+          </a:xfrm>
+          <a:prstGeom prst="rect">
+            <a:avLst/>
+          </a:prstGeom>
+        </p:spPr>
+      </p:pic>
     </p:spTree>
   </p:cSld>
   <p:clrMapOvr>
@@ -8013,8 +7835,8 @@
 </p:sld>
 </file>
 
-<file path=ppt/slides/slide8.xml><?xml version="1.0" encoding="utf-8"?>
-<p:sld xmlns:a="http://schemas.openxmlformats.org/drawingml/2006/main" xmlns:r="http://schemas.openxmlformats.org/officeDocument/2006/relationships" xmlns:p="http://schemas.openxmlformats.org/presentationml/2006/main">
+<file path=ppt/slides/slide7.xml><?xml version="1.0" encoding="utf-8"?>
+<p:sld xmlns:a="http://schemas.openxmlformats.org/drawingml/2006/main" xmlns:p="http://schemas.openxmlformats.org/presentationml/2006/main" xmlns:r="http://schemas.openxmlformats.org/officeDocument/2006/relationships">
   <p:cSld>
     <p:bg>
       <p:bgPr>
@@ -8030,14 +7852,7 @@
         <p:cNvGrpSpPr/>
         <p:nvPr/>
       </p:nvGrpSpPr>
-      <p:grpSpPr>
-        <a:xfrm>
-          <a:off x="0" y="0"/>
-          <a:ext cx="0" cy="0"/>
-          <a:chOff x="0" y="0"/>
-          <a:chExt cx="0" cy="0"/>
-        </a:xfrm>
-      </p:grpSpPr>
+      <p:grpSpPr/>
       <p:sp>
         <p:nvSpPr>
           <p:cNvPr id="2" name="TextBox 1"/>
@@ -8072,7 +7887,7 @@
                 </a:solidFill>
                 <a:latin typeface="Calibri"/>
               </a:rPr>
-              <a:t>Same mass, more stiffness</a:t>
+              <a:t>Why I-beams work</a:t>
             </a:r>
           </a:p>
         </p:txBody>
@@ -8118,13 +7933,12 @@
           <a:lstStyle/>
           <a:p>
             <a:pPr algn="ctr"/>
-            <a:endParaRPr/>
           </a:p>
         </p:txBody>
       </p:sp>
       <p:pic>
         <p:nvPicPr>
-          <p:cNvPr id="4" name="Picture 3" descr="fig_why_ibeams.png"/>
+          <p:cNvPr id="4" name="Picture 3" descr="ix_integral.png"/>
           <p:cNvPicPr>
             <a:picLocks noChangeAspect="1"/>
           </p:cNvPicPr>
@@ -8138,8 +7952,8 @@
         </p:blipFill>
         <p:spPr>
           <a:xfrm>
-            <a:off x="1752447" y="1371600"/>
-            <a:ext cx="8686800" cy="4343400"/>
+            <a:off x="3789433" y="2011680"/>
+            <a:ext cx="4612829" cy="1554479"/>
           </a:xfrm>
           <a:prstGeom prst="rect">
             <a:avLst/>
@@ -8154,8 +7968,8 @@
         </p:nvSpPr>
         <p:spPr>
           <a:xfrm>
-            <a:off x="822960" y="5788152"/>
-            <a:ext cx="10607040" cy="548640"/>
+            <a:off x="1097280" y="4023360"/>
+            <a:ext cx="10058400" cy="1828800"/>
           </a:xfrm>
           <a:prstGeom prst="rect">
             <a:avLst/>
@@ -8170,56 +7984,65 @@
           <a:p>
             <a:pPr algn="ctr">
               <a:spcAft>
-                <a:spcPts val="600"/>
-              </a:spcAft>
-            </a:pPr>
-            <a:r>
-              <a:rPr sz="1500" b="0">
-                <a:solidFill>
-                  <a:srgbClr val="0B0B0B"/>
-                </a:solidFill>
-                <a:latin typeface="Calibri"/>
-              </a:rPr>
-              <a:t>Three sections of equal area. Relocating the same material to the flanges multiplies I_x.</a:t>
-            </a:r>
-          </a:p>
-        </p:txBody>
-      </p:sp>
-      <p:sp>
-        <p:nvSpPr>
-          <p:cNvPr id="6" name="TextBox 5"/>
-          <p:cNvSpPr txBox="1"/>
-          <p:nvPr/>
-        </p:nvSpPr>
-        <p:spPr>
-          <a:xfrm>
-            <a:off x="822960" y="6245352"/>
-            <a:ext cx="10607040" cy="365760"/>
-          </a:xfrm>
-          <a:prstGeom prst="rect">
-            <a:avLst/>
-          </a:prstGeom>
-          <a:noFill/>
-        </p:spPr>
-        <p:txBody>
-          <a:bodyPr wrap="square" anchor="t">
-            <a:spAutoFit/>
-          </a:bodyPr>
-          <a:lstStyle/>
+                <a:spcPts val="1000"/>
+              </a:spcAft>
+            </a:pPr>
+            <a:r>
+              <a:rPr sz="1900" b="0">
+                <a:solidFill>
+                  <a:srgbClr val="0B0B0B"/>
+                </a:solidFill>
+                <a:latin typeface="Calibri"/>
+              </a:rPr>
+              <a:t>Bending strength is carried by I_x, and I_x counts each bit of area by the square of its distance from the neutral axis.</a:t>
+            </a:r>
+          </a:p>
           <a:p>
             <a:pPr algn="ctr">
               <a:spcAft>
-                <a:spcPts val="600"/>
-              </a:spcAft>
-            </a:pPr>
-            <a:r>
-              <a:rPr sz="1150" b="0">
-                <a:solidFill>
-                  <a:srgbClr val="52514E"/>
-                </a:solidFill>
-                <a:latin typeface="Calibri"/>
-              </a:rPr>
-              <a:t>Even against a solid bar of the same height, the I-beam wins: its mass sits at the extreme fibers.</a:t>
+                <a:spcPts val="1000"/>
+              </a:spcAft>
+            </a:pPr>
+            <a:r>
+              <a:rPr sz="1900" b="0">
+                <a:solidFill>
+                  <a:srgbClr val="0B0B0B"/>
+                </a:solidFill>
+                <a:latin typeface="Calibri"/>
+              </a:rPr>
+              <a:t>Material at the edges earns its mass; material near the center barely helps.</a:t>
+            </a:r>
+          </a:p>
+          <a:p>
+            <a:pPr algn="ctr">
+              <a:spcAft>
+                <a:spcPts val="1000"/>
+              </a:spcAft>
+            </a:pPr>
+            <a:r>
+              <a:rPr sz="1900" b="0">
+                <a:solidFill>
+                  <a:srgbClr val="0B0B0B"/>
+                </a:solidFill>
+                <a:latin typeface="Calibri"/>
+              </a:rPr>
+              <a:t>So put the mass in flanges far out, top and bottom. The web holds them apart (sets the lever arm) and carries the shear.</a:t>
+            </a:r>
+          </a:p>
+          <a:p>
+            <a:pPr algn="ctr">
+              <a:spcAft>
+                <a:spcPts val="1000"/>
+              </a:spcAft>
+            </a:pPr>
+            <a:r>
+              <a:rPr sz="1900" b="0">
+                <a:solidFill>
+                  <a:srgbClr val="0B0B0B"/>
+                </a:solidFill>
+                <a:latin typeface="Calibri"/>
+              </a:rPr>
+              <a:t>Maximize I_x per gram: that is the strength-to-weight game this module plays.</a:t>
             </a:r>
           </a:p>
         </p:txBody>
@@ -8232,8 +8055,8 @@
 </p:sld>
 </file>
 
-<file path=ppt/slides/slide9.xml><?xml version="1.0" encoding="utf-8"?>
-<p:sld xmlns:a="http://schemas.openxmlformats.org/drawingml/2006/main" xmlns:r="http://schemas.openxmlformats.org/officeDocument/2006/relationships" xmlns:p="http://schemas.openxmlformats.org/presentationml/2006/main">
+<file path=ppt/slides/slide8.xml><?xml version="1.0" encoding="utf-8"?>
+<p:sld xmlns:a="http://schemas.openxmlformats.org/drawingml/2006/main" xmlns:p="http://schemas.openxmlformats.org/presentationml/2006/main" xmlns:r="http://schemas.openxmlformats.org/officeDocument/2006/relationships">
   <p:cSld>
     <p:bg>
       <p:bgPr>
@@ -8249,14 +8072,7 @@
         <p:cNvGrpSpPr/>
         <p:nvPr/>
       </p:nvGrpSpPr>
-      <p:grpSpPr>
-        <a:xfrm>
-          <a:off x="0" y="0"/>
-          <a:ext cx="0" cy="0"/>
-          <a:chOff x="0" y="0"/>
-          <a:chExt cx="0" cy="0"/>
-        </a:xfrm>
-      </p:grpSpPr>
+      <p:grpSpPr/>
       <p:sp>
         <p:nvSpPr>
           <p:cNvPr id="2" name="TextBox 1"/>
@@ -8291,7 +8107,7 @@
                 </a:solidFill>
                 <a:latin typeface="Calibri"/>
               </a:rPr>
-              <a:t>The catch</a:t>
+              <a:t>Same mass, more stiffness</a:t>
             </a:r>
           </a:p>
         </p:txBody>
@@ -8337,20 +8153,43 @@
           <a:lstStyle/>
           <a:p>
             <a:pPr algn="ctr"/>
-            <a:endParaRPr/>
-          </a:p>
-        </p:txBody>
-      </p:sp>
-      <p:sp>
-        <p:nvSpPr>
-          <p:cNvPr id="4" name="TextBox 3"/>
+          </a:p>
+        </p:txBody>
+      </p:sp>
+      <p:pic>
+        <p:nvPicPr>
+          <p:cNvPr id="4" name="Picture 3" descr="fig_why_ibeams.png"/>
+          <p:cNvPicPr>
+            <a:picLocks noChangeAspect="1"/>
+          </p:cNvPicPr>
+          <p:nvPr/>
+        </p:nvPicPr>
+        <p:blipFill>
+          <a:blip r:embed="rId2"/>
+          <a:stretch>
+            <a:fillRect/>
+          </a:stretch>
+        </p:blipFill>
+        <p:spPr>
+          <a:xfrm>
+            <a:off x="1752447" y="1371600"/>
+            <a:ext cx="8686800" cy="4343400"/>
+          </a:xfrm>
+          <a:prstGeom prst="rect">
+            <a:avLst/>
+          </a:prstGeom>
+        </p:spPr>
+      </p:pic>
+      <p:sp>
+        <p:nvSpPr>
+          <p:cNvPr id="5" name="TextBox 4"/>
           <p:cNvSpPr txBox="1"/>
           <p:nvPr/>
         </p:nvSpPr>
         <p:spPr>
           <a:xfrm>
-            <a:off x="868680" y="1554480"/>
-            <a:ext cx="10424160" cy="4754880"/>
+            <a:off x="822960" y="5788152"/>
+            <a:ext cx="10607040" cy="548640"/>
           </a:xfrm>
           <a:prstGeom prst="rect">
             <a:avLst/>
@@ -8363,8 +8202,195 @@
           </a:bodyPr>
           <a:lstStyle/>
           <a:p>
+            <a:pPr algn="ctr">
+              <a:spcAft>
+                <a:spcPts val="600"/>
+              </a:spcAft>
+            </a:pPr>
+            <a:r>
+              <a:rPr sz="1500" b="0">
+                <a:solidFill>
+                  <a:srgbClr val="0B0B0B"/>
+                </a:solidFill>
+                <a:latin typeface="Calibri"/>
+              </a:rPr>
+              <a:t>Three sections of equal area. Relocating the same material to the flanges multiplies I_x.</a:t>
+            </a:r>
+          </a:p>
+        </p:txBody>
+      </p:sp>
+      <p:sp>
+        <p:nvSpPr>
+          <p:cNvPr id="6" name="TextBox 5"/>
+          <p:cNvSpPr txBox="1"/>
+          <p:nvPr/>
+        </p:nvSpPr>
+        <p:spPr>
+          <a:xfrm>
+            <a:off x="822960" y="6245352"/>
+            <a:ext cx="10607040" cy="365760"/>
+          </a:xfrm>
+          <a:prstGeom prst="rect">
+            <a:avLst/>
+          </a:prstGeom>
+          <a:noFill/>
+        </p:spPr>
+        <p:txBody>
+          <a:bodyPr wrap="square" anchor="t">
+            <a:spAutoFit/>
+          </a:bodyPr>
+          <a:lstStyle/>
+          <a:p>
+            <a:pPr algn="ctr">
+              <a:spcAft>
+                <a:spcPts val="600"/>
+              </a:spcAft>
+            </a:pPr>
+            <a:r>
+              <a:rPr sz="1150" b="0">
+                <a:solidFill>
+                  <a:srgbClr val="52514E"/>
+                </a:solidFill>
+                <a:latin typeface="Calibri"/>
+              </a:rPr>
+              <a:t>Even against a solid bar of the same height, the I-beam wins: its mass sits at the extreme fibers.</a:t>
+            </a:r>
+          </a:p>
+        </p:txBody>
+      </p:sp>
+    </p:spTree>
+  </p:cSld>
+  <p:clrMapOvr>
+    <a:masterClrMapping/>
+  </p:clrMapOvr>
+</p:sld>
+</file>
+
+<file path=ppt/slides/slide9.xml><?xml version="1.0" encoding="utf-8"?>
+<p:sld xmlns:a="http://schemas.openxmlformats.org/drawingml/2006/main" xmlns:p="http://schemas.openxmlformats.org/presentationml/2006/main" xmlns:r="http://schemas.openxmlformats.org/officeDocument/2006/relationships">
+  <p:cSld>
+    <p:bg>
+      <p:bgPr>
+        <a:solidFill>
+          <a:srgbClr val="FCFCFB"/>
+        </a:solidFill>
+        <a:effectLst/>
+      </p:bgPr>
+    </p:bg>
+    <p:spTree>
+      <p:nvGrpSpPr>
+        <p:cNvPr id="1" name=""/>
+        <p:cNvGrpSpPr/>
+        <p:nvPr/>
+      </p:nvGrpSpPr>
+      <p:grpSpPr/>
+      <p:sp>
+        <p:nvSpPr>
+          <p:cNvPr id="2" name="TextBox 1"/>
+          <p:cNvSpPr txBox="1"/>
+          <p:nvPr/>
+        </p:nvSpPr>
+        <p:spPr>
+          <a:xfrm>
+            <a:off x="822960" y="384048"/>
+            <a:ext cx="10607040" cy="822960"/>
+          </a:xfrm>
+          <a:prstGeom prst="rect">
+            <a:avLst/>
+          </a:prstGeom>
+          <a:noFill/>
+        </p:spPr>
+        <p:txBody>
+          <a:bodyPr wrap="square" anchor="t">
+            <a:spAutoFit/>
+          </a:bodyPr>
+          <a:lstStyle/>
+          <a:p>
             <a:pPr algn="l">
               <a:spcAft>
+                <a:spcPts val="600"/>
+              </a:spcAft>
+            </a:pPr>
+            <a:r>
+              <a:rPr sz="3000" b="1">
+                <a:solidFill>
+                  <a:srgbClr val="0B0B0B"/>
+                </a:solidFill>
+                <a:latin typeface="Calibri"/>
+              </a:rPr>
+              <a:t>The catch</a:t>
+            </a:r>
+          </a:p>
+        </p:txBody>
+      </p:sp>
+      <p:sp>
+        <p:nvSpPr>
+          <p:cNvPr id="3" name="Rectangle 2"/>
+          <p:cNvSpPr/>
+          <p:nvPr/>
+        </p:nvSpPr>
+        <p:spPr>
+          <a:xfrm>
+            <a:off x="822960" y="1170432"/>
+            <a:ext cx="1463040" cy="54864"/>
+          </a:xfrm>
+          <a:prstGeom prst="rect">
+            <a:avLst/>
+          </a:prstGeom>
+          <a:solidFill>
+            <a:srgbClr val="2A78D6"/>
+          </a:solidFill>
+          <a:ln>
+            <a:noFill/>
+          </a:ln>
+          <a:effectLst/>
+        </p:spPr>
+        <p:style>
+          <a:lnRef idx="1">
+            <a:schemeClr val="accent1"/>
+          </a:lnRef>
+          <a:fillRef idx="3">
+            <a:schemeClr val="accent1"/>
+          </a:fillRef>
+          <a:effectRef idx="2">
+            <a:schemeClr val="accent1"/>
+          </a:effectRef>
+          <a:fontRef idx="minor">
+            <a:schemeClr val="lt1"/>
+          </a:fontRef>
+        </p:style>
+        <p:txBody>
+          <a:bodyPr rtlCol="0" anchor="ctr"/>
+          <a:lstStyle/>
+          <a:p>
+            <a:pPr algn="ctr"/>
+          </a:p>
+        </p:txBody>
+      </p:sp>
+      <p:sp>
+        <p:nvSpPr>
+          <p:cNvPr id="4" name="TextBox 3"/>
+          <p:cNvSpPr txBox="1"/>
+          <p:nvPr/>
+        </p:nvSpPr>
+        <p:spPr>
+          <a:xfrm>
+            <a:off x="868680" y="1554480"/>
+            <a:ext cx="10424160" cy="4754880"/>
+          </a:xfrm>
+          <a:prstGeom prst="rect">
+            <a:avLst/>
+          </a:prstGeom>
+          <a:noFill/>
+        </p:spPr>
+        <p:txBody>
+          <a:bodyPr wrap="square" anchor="t">
+            <a:spAutoFit/>
+          </a:bodyPr>
+          <a:lstStyle/>
+          <a:p>
+            <a:pPr algn="l">
+              <a:spcAft>
                 <a:spcPts val="1200"/>
               </a:spcAft>
             </a:pPr>
@@ -8395,7 +8421,7 @@
             </a:r>
           </a:p>
           <a:p>
-            <a:pPr lvl="1" algn="l">
+            <a:pPr algn="l" lvl="1">
               <a:spcAft>
                 <a:spcPts val="1200"/>
               </a:spcAft>
@@ -8411,7 +8437,7 @@
             </a:r>
           </a:p>
           <a:p>
-            <a:pPr lvl="1" algn="l">
+            <a:pPr algn="l" lvl="1">
               <a:spcAft>
                 <a:spcPts val="1200"/>
               </a:spcAft>
@@ -8439,7 +8465,7 @@
                 </a:solidFill>
                 <a:latin typeface="Calibri"/>
               </a:rPr>
-              <a:t>The efficient shape and the failure modes pull against each other. That tension is the design problem.</a:t>
+              <a:t>The efficient shape and the failure modes pull against each other; resolving that tension is the design problem.</a:t>
             </a:r>
           </a:p>
         </p:txBody>
